--- a/color_cooking_concept/filing_docs/patent_figures.pptx
+++ b/color_cooking_concept/filing_docs/patent_figures.pptx
@@ -3103,7 +3103,7 @@
         <p:spPr>
           <a:xfrm>
             <a:off x="360000" y="180000"/>
-            <a:ext cx="6480000" cy="540000"/>
+            <a:ext cx="8280000" cy="540000"/>
           </a:xfrm>
           <a:prstGeom prst="rect">
             <a:avLst/>
@@ -3118,8 +3118,12 @@
           <a:p>
             <a:pPr algn="ctr"/>
             <a:r>
-              <a:rPr sz="1400" b="1"/>
-              <a:t>【図1】調理タイミング判定装置の全体構成ブロック図</a:t>
+              <a:rPr sz="1400" b="1">
+                <a:solidFill>
+                  <a:srgbClr val="000000"/>
+                </a:solidFill>
+              </a:rPr>
+              <a:t>【図1】</a:t>
             </a:r>
           </a:p>
         </p:txBody>
@@ -3136,444 +3140,6 @@
             <a:ext cx="7920000" cy="5220000"/>
           </a:xfrm>
           <a:prstGeom prst="rect">
-            <a:avLst/>
-          </a:prstGeom>
-          <a:noFill/>
-          <a:ln w="19050">
-            <a:solidFill>
-              <a:srgbClr val="000000"/>
-            </a:solidFill>
-          </a:ln>
-        </p:spPr>
-        <p:style>
-          <a:lnRef idx="1">
-            <a:schemeClr val="accent1"/>
-          </a:lnRef>
-          <a:fillRef idx="3">
-            <a:schemeClr val="accent1"/>
-          </a:fillRef>
-          <a:effectRef idx="2">
-            <a:schemeClr val="accent1"/>
-          </a:effectRef>
-          <a:fontRef idx="minor">
-            <a:schemeClr val="lt1"/>
-          </a:fontRef>
-        </p:style>
-        <p:txBody>
-          <a:bodyPr rtlCol="0" anchor="ctr"/>
-          <a:lstStyle/>
-          <a:p>
-            <a:pPr algn="ctr"/>
-          </a:p>
-        </p:txBody>
-      </p:sp>
-      <p:sp>
-        <p:nvSpPr>
-          <p:cNvPr id="4" name="TextBox 3"/>
-          <p:cNvSpPr txBox="1"/>
-          <p:nvPr/>
-        </p:nvSpPr>
-        <p:spPr>
-          <a:xfrm>
-            <a:off x="720000" y="792000"/>
-            <a:ext cx="3600000" cy="288000"/>
-          </a:xfrm>
-          <a:prstGeom prst="rect">
-            <a:avLst/>
-          </a:prstGeom>
-          <a:noFill/>
-        </p:spPr>
-        <p:txBody>
-          <a:bodyPr wrap="square">
-            <a:spAutoFit/>
-          </a:bodyPr>
-          <a:lstStyle/>
-          <a:p>
-            <a:pPr algn="l"/>
-            <a:r>
-              <a:rPr sz="1100" b="1"/>
-              <a:t>調理タイミング判定装置 100</a:t>
-            </a:r>
-          </a:p>
-        </p:txBody>
-      </p:sp>
-      <p:sp>
-        <p:nvSpPr>
-          <p:cNvPr id="5" name="Rounded Rectangle 4"/>
-          <p:cNvSpPr/>
-          <p:nvPr/>
-        </p:nvSpPr>
-        <p:spPr>
-          <a:xfrm>
-            <a:off x="720000" y="1260000"/>
-            <a:ext cx="1800000" cy="1440000"/>
-          </a:xfrm>
-          <a:prstGeom prst="roundRect">
-            <a:avLst/>
-          </a:prstGeom>
-          <a:solidFill>
-            <a:srgbClr val="DBE5F1"/>
-          </a:solidFill>
-          <a:ln w="19050">
-            <a:solidFill>
-              <a:srgbClr val="000000"/>
-            </a:solidFill>
-          </a:ln>
-        </p:spPr>
-        <p:style>
-          <a:lnRef idx="1">
-            <a:schemeClr val="accent1"/>
-          </a:lnRef>
-          <a:fillRef idx="3">
-            <a:schemeClr val="accent1"/>
-          </a:fillRef>
-          <a:effectRef idx="2">
-            <a:schemeClr val="accent1"/>
-          </a:effectRef>
-          <a:fontRef idx="minor">
-            <a:schemeClr val="lt1"/>
-          </a:fontRef>
-        </p:style>
-        <p:txBody>
-          <a:bodyPr rtlCol="0" anchor="ctr" wrap="square" lIns="50800" rIns="50800" tIns="25400" bIns="25400"/>
-          <a:lstStyle/>
-          <a:p>
-            <a:pPr algn="ctr"/>
-            <a:r>
-              <a:rPr sz="900" b="0"/>
-              <a:t>色彩センサー部 110
-RGBCセンサー 111
-(TCS3472)
-白色LED照明 112</a:t>
-            </a:r>
-          </a:p>
-        </p:txBody>
-      </p:sp>
-      <p:sp>
-        <p:nvSpPr>
-          <p:cNvPr id="6" name="Rounded Rectangle 5"/>
-          <p:cNvSpPr/>
-          <p:nvPr/>
-        </p:nvSpPr>
-        <p:spPr>
-          <a:xfrm>
-            <a:off x="3060000" y="1260000"/>
-            <a:ext cx="2520000" cy="1440000"/>
-          </a:xfrm>
-          <a:prstGeom prst="roundRect">
-            <a:avLst/>
-          </a:prstGeom>
-          <a:solidFill>
-            <a:srgbClr val="E2EFDA"/>
-          </a:solidFill>
-          <a:ln w="19050">
-            <a:solidFill>
-              <a:srgbClr val="000000"/>
-            </a:solidFill>
-          </a:ln>
-        </p:spPr>
-        <p:style>
-          <a:lnRef idx="1">
-            <a:schemeClr val="accent1"/>
-          </a:lnRef>
-          <a:fillRef idx="3">
-            <a:schemeClr val="accent1"/>
-          </a:fillRef>
-          <a:effectRef idx="2">
-            <a:schemeClr val="accent1"/>
-          </a:effectRef>
-          <a:fontRef idx="minor">
-            <a:schemeClr val="lt1"/>
-          </a:fontRef>
-        </p:style>
-        <p:txBody>
-          <a:bodyPr rtlCol="0" anchor="ctr" wrap="square" lIns="50800" rIns="50800" tIns="25400" bIns="25400"/>
-          <a:lstStyle/>
-          <a:p>
-            <a:pPr algn="l"/>
-            <a:r>
-              <a:rPr sz="800" b="0"/>
-              <a:t>マイクロコントローラ部 120
-(ESP32-S3)
-・色空間変換 (RGB→XYZ→L*a*b*)
-・色差判定 (ΔE算出)
-・時系列追跡 (環状バッファ)
-・予測通知 (変化率推定)</a:t>
-            </a:r>
-          </a:p>
-        </p:txBody>
-      </p:sp>
-      <p:sp>
-        <p:nvSpPr>
-          <p:cNvPr id="7" name="Rounded Rectangle 6"/>
-          <p:cNvSpPr/>
-          <p:nvPr/>
-        </p:nvSpPr>
-        <p:spPr>
-          <a:xfrm>
-            <a:off x="720000" y="3060000"/>
-            <a:ext cx="1800000" cy="1260000"/>
-          </a:xfrm>
-          <a:prstGeom prst="roundRect">
-            <a:avLst/>
-          </a:prstGeom>
-          <a:solidFill>
-            <a:srgbClr val="FFF2CC"/>
-          </a:solidFill>
-          <a:ln w="19050">
-            <a:solidFill>
-              <a:srgbClr val="000000"/>
-            </a:solidFill>
-          </a:ln>
-        </p:spPr>
-        <p:style>
-          <a:lnRef idx="1">
-            <a:schemeClr val="accent1"/>
-          </a:lnRef>
-          <a:fillRef idx="3">
-            <a:schemeClr val="accent1"/>
-          </a:fillRef>
-          <a:effectRef idx="2">
-            <a:schemeClr val="accent1"/>
-          </a:effectRef>
-          <a:fontRef idx="minor">
-            <a:schemeClr val="lt1"/>
-          </a:fontRef>
-        </p:style>
-        <p:txBody>
-          <a:bodyPr rtlCol="0" anchor="ctr" wrap="square" lIns="50800" rIns="50800" tIns="25400" bIns="25400"/>
-          <a:lstStyle/>
-          <a:p>
-            <a:pPr algn="l"/>
-            <a:r>
-              <a:rPr sz="800" b="0"/>
-              <a:t>表示部 130
-(タッチスクリーン)
-・プリセット選択メニュー
-・ΔEプログレスバー
-・トレンドグラフ</a:t>
-            </a:r>
-          </a:p>
-        </p:txBody>
-      </p:sp>
-      <p:sp>
-        <p:nvSpPr>
-          <p:cNvPr id="8" name="Rounded Rectangle 7"/>
-          <p:cNvSpPr/>
-          <p:nvPr/>
-        </p:nvSpPr>
-        <p:spPr>
-          <a:xfrm>
-            <a:off x="3060000" y="3060000"/>
-            <a:ext cx="1620000" cy="1260000"/>
-          </a:xfrm>
-          <a:prstGeom prst="roundRect">
-            <a:avLst/>
-          </a:prstGeom>
-          <a:solidFill>
-            <a:srgbClr val="FCE4D6"/>
-          </a:solidFill>
-          <a:ln w="19050">
-            <a:solidFill>
-              <a:srgbClr val="000000"/>
-            </a:solidFill>
-          </a:ln>
-        </p:spPr>
-        <p:style>
-          <a:lnRef idx="1">
-            <a:schemeClr val="accent1"/>
-          </a:lnRef>
-          <a:fillRef idx="3">
-            <a:schemeClr val="accent1"/>
-          </a:fillRef>
-          <a:effectRef idx="2">
-            <a:schemeClr val="accent1"/>
-          </a:effectRef>
-          <a:fontRef idx="minor">
-            <a:schemeClr val="lt1"/>
-          </a:fontRef>
-        </p:style>
-        <p:txBody>
-          <a:bodyPr rtlCol="0" anchor="ctr" wrap="square" lIns="50800" rIns="50800" tIns="25400" bIns="25400"/>
-          <a:lstStyle/>
-          <a:p>
-            <a:pPr algn="l"/>
-            <a:r>
-              <a:rPr sz="800" b="0"/>
-              <a:t>通知部 140
-・スピーカー
-  (880Hz/1100Hz)
-・Wi-Fi/BLE</a:t>
-            </a:r>
-          </a:p>
-        </p:txBody>
-      </p:sp>
-      <p:sp>
-        <p:nvSpPr>
-          <p:cNvPr id="9" name="Rounded Rectangle 8"/>
-          <p:cNvSpPr/>
-          <p:nvPr/>
-        </p:nvSpPr>
-        <p:spPr>
-          <a:xfrm>
-            <a:off x="5220000" y="3060000"/>
-            <a:ext cx="2700000" cy="1260000"/>
-          </a:xfrm>
-          <a:prstGeom prst="roundRect">
-            <a:avLst/>
-          </a:prstGeom>
-          <a:solidFill>
-            <a:srgbClr val="F2F2F2"/>
-          </a:solidFill>
-          <a:ln w="19050">
-            <a:solidFill>
-              <a:srgbClr val="000000"/>
-            </a:solidFill>
-          </a:ln>
-        </p:spPr>
-        <p:style>
-          <a:lnRef idx="1">
-            <a:schemeClr val="accent1"/>
-          </a:lnRef>
-          <a:fillRef idx="3">
-            <a:schemeClr val="accent1"/>
-          </a:fillRef>
-          <a:effectRef idx="2">
-            <a:schemeClr val="accent1"/>
-          </a:effectRef>
-          <a:fontRef idx="minor">
-            <a:schemeClr val="lt1"/>
-          </a:fontRef>
-        </p:style>
-        <p:txBody>
-          <a:bodyPr rtlCol="0" anchor="ctr" wrap="square" lIns="50800" rIns="50800" tIns="25400" bIns="25400"/>
-          <a:lstStyle/>
-          <a:p>
-            <a:pPr algn="l"/>
-            <a:r>
-              <a:rPr sz="800" b="0"/>
-              <a:t>記憶部 150
-(不揮発性メモリ)
-目標色プリセット辞書:
- きつね色 [68.5, 12.3, 42.1]
- 飴色    [73.2,  8.7, 38.5]
- ハシバミ色 [65.0, 10.1, 30.2]</a:t>
-            </a:r>
-          </a:p>
-        </p:txBody>
-      </p:sp>
-      <p:sp>
-        <p:nvSpPr>
-          <p:cNvPr id="10" name="Rounded Rectangle 9"/>
-          <p:cNvSpPr/>
-          <p:nvPr/>
-        </p:nvSpPr>
-        <p:spPr>
-          <a:xfrm>
-            <a:off x="5940000" y="1260000"/>
-            <a:ext cx="1800000" cy="900000"/>
-          </a:xfrm>
-          <a:prstGeom prst="roundRect">
-            <a:avLst/>
-          </a:prstGeom>
-          <a:solidFill>
-            <a:srgbClr val="FFF2CC"/>
-          </a:solidFill>
-          <a:ln w="19050">
-            <a:solidFill>
-              <a:srgbClr val="000000"/>
-            </a:solidFill>
-          </a:ln>
-        </p:spPr>
-        <p:style>
-          <a:lnRef idx="1">
-            <a:schemeClr val="accent1"/>
-          </a:lnRef>
-          <a:fillRef idx="3">
-            <a:schemeClr val="accent1"/>
-          </a:fillRef>
-          <a:effectRef idx="2">
-            <a:schemeClr val="accent1"/>
-          </a:effectRef>
-          <a:fontRef idx="minor">
-            <a:schemeClr val="lt1"/>
-          </a:fontRef>
-        </p:style>
-        <p:txBody>
-          <a:bodyPr rtlCol="0" anchor="ctr" wrap="square" lIns="50800" rIns="50800" tIns="25400" bIns="25400"/>
-          <a:lstStyle/>
-          <a:p>
-            <a:pPr algn="ctr"/>
-            <a:r>
-              <a:rPr sz="900" b="0"/>
-              <a:t>入力手段
-(タッチパネル)</a:t>
-            </a:r>
-          </a:p>
-        </p:txBody>
-      </p:sp>
-      <p:sp>
-        <p:nvSpPr>
-          <p:cNvPr id="11" name="Rounded Rectangle 10"/>
-          <p:cNvSpPr/>
-          <p:nvPr/>
-        </p:nvSpPr>
-        <p:spPr>
-          <a:xfrm>
-            <a:off x="720000" y="4860000"/>
-            <a:ext cx="1440000" cy="720000"/>
-          </a:xfrm>
-          <a:prstGeom prst="roundRect">
-            <a:avLst/>
-          </a:prstGeom>
-          <a:solidFill>
-            <a:srgbClr val="FFE0B2"/>
-          </a:solidFill>
-          <a:ln w="19050">
-            <a:solidFill>
-              <a:srgbClr val="000000"/>
-            </a:solidFill>
-          </a:ln>
-        </p:spPr>
-        <p:style>
-          <a:lnRef idx="1">
-            <a:schemeClr val="accent1"/>
-          </a:lnRef>
-          <a:fillRef idx="3">
-            <a:schemeClr val="accent1"/>
-          </a:fillRef>
-          <a:effectRef idx="2">
-            <a:schemeClr val="accent1"/>
-          </a:effectRef>
-          <a:fontRef idx="minor">
-            <a:schemeClr val="lt1"/>
-          </a:fontRef>
-        </p:style>
-        <p:txBody>
-          <a:bodyPr rtlCol="0" anchor="ctr" wrap="square" lIns="50800" rIns="50800" tIns="25400" bIns="25400"/>
-          <a:lstStyle/>
-          <a:p>
-            <a:pPr algn="ctr"/>
-            <a:r>
-              <a:rPr sz="900" b="0"/>
-              <a:t>食品表面
-(被計測対象)</a:t>
-            </a:r>
-          </a:p>
-        </p:txBody>
-      </p:sp>
-      <p:sp>
-        <p:nvSpPr>
-          <p:cNvPr id="12" name="Rounded Rectangle 11"/>
-          <p:cNvSpPr/>
-          <p:nvPr/>
-        </p:nvSpPr>
-        <p:spPr>
-          <a:xfrm>
-            <a:off x="2520000" y="4860000"/>
-            <a:ext cx="1440000" cy="720000"/>
-          </a:xfrm>
-          <a:prstGeom prst="roundRect">
             <a:avLst/>
           </a:prstGeom>
           <a:solidFill>
@@ -3600,28 +3166,23 @@
           </a:fontRef>
         </p:style>
         <p:txBody>
-          <a:bodyPr rtlCol="0" anchor="ctr" wrap="square" lIns="50800" rIns="50800" tIns="25400" bIns="25400"/>
+          <a:bodyPr rtlCol="0" anchor="ctr"/>
           <a:lstStyle/>
           <a:p>
             <a:pPr algn="ctr"/>
-            <a:r>
-              <a:rPr sz="900" b="0"/>
-              <a:t>白色基準面
-(キャリブレーション用)</a:t>
-            </a:r>
-          </a:p>
-        </p:txBody>
-      </p:sp>
-      <p:sp>
-        <p:nvSpPr>
-          <p:cNvPr id="13" name="TextBox 12"/>
+          </a:p>
+        </p:txBody>
+      </p:sp>
+      <p:sp>
+        <p:nvSpPr>
+          <p:cNvPr id="4" name="TextBox 3"/>
           <p:cNvSpPr txBox="1"/>
           <p:nvPr/>
         </p:nvSpPr>
         <p:spPr>
           <a:xfrm>
-            <a:off x="1980000" y="1728000"/>
-            <a:ext cx="1080000" cy="216000"/>
+            <a:off x="720000" y="792000"/>
+            <a:ext cx="5040000" cy="288000"/>
           </a:xfrm>
           <a:prstGeom prst="rect">
             <a:avLst/>
@@ -3636,7 +3197,799 @@
           <a:p>
             <a:pPr algn="l"/>
             <a:r>
-              <a:rPr sz="800" b="0"/>
+              <a:rPr sz="1100" b="1">
+                <a:solidFill>
+                  <a:srgbClr val="000000"/>
+                </a:solidFill>
+              </a:rPr>
+              <a:t>調理タイミング判定装置 100</a:t>
+            </a:r>
+          </a:p>
+        </p:txBody>
+      </p:sp>
+      <p:sp>
+        <p:nvSpPr>
+          <p:cNvPr id="5" name="Rounded Rectangle 4"/>
+          <p:cNvSpPr/>
+          <p:nvPr/>
+        </p:nvSpPr>
+        <p:spPr>
+          <a:xfrm>
+            <a:off x="720000" y="1260000"/>
+            <a:ext cx="1980000" cy="1440000"/>
+          </a:xfrm>
+          <a:prstGeom prst="roundRect">
+            <a:avLst/>
+          </a:prstGeom>
+          <a:solidFill>
+            <a:srgbClr val="FFFFFF"/>
+          </a:solidFill>
+          <a:ln w="19050">
+            <a:solidFill>
+              <a:srgbClr val="000000"/>
+            </a:solidFill>
+          </a:ln>
+        </p:spPr>
+        <p:style>
+          <a:lnRef idx="1">
+            <a:schemeClr val="accent1"/>
+          </a:lnRef>
+          <a:fillRef idx="3">
+            <a:schemeClr val="accent1"/>
+          </a:fillRef>
+          <a:effectRef idx="2">
+            <a:schemeClr val="accent1"/>
+          </a:effectRef>
+          <a:fontRef idx="minor">
+            <a:schemeClr val="lt1"/>
+          </a:fontRef>
+        </p:style>
+        <p:txBody>
+          <a:bodyPr rtlCol="0" anchor="ctr" wrap="square" lIns="50800" rIns="50800" tIns="25400" bIns="25400"/>
+          <a:lstStyle/>
+          <a:p>
+            <a:pPr algn="ctr"/>
+            <a:r>
+              <a:rPr sz="900" b="0">
+                <a:solidFill>
+                  <a:srgbClr val="000000"/>
+                </a:solidFill>
+              </a:rPr>
+              <a:t>色彩センサー部 110</a:t>
+            </a:r>
+          </a:p>
+          <a:p>
+            <a:pPr algn="ctr"/>
+            <a:r>
+              <a:rPr sz="900" b="0">
+                <a:solidFill>
+                  <a:srgbClr val="000000"/>
+                </a:solidFill>
+              </a:rPr>
+              <a:t/>
+            </a:r>
+          </a:p>
+          <a:p>
+            <a:pPr algn="ctr"/>
+            <a:r>
+              <a:rPr sz="900" b="0">
+                <a:solidFill>
+                  <a:srgbClr val="000000"/>
+                </a:solidFill>
+              </a:rPr>
+              <a:t>RGBCセンサー 111</a:t>
+            </a:r>
+          </a:p>
+          <a:p>
+            <a:pPr algn="ctr"/>
+            <a:r>
+              <a:rPr sz="900" b="0">
+                <a:solidFill>
+                  <a:srgbClr val="000000"/>
+                </a:solidFill>
+              </a:rPr>
+              <a:t>(TCS3472)</a:t>
+            </a:r>
+          </a:p>
+          <a:p>
+            <a:pPr algn="ctr"/>
+            <a:r>
+              <a:rPr sz="900" b="0">
+                <a:solidFill>
+                  <a:srgbClr val="000000"/>
+                </a:solidFill>
+              </a:rPr>
+              <a:t/>
+            </a:r>
+          </a:p>
+          <a:p>
+            <a:pPr algn="ctr"/>
+            <a:r>
+              <a:rPr sz="900" b="0">
+                <a:solidFill>
+                  <a:srgbClr val="000000"/>
+                </a:solidFill>
+              </a:rPr>
+              <a:t>白色LED照明 112</a:t>
+            </a:r>
+          </a:p>
+        </p:txBody>
+      </p:sp>
+      <p:sp>
+        <p:nvSpPr>
+          <p:cNvPr id="6" name="Rounded Rectangle 5"/>
+          <p:cNvSpPr/>
+          <p:nvPr/>
+        </p:nvSpPr>
+        <p:spPr>
+          <a:xfrm>
+            <a:off x="3060000" y="1260000"/>
+            <a:ext cx="2520000" cy="1440000"/>
+          </a:xfrm>
+          <a:prstGeom prst="roundRect">
+            <a:avLst/>
+          </a:prstGeom>
+          <a:solidFill>
+            <a:srgbClr val="FFFFFF"/>
+          </a:solidFill>
+          <a:ln w="19050">
+            <a:solidFill>
+              <a:srgbClr val="000000"/>
+            </a:solidFill>
+          </a:ln>
+        </p:spPr>
+        <p:style>
+          <a:lnRef idx="1">
+            <a:schemeClr val="accent1"/>
+          </a:lnRef>
+          <a:fillRef idx="3">
+            <a:schemeClr val="accent1"/>
+          </a:fillRef>
+          <a:effectRef idx="2">
+            <a:schemeClr val="accent1"/>
+          </a:effectRef>
+          <a:fontRef idx="minor">
+            <a:schemeClr val="lt1"/>
+          </a:fontRef>
+        </p:style>
+        <p:txBody>
+          <a:bodyPr rtlCol="0" anchor="ctr" wrap="square" lIns="50800" rIns="50800" tIns="25400" bIns="25400"/>
+          <a:lstStyle/>
+          <a:p>
+            <a:pPr algn="l"/>
+            <a:r>
+              <a:rPr sz="800" b="0">
+                <a:solidFill>
+                  <a:srgbClr val="000000"/>
+                </a:solidFill>
+              </a:rPr>
+              <a:t>マイクロコントローラ部 120</a:t>
+            </a:r>
+          </a:p>
+          <a:p>
+            <a:pPr algn="l"/>
+            <a:r>
+              <a:rPr sz="800" b="0">
+                <a:solidFill>
+                  <a:srgbClr val="000000"/>
+                </a:solidFill>
+              </a:rPr>
+              <a:t>(ESP32-S3)</a:t>
+            </a:r>
+          </a:p>
+          <a:p>
+            <a:pPr algn="l"/>
+            <a:r>
+              <a:rPr sz="800" b="0">
+                <a:solidFill>
+                  <a:srgbClr val="000000"/>
+                </a:solidFill>
+              </a:rPr>
+              <a:t/>
+            </a:r>
+          </a:p>
+          <a:p>
+            <a:pPr algn="l"/>
+            <a:r>
+              <a:rPr sz="800" b="0">
+                <a:solidFill>
+                  <a:srgbClr val="000000"/>
+                </a:solidFill>
+              </a:rPr>
+              <a:t>- 色空間変換</a:t>
+            </a:r>
+          </a:p>
+          <a:p>
+            <a:pPr algn="l"/>
+            <a:r>
+              <a:rPr sz="800" b="0">
+                <a:solidFill>
+                  <a:srgbClr val="000000"/>
+                </a:solidFill>
+              </a:rPr>
+              <a:t>  (RGB -&gt; XYZ -&gt; L*a*b*)</a:t>
+            </a:r>
+          </a:p>
+          <a:p>
+            <a:pPr algn="l"/>
+            <a:r>
+              <a:rPr sz="800" b="0">
+                <a:solidFill>
+                  <a:srgbClr val="000000"/>
+                </a:solidFill>
+              </a:rPr>
+              <a:t>- 色差ΔE算出</a:t>
+            </a:r>
+          </a:p>
+          <a:p>
+            <a:pPr algn="l"/>
+            <a:r>
+              <a:rPr sz="800" b="0">
+                <a:solidFill>
+                  <a:srgbClr val="000000"/>
+                </a:solidFill>
+              </a:rPr>
+              <a:t>- 時系列追跡(環状バッファ)</a:t>
+            </a:r>
+          </a:p>
+          <a:p>
+            <a:pPr algn="l"/>
+            <a:r>
+              <a:rPr sz="800" b="0">
+                <a:solidFill>
+                  <a:srgbClr val="000000"/>
+                </a:solidFill>
+              </a:rPr>
+              <a:t>- 予測通知(変化率推定)</a:t>
+            </a:r>
+          </a:p>
+        </p:txBody>
+      </p:sp>
+      <p:sp>
+        <p:nvSpPr>
+          <p:cNvPr id="7" name="Rounded Rectangle 6"/>
+          <p:cNvSpPr/>
+          <p:nvPr/>
+        </p:nvSpPr>
+        <p:spPr>
+          <a:xfrm>
+            <a:off x="5940000" y="1260000"/>
+            <a:ext cx="1980000" cy="900000"/>
+          </a:xfrm>
+          <a:prstGeom prst="roundRect">
+            <a:avLst/>
+          </a:prstGeom>
+          <a:solidFill>
+            <a:srgbClr val="FFFFFF"/>
+          </a:solidFill>
+          <a:ln w="19050">
+            <a:solidFill>
+              <a:srgbClr val="000000"/>
+            </a:solidFill>
+          </a:ln>
+        </p:spPr>
+        <p:style>
+          <a:lnRef idx="1">
+            <a:schemeClr val="accent1"/>
+          </a:lnRef>
+          <a:fillRef idx="3">
+            <a:schemeClr val="accent1"/>
+          </a:fillRef>
+          <a:effectRef idx="2">
+            <a:schemeClr val="accent1"/>
+          </a:effectRef>
+          <a:fontRef idx="minor">
+            <a:schemeClr val="lt1"/>
+          </a:fontRef>
+        </p:style>
+        <p:txBody>
+          <a:bodyPr rtlCol="0" anchor="ctr" wrap="square" lIns="50800" rIns="50800" tIns="25400" bIns="25400"/>
+          <a:lstStyle/>
+          <a:p>
+            <a:pPr algn="ctr"/>
+            <a:r>
+              <a:rPr sz="900" b="0">
+                <a:solidFill>
+                  <a:srgbClr val="000000"/>
+                </a:solidFill>
+              </a:rPr>
+              <a:t>入力手段</a:t>
+            </a:r>
+          </a:p>
+          <a:p>
+            <a:pPr algn="ctr"/>
+            <a:r>
+              <a:rPr sz="900" b="0">
+                <a:solidFill>
+                  <a:srgbClr val="000000"/>
+                </a:solidFill>
+              </a:rPr>
+              <a:t>(タッチパネル)</a:t>
+            </a:r>
+          </a:p>
+        </p:txBody>
+      </p:sp>
+      <p:sp>
+        <p:nvSpPr>
+          <p:cNvPr id="8" name="Rounded Rectangle 7"/>
+          <p:cNvSpPr/>
+          <p:nvPr/>
+        </p:nvSpPr>
+        <p:spPr>
+          <a:xfrm>
+            <a:off x="720000" y="3060000"/>
+            <a:ext cx="1980000" cy="1260000"/>
+          </a:xfrm>
+          <a:prstGeom prst="roundRect">
+            <a:avLst/>
+          </a:prstGeom>
+          <a:solidFill>
+            <a:srgbClr val="FFFFFF"/>
+          </a:solidFill>
+          <a:ln w="19050">
+            <a:solidFill>
+              <a:srgbClr val="000000"/>
+            </a:solidFill>
+          </a:ln>
+        </p:spPr>
+        <p:style>
+          <a:lnRef idx="1">
+            <a:schemeClr val="accent1"/>
+          </a:lnRef>
+          <a:fillRef idx="3">
+            <a:schemeClr val="accent1"/>
+          </a:fillRef>
+          <a:effectRef idx="2">
+            <a:schemeClr val="accent1"/>
+          </a:effectRef>
+          <a:fontRef idx="minor">
+            <a:schemeClr val="lt1"/>
+          </a:fontRef>
+        </p:style>
+        <p:txBody>
+          <a:bodyPr rtlCol="0" anchor="ctr" wrap="square" lIns="50800" rIns="50800" tIns="25400" bIns="25400"/>
+          <a:lstStyle/>
+          <a:p>
+            <a:pPr algn="l"/>
+            <a:r>
+              <a:rPr sz="800" b="0">
+                <a:solidFill>
+                  <a:srgbClr val="000000"/>
+                </a:solidFill>
+              </a:rPr>
+              <a:t>表示部 130</a:t>
+            </a:r>
+          </a:p>
+          <a:p>
+            <a:pPr algn="l"/>
+            <a:r>
+              <a:rPr sz="800" b="0">
+                <a:solidFill>
+                  <a:srgbClr val="000000"/>
+                </a:solidFill>
+              </a:rPr>
+              <a:t>(タッチスクリーン)</a:t>
+            </a:r>
+          </a:p>
+          <a:p>
+            <a:pPr algn="l"/>
+            <a:r>
+              <a:rPr sz="800" b="0">
+                <a:solidFill>
+                  <a:srgbClr val="000000"/>
+                </a:solidFill>
+              </a:rPr>
+              <a:t/>
+            </a:r>
+          </a:p>
+          <a:p>
+            <a:pPr algn="l"/>
+            <a:r>
+              <a:rPr sz="800" b="0">
+                <a:solidFill>
+                  <a:srgbClr val="000000"/>
+                </a:solidFill>
+              </a:rPr>
+              <a:t>- プリセット選択メニュー</a:t>
+            </a:r>
+          </a:p>
+          <a:p>
+            <a:pPr algn="l"/>
+            <a:r>
+              <a:rPr sz="800" b="0">
+                <a:solidFill>
+                  <a:srgbClr val="000000"/>
+                </a:solidFill>
+              </a:rPr>
+              <a:t>- ΔEプログレスバー</a:t>
+            </a:r>
+          </a:p>
+          <a:p>
+            <a:pPr algn="l"/>
+            <a:r>
+              <a:rPr sz="800" b="0">
+                <a:solidFill>
+                  <a:srgbClr val="000000"/>
+                </a:solidFill>
+              </a:rPr>
+              <a:t>- トレンドグラフ</a:t>
+            </a:r>
+          </a:p>
+        </p:txBody>
+      </p:sp>
+      <p:sp>
+        <p:nvSpPr>
+          <p:cNvPr id="9" name="Rounded Rectangle 8"/>
+          <p:cNvSpPr/>
+          <p:nvPr/>
+        </p:nvSpPr>
+        <p:spPr>
+          <a:xfrm>
+            <a:off x="3060000" y="3060000"/>
+            <a:ext cx="1620000" cy="1260000"/>
+          </a:xfrm>
+          <a:prstGeom prst="roundRect">
+            <a:avLst/>
+          </a:prstGeom>
+          <a:solidFill>
+            <a:srgbClr val="FFFFFF"/>
+          </a:solidFill>
+          <a:ln w="19050">
+            <a:solidFill>
+              <a:srgbClr val="000000"/>
+            </a:solidFill>
+          </a:ln>
+        </p:spPr>
+        <p:style>
+          <a:lnRef idx="1">
+            <a:schemeClr val="accent1"/>
+          </a:lnRef>
+          <a:fillRef idx="3">
+            <a:schemeClr val="accent1"/>
+          </a:fillRef>
+          <a:effectRef idx="2">
+            <a:schemeClr val="accent1"/>
+          </a:effectRef>
+          <a:fontRef idx="minor">
+            <a:schemeClr val="lt1"/>
+          </a:fontRef>
+        </p:style>
+        <p:txBody>
+          <a:bodyPr rtlCol="0" anchor="ctr" wrap="square" lIns="50800" rIns="50800" tIns="25400" bIns="25400"/>
+          <a:lstStyle/>
+          <a:p>
+            <a:pPr algn="l"/>
+            <a:r>
+              <a:rPr sz="800" b="0">
+                <a:solidFill>
+                  <a:srgbClr val="000000"/>
+                </a:solidFill>
+              </a:rPr>
+              <a:t>通知部 140</a:t>
+            </a:r>
+          </a:p>
+          <a:p>
+            <a:pPr algn="l"/>
+            <a:r>
+              <a:rPr sz="800" b="0">
+                <a:solidFill>
+                  <a:srgbClr val="000000"/>
+                </a:solidFill>
+              </a:rPr>
+              <a:t/>
+            </a:r>
+          </a:p>
+          <a:p>
+            <a:pPr algn="l"/>
+            <a:r>
+              <a:rPr sz="800" b="0">
+                <a:solidFill>
+                  <a:srgbClr val="000000"/>
+                </a:solidFill>
+              </a:rPr>
+              <a:t>- スピーカー</a:t>
+            </a:r>
+          </a:p>
+          <a:p>
+            <a:pPr algn="l"/>
+            <a:r>
+              <a:rPr sz="800" b="0">
+                <a:solidFill>
+                  <a:srgbClr val="000000"/>
+                </a:solidFill>
+              </a:rPr>
+              <a:t>  (880Hz / 1100Hz)</a:t>
+            </a:r>
+          </a:p>
+          <a:p>
+            <a:pPr algn="l"/>
+            <a:r>
+              <a:rPr sz="800" b="0">
+                <a:solidFill>
+                  <a:srgbClr val="000000"/>
+                </a:solidFill>
+              </a:rPr>
+              <a:t>- Wi-Fi / BLE</a:t>
+            </a:r>
+          </a:p>
+        </p:txBody>
+      </p:sp>
+      <p:sp>
+        <p:nvSpPr>
+          <p:cNvPr id="10" name="Rounded Rectangle 9"/>
+          <p:cNvSpPr/>
+          <p:nvPr/>
+        </p:nvSpPr>
+        <p:spPr>
+          <a:xfrm>
+            <a:off x="5040000" y="3060000"/>
+            <a:ext cx="2880000" cy="1260000"/>
+          </a:xfrm>
+          <a:prstGeom prst="roundRect">
+            <a:avLst/>
+          </a:prstGeom>
+          <a:solidFill>
+            <a:srgbClr val="FFFFFF"/>
+          </a:solidFill>
+          <a:ln w="19050">
+            <a:solidFill>
+              <a:srgbClr val="000000"/>
+            </a:solidFill>
+          </a:ln>
+        </p:spPr>
+        <p:style>
+          <a:lnRef idx="1">
+            <a:schemeClr val="accent1"/>
+          </a:lnRef>
+          <a:fillRef idx="3">
+            <a:schemeClr val="accent1"/>
+          </a:fillRef>
+          <a:effectRef idx="2">
+            <a:schemeClr val="accent1"/>
+          </a:effectRef>
+          <a:fontRef idx="minor">
+            <a:schemeClr val="lt1"/>
+          </a:fontRef>
+        </p:style>
+        <p:txBody>
+          <a:bodyPr rtlCol="0" anchor="ctr" wrap="square" lIns="50800" rIns="50800" tIns="25400" bIns="25400"/>
+          <a:lstStyle/>
+          <a:p>
+            <a:pPr algn="l"/>
+            <a:r>
+              <a:rPr sz="800" b="0">
+                <a:solidFill>
+                  <a:srgbClr val="000000"/>
+                </a:solidFill>
+              </a:rPr>
+              <a:t>記憶部 150</a:t>
+            </a:r>
+          </a:p>
+          <a:p>
+            <a:pPr algn="l"/>
+            <a:r>
+              <a:rPr sz="800" b="0">
+                <a:solidFill>
+                  <a:srgbClr val="000000"/>
+                </a:solidFill>
+              </a:rPr>
+              <a:t>(不揮発性メモリ)</a:t>
+            </a:r>
+          </a:p>
+          <a:p>
+            <a:pPr algn="l"/>
+            <a:r>
+              <a:rPr sz="800" b="0">
+                <a:solidFill>
+                  <a:srgbClr val="000000"/>
+                </a:solidFill>
+              </a:rPr>
+              <a:t/>
+            </a:r>
+          </a:p>
+          <a:p>
+            <a:pPr algn="l"/>
+            <a:r>
+              <a:rPr sz="800" b="0">
+                <a:solidFill>
+                  <a:srgbClr val="000000"/>
+                </a:solidFill>
+              </a:rPr>
+              <a:t>目標色プリセット辞書:</a:t>
+            </a:r>
+          </a:p>
+          <a:p>
+            <a:pPr algn="l"/>
+            <a:r>
+              <a:rPr sz="800" b="0">
+                <a:solidFill>
+                  <a:srgbClr val="000000"/>
+                </a:solidFill>
+              </a:rPr>
+              <a:t> きつね色  [68.5, 12.3, 42.1]</a:t>
+            </a:r>
+          </a:p>
+          <a:p>
+            <a:pPr algn="l"/>
+            <a:r>
+              <a:rPr sz="800" b="0">
+                <a:solidFill>
+                  <a:srgbClr val="000000"/>
+                </a:solidFill>
+              </a:rPr>
+              <a:t> 飴色      [73.2,  8.7, 38.5]</a:t>
+            </a:r>
+          </a:p>
+          <a:p>
+            <a:pPr algn="l"/>
+            <a:r>
+              <a:rPr sz="800" b="0">
+                <a:solidFill>
+                  <a:srgbClr val="000000"/>
+                </a:solidFill>
+              </a:rPr>
+              <a:t> ハシバミ色 [65.0, 10.1, 30.2]</a:t>
+            </a:r>
+          </a:p>
+        </p:txBody>
+      </p:sp>
+      <p:sp>
+        <p:nvSpPr>
+          <p:cNvPr id="11" name="Rounded Rectangle 10"/>
+          <p:cNvSpPr/>
+          <p:nvPr/>
+        </p:nvSpPr>
+        <p:spPr>
+          <a:xfrm>
+            <a:off x="720000" y="4860000"/>
+            <a:ext cx="1620000" cy="720000"/>
+          </a:xfrm>
+          <a:prstGeom prst="roundRect">
+            <a:avLst/>
+          </a:prstGeom>
+          <a:solidFill>
+            <a:srgbClr val="FFFFFF"/>
+          </a:solidFill>
+          <a:ln w="19050">
+            <a:solidFill>
+              <a:srgbClr val="000000"/>
+            </a:solidFill>
+          </a:ln>
+        </p:spPr>
+        <p:style>
+          <a:lnRef idx="1">
+            <a:schemeClr val="accent1"/>
+          </a:lnRef>
+          <a:fillRef idx="3">
+            <a:schemeClr val="accent1"/>
+          </a:fillRef>
+          <a:effectRef idx="2">
+            <a:schemeClr val="accent1"/>
+          </a:effectRef>
+          <a:fontRef idx="minor">
+            <a:schemeClr val="lt1"/>
+          </a:fontRef>
+        </p:style>
+        <p:txBody>
+          <a:bodyPr rtlCol="0" anchor="ctr" wrap="square" lIns="50800" rIns="50800" tIns="25400" bIns="25400"/>
+          <a:lstStyle/>
+          <a:p>
+            <a:pPr algn="ctr"/>
+            <a:r>
+              <a:rPr sz="900" b="0">
+                <a:solidFill>
+                  <a:srgbClr val="000000"/>
+                </a:solidFill>
+              </a:rPr>
+              <a:t>食品表面</a:t>
+            </a:r>
+          </a:p>
+          <a:p>
+            <a:pPr algn="ctr"/>
+            <a:r>
+              <a:rPr sz="900" b="0">
+                <a:solidFill>
+                  <a:srgbClr val="000000"/>
+                </a:solidFill>
+              </a:rPr>
+              <a:t>(被計測対象)</a:t>
+            </a:r>
+          </a:p>
+        </p:txBody>
+      </p:sp>
+      <p:sp>
+        <p:nvSpPr>
+          <p:cNvPr id="12" name="Rounded Rectangle 11"/>
+          <p:cNvSpPr/>
+          <p:nvPr/>
+        </p:nvSpPr>
+        <p:spPr>
+          <a:xfrm>
+            <a:off x="2700000" y="4860000"/>
+            <a:ext cx="1620000" cy="720000"/>
+          </a:xfrm>
+          <a:prstGeom prst="roundRect">
+            <a:avLst/>
+          </a:prstGeom>
+          <a:solidFill>
+            <a:srgbClr val="FFFFFF"/>
+          </a:solidFill>
+          <a:ln w="19050">
+            <a:solidFill>
+              <a:srgbClr val="000000"/>
+            </a:solidFill>
+          </a:ln>
+        </p:spPr>
+        <p:style>
+          <a:lnRef idx="1">
+            <a:schemeClr val="accent1"/>
+          </a:lnRef>
+          <a:fillRef idx="3">
+            <a:schemeClr val="accent1"/>
+          </a:fillRef>
+          <a:effectRef idx="2">
+            <a:schemeClr val="accent1"/>
+          </a:effectRef>
+          <a:fontRef idx="minor">
+            <a:schemeClr val="lt1"/>
+          </a:fontRef>
+        </p:style>
+        <p:txBody>
+          <a:bodyPr rtlCol="0" anchor="ctr" wrap="square" lIns="50800" rIns="50800" tIns="25400" bIns="25400"/>
+          <a:lstStyle/>
+          <a:p>
+            <a:pPr algn="ctr"/>
+            <a:r>
+              <a:rPr sz="900" b="0">
+                <a:solidFill>
+                  <a:srgbClr val="000000"/>
+                </a:solidFill>
+              </a:rPr>
+              <a:t>白色基準面</a:t>
+            </a:r>
+          </a:p>
+          <a:p>
+            <a:pPr algn="ctr"/>
+            <a:r>
+              <a:rPr sz="900" b="0">
+                <a:solidFill>
+                  <a:srgbClr val="000000"/>
+                </a:solidFill>
+              </a:rPr>
+              <a:t>(キャリブレーション用)</a:t>
+            </a:r>
+          </a:p>
+        </p:txBody>
+      </p:sp>
+      <p:sp>
+        <p:nvSpPr>
+          <p:cNvPr id="13" name="TextBox 12"/>
+          <p:cNvSpPr txBox="1"/>
+          <p:nvPr/>
+        </p:nvSpPr>
+        <p:spPr>
+          <a:xfrm>
+            <a:off x="2088000" y="1728000"/>
+            <a:ext cx="900000" cy="216000"/>
+          </a:xfrm>
+          <a:prstGeom prst="rect">
+            <a:avLst/>
+          </a:prstGeom>
+          <a:noFill/>
+        </p:spPr>
+        <p:txBody>
+          <a:bodyPr wrap="square">
+            <a:spAutoFit/>
+          </a:bodyPr>
+          <a:lstStyle/>
+          <a:p>
+            <a:pPr algn="l"/>
+            <a:r>
+              <a:rPr sz="800" b="1">
+                <a:solidFill>
+                  <a:srgbClr val="000000"/>
+                </a:solidFill>
+              </a:rPr>
               <a:t>I2C</a:t>
             </a:r>
           </a:p>
@@ -3650,8 +4003,8 @@
         </p:nvCxnSpPr>
         <p:spPr>
           <a:xfrm>
-            <a:off x="2520000" y="1872000"/>
-            <a:ext cx="540000" cy="0"/>
+            <a:off x="2700000" y="1908000"/>
+            <a:ext cx="360000" cy="0"/>
           </a:xfrm>
           <a:prstGeom prst="line">
             <a:avLst/>
@@ -3660,6 +4013,187 @@
             <a:solidFill>
               <a:srgbClr val="000000"/>
             </a:solidFill>
+            <a:tailEnd type="triangle" w="med" len="med"/>
+          </a:ln>
+        </p:spPr>
+        <p:style>
+          <a:lnRef idx="2">
+            <a:schemeClr val="accent1"/>
+          </a:lnRef>
+          <a:fillRef idx="0">
+            <a:schemeClr val="accent1"/>
+          </a:fillRef>
+          <a:effectRef idx="1">
+            <a:schemeClr val="accent1"/>
+          </a:effectRef>
+          <a:fontRef idx="minor">
+            <a:schemeClr val="tx1"/>
+          </a:fontRef>
+        </p:style>
+      </p:cxnSp>
+      <p:cxnSp>
+        <p:nvCxnSpPr>
+          <p:cNvPr id="15" name="Connector 14"/>
+          <p:cNvCxnSpPr/>
+          <p:nvPr/>
+        </p:nvCxnSpPr>
+        <p:spPr>
+          <a:xfrm flipH="1">
+            <a:off x="2700000" y="2700000"/>
+            <a:ext cx="360000" cy="540000"/>
+          </a:xfrm>
+          <a:prstGeom prst="line">
+            <a:avLst/>
+          </a:prstGeom>
+          <a:ln w="19050">
+            <a:solidFill>
+              <a:srgbClr val="000000"/>
+            </a:solidFill>
+            <a:tailEnd type="triangle" w="med" len="med"/>
+          </a:ln>
+        </p:spPr>
+        <p:style>
+          <a:lnRef idx="2">
+            <a:schemeClr val="accent1"/>
+          </a:lnRef>
+          <a:fillRef idx="0">
+            <a:schemeClr val="accent1"/>
+          </a:fillRef>
+          <a:effectRef idx="1">
+            <a:schemeClr val="accent1"/>
+          </a:effectRef>
+          <a:fontRef idx="minor">
+            <a:schemeClr val="tx1"/>
+          </a:fontRef>
+        </p:style>
+      </p:cxnSp>
+      <p:cxnSp>
+        <p:nvCxnSpPr>
+          <p:cNvPr id="16" name="Connector 15"/>
+          <p:cNvCxnSpPr/>
+          <p:nvPr/>
+        </p:nvCxnSpPr>
+        <p:spPr>
+          <a:xfrm flipH="1">
+            <a:off x="3960000" y="2700000"/>
+            <a:ext cx="360000" cy="360000"/>
+          </a:xfrm>
+          <a:prstGeom prst="line">
+            <a:avLst/>
+          </a:prstGeom>
+          <a:ln w="19050">
+            <a:solidFill>
+              <a:srgbClr val="000000"/>
+            </a:solidFill>
+            <a:tailEnd type="triangle" w="med" len="med"/>
+          </a:ln>
+        </p:spPr>
+        <p:style>
+          <a:lnRef idx="2">
+            <a:schemeClr val="accent1"/>
+          </a:lnRef>
+          <a:fillRef idx="0">
+            <a:schemeClr val="accent1"/>
+          </a:fillRef>
+          <a:effectRef idx="1">
+            <a:schemeClr val="accent1"/>
+          </a:effectRef>
+          <a:fontRef idx="minor">
+            <a:schemeClr val="tx1"/>
+          </a:fontRef>
+        </p:style>
+      </p:cxnSp>
+      <p:cxnSp>
+        <p:nvCxnSpPr>
+          <p:cNvPr id="17" name="Connector 16"/>
+          <p:cNvCxnSpPr/>
+          <p:nvPr/>
+        </p:nvCxnSpPr>
+        <p:spPr>
+          <a:xfrm>
+            <a:off x="5580000" y="2700000"/>
+            <a:ext cx="540000" cy="360000"/>
+          </a:xfrm>
+          <a:prstGeom prst="line">
+            <a:avLst/>
+          </a:prstGeom>
+          <a:ln w="19050">
+            <a:solidFill>
+              <a:srgbClr val="000000"/>
+            </a:solidFill>
+            <a:tailEnd type="triangle" w="med" len="med"/>
+          </a:ln>
+        </p:spPr>
+        <p:style>
+          <a:lnRef idx="2">
+            <a:schemeClr val="accent1"/>
+          </a:lnRef>
+          <a:fillRef idx="0">
+            <a:schemeClr val="accent1"/>
+          </a:fillRef>
+          <a:effectRef idx="1">
+            <a:schemeClr val="accent1"/>
+          </a:effectRef>
+          <a:fontRef idx="minor">
+            <a:schemeClr val="tx1"/>
+          </a:fontRef>
+        </p:style>
+      </p:cxnSp>
+      <p:cxnSp>
+        <p:nvCxnSpPr>
+          <p:cNvPr id="18" name="Connector 17"/>
+          <p:cNvCxnSpPr/>
+          <p:nvPr/>
+        </p:nvCxnSpPr>
+        <p:spPr>
+          <a:xfrm flipV="1">
+            <a:off x="1620000" y="2700000"/>
+            <a:ext cx="0" cy="2160000"/>
+          </a:xfrm>
+          <a:prstGeom prst="line">
+            <a:avLst/>
+          </a:prstGeom>
+          <a:ln w="19050">
+            <a:solidFill>
+              <a:srgbClr val="000000"/>
+            </a:solidFill>
+            <a:tailEnd type="triangle" w="med" len="med"/>
+          </a:ln>
+        </p:spPr>
+        <p:style>
+          <a:lnRef idx="2">
+            <a:schemeClr val="accent1"/>
+          </a:lnRef>
+          <a:fillRef idx="0">
+            <a:schemeClr val="accent1"/>
+          </a:fillRef>
+          <a:effectRef idx="1">
+            <a:schemeClr val="accent1"/>
+          </a:effectRef>
+          <a:fontRef idx="minor">
+            <a:schemeClr val="tx1"/>
+          </a:fontRef>
+        </p:style>
+      </p:cxnSp>
+      <p:cxnSp>
+        <p:nvCxnSpPr>
+          <p:cNvPr id="19" name="Connector 18"/>
+          <p:cNvCxnSpPr/>
+          <p:nvPr/>
+        </p:nvCxnSpPr>
+        <p:spPr>
+          <a:xfrm flipH="1" flipV="1">
+            <a:off x="1980000" y="2700000"/>
+            <a:ext cx="1080000" cy="2160000"/>
+          </a:xfrm>
+          <a:prstGeom prst="line">
+            <a:avLst/>
+          </a:prstGeom>
+          <a:ln w="19050">
+            <a:solidFill>
+              <a:srgbClr val="000000"/>
+            </a:solidFill>
+            <a:tailEnd type="triangle" w="med" len="med"/>
           </a:ln>
         </p:spPr>
         <p:style>
@@ -3704,7 +4238,7 @@
         <p:spPr>
           <a:xfrm>
             <a:off x="360000" y="180000"/>
-            <a:ext cx="6480000" cy="540000"/>
+            <a:ext cx="8280000" cy="540000"/>
           </a:xfrm>
           <a:prstGeom prst="rect">
             <a:avLst/>
@@ -3719,8 +4253,12 @@
           <a:p>
             <a:pPr algn="ctr"/>
             <a:r>
-              <a:rPr sz="1400" b="1"/>
-              <a:t>【図2】色空間変換の処理フロー</a:t>
+              <a:rPr sz="1400" b="1">
+                <a:solidFill>
+                  <a:srgbClr val="000000"/>
+                </a:solidFill>
+              </a:rPr>
+              <a:t>【図2】</a:t>
             </a:r>
           </a:p>
         </p:txBody>
@@ -3734,13 +4272,13 @@
         <p:spPr>
           <a:xfrm>
             <a:off x="1800000" y="900000"/>
-            <a:ext cx="5040000" cy="720000"/>
+            <a:ext cx="5400000" cy="612000"/>
           </a:xfrm>
           <a:prstGeom prst="roundRect">
             <a:avLst/>
           </a:prstGeom>
           <a:solidFill>
-            <a:srgbClr val="DBE5F1"/>
+            <a:srgbClr val="FFFFFF"/>
           </a:solidFill>
           <a:ln w="19050">
             <a:solidFill>
@@ -3768,9 +4306,23 @@
           <a:p>
             <a:pPr algn="ctr"/>
             <a:r>
-              <a:rPr sz="900" b="0"/>
-              <a:t>TCS3472 RGBC値取得
-(R, G, B, C)</a:t>
+              <a:rPr sz="900" b="0">
+                <a:solidFill>
+                  <a:srgbClr val="000000"/>
+                </a:solidFill>
+              </a:rPr>
+              <a:t>TCS3472 RGBC値取得</a:t>
+            </a:r>
+          </a:p>
+          <a:p>
+            <a:pPr algn="ctr"/>
+            <a:r>
+              <a:rPr sz="900" b="0">
+                <a:solidFill>
+                  <a:srgbClr val="000000"/>
+                </a:solidFill>
+              </a:rPr>
+              <a:t>(R, G, B, C)</a:t>
             </a:r>
           </a:p>
         </p:txBody>
@@ -3783,7 +4335,7 @@
         </p:nvCxnSpPr>
         <p:spPr>
           <a:xfrm>
-            <a:off x="4320000" y="1620000"/>
+            <a:off x="4500000" y="1512000"/>
             <a:ext cx="0" cy="108000"/>
           </a:xfrm>
           <a:prstGeom prst="line">
@@ -3793,6 +4345,7 @@
             <a:solidFill>
               <a:srgbClr val="000000"/>
             </a:solidFill>
+            <a:tailEnd type="triangle" w="med" len="med"/>
           </a:ln>
         </p:spPr>
         <p:style>
@@ -3818,14 +4371,14 @@
         </p:nvSpPr>
         <p:spPr>
           <a:xfrm>
-            <a:off x="1800000" y="1728000"/>
-            <a:ext cx="5040000" cy="720000"/>
+            <a:off x="1800000" y="1620000"/>
+            <a:ext cx="5400000" cy="612000"/>
           </a:xfrm>
           <a:prstGeom prst="roundRect">
             <a:avLst/>
           </a:prstGeom>
           <a:solidFill>
-            <a:srgbClr val="F2F2F2"/>
+            <a:srgbClr val="FFFFFF"/>
           </a:solidFill>
           <a:ln w="19050">
             <a:solidFill>
@@ -3853,9 +4406,23 @@
           <a:p>
             <a:pPr algn="ctr"/>
             <a:r>
-              <a:rPr sz="900" b="0"/>
-              <a:t>正規化
-r=R/C, g=G/C, b=B/C</a:t>
+              <a:rPr sz="900" b="0">
+                <a:solidFill>
+                  <a:srgbClr val="000000"/>
+                </a:solidFill>
+              </a:rPr>
+              <a:t>正規化</a:t>
+            </a:r>
+          </a:p>
+          <a:p>
+            <a:pPr algn="ctr"/>
+            <a:r>
+              <a:rPr sz="900" b="0">
+                <a:solidFill>
+                  <a:srgbClr val="000000"/>
+                </a:solidFill>
+              </a:rPr>
+              <a:t>r = R/C,  g = G/C,  b = B/C</a:t>
             </a:r>
           </a:p>
         </p:txBody>
@@ -3868,7 +4435,7 @@
         </p:nvCxnSpPr>
         <p:spPr>
           <a:xfrm>
-            <a:off x="4320000" y="2448000"/>
+            <a:off x="4500000" y="2232000"/>
             <a:ext cx="0" cy="108000"/>
           </a:xfrm>
           <a:prstGeom prst="line">
@@ -3878,6 +4445,7 @@
             <a:solidFill>
               <a:srgbClr val="000000"/>
             </a:solidFill>
+            <a:tailEnd type="triangle" w="med" len="med"/>
           </a:ln>
         </p:spPr>
         <p:style>
@@ -3903,14 +4471,14 @@
         </p:nvSpPr>
         <p:spPr>
           <a:xfrm>
-            <a:off x="1800000" y="2556000"/>
-            <a:ext cx="5040000" cy="720000"/>
+            <a:off x="1800000" y="2340000"/>
+            <a:ext cx="5400000" cy="612000"/>
           </a:xfrm>
           <a:prstGeom prst="roundRect">
             <a:avLst/>
           </a:prstGeom>
           <a:solidFill>
-            <a:srgbClr val="FFF2CC"/>
+            <a:srgbClr val="FFFFFF"/>
           </a:solidFill>
           <a:ln w="19050">
             <a:solidFill>
@@ -3938,9 +4506,23 @@
           <a:p>
             <a:pPr algn="ctr"/>
             <a:r>
-              <a:rPr sz="900" b="0"/>
-              <a:t>ホワイトバランス補正
-r'=r×coeff_R, g'=g×coeff_G, b'=b×coeff_B</a:t>
+              <a:rPr sz="900" b="0">
+                <a:solidFill>
+                  <a:srgbClr val="000000"/>
+                </a:solidFill>
+              </a:rPr>
+              <a:t>ホワイトバランス補正</a:t>
+            </a:r>
+          </a:p>
+          <a:p>
+            <a:pPr algn="ctr"/>
+            <a:r>
+              <a:rPr sz="900" b="0">
+                <a:solidFill>
+                  <a:srgbClr val="000000"/>
+                </a:solidFill>
+              </a:rPr>
+              <a:t>r' = r x coeff_R,  g' = g x coeff_G,  b' = b x coeff_B</a:t>
             </a:r>
           </a:p>
         </p:txBody>
@@ -3953,7 +4535,7 @@
         </p:nvCxnSpPr>
         <p:spPr>
           <a:xfrm>
-            <a:off x="4320000" y="3276000"/>
+            <a:off x="4500000" y="2952000"/>
             <a:ext cx="0" cy="108000"/>
           </a:xfrm>
           <a:prstGeom prst="line">
@@ -3963,6 +4545,7 @@
             <a:solidFill>
               <a:srgbClr val="000000"/>
             </a:solidFill>
+            <a:tailEnd type="triangle" w="med" len="med"/>
           </a:ln>
         </p:spPr>
         <p:style>
@@ -3988,14 +4571,14 @@
         </p:nvSpPr>
         <p:spPr>
           <a:xfrm>
-            <a:off x="1800000" y="3384000"/>
-            <a:ext cx="5040000" cy="792000"/>
+            <a:off x="1800000" y="3060000"/>
+            <a:ext cx="5400000" cy="827999"/>
           </a:xfrm>
           <a:prstGeom prst="roundRect">
             <a:avLst/>
           </a:prstGeom>
           <a:solidFill>
-            <a:srgbClr val="F2F2F2"/>
+            <a:srgbClr val="FFFFFF"/>
           </a:solidFill>
           <a:ln w="19050">
             <a:solidFill>
@@ -4023,10 +4606,34 @@
           <a:p>
             <a:pPr algn="ctr"/>
             <a:r>
-              <a:rPr sz="900" b="0"/>
-              <a:t>逆sRGBコンパンディング
-c&gt;0.04045: ((c+0.055)/1.055)^2.4
-c≤0.04045: c/12.92</a:t>
+              <a:rPr sz="900" b="0">
+                <a:solidFill>
+                  <a:srgbClr val="000000"/>
+                </a:solidFill>
+              </a:rPr>
+              <a:t>逆sRGBコンパンディング</a:t>
+            </a:r>
+          </a:p>
+          <a:p>
+            <a:pPr algn="ctr"/>
+            <a:r>
+              <a:rPr sz="900" b="0">
+                <a:solidFill>
+                  <a:srgbClr val="000000"/>
+                </a:solidFill>
+              </a:rPr>
+              <a:t>c &gt; 0.04045 : ((c+0.055)/1.055)^2.4</a:t>
+            </a:r>
+          </a:p>
+          <a:p>
+            <a:pPr algn="ctr"/>
+            <a:r>
+              <a:rPr sz="900" b="0">
+                <a:solidFill>
+                  <a:srgbClr val="000000"/>
+                </a:solidFill>
+              </a:rPr>
+              <a:t>c &lt;= 0.04045 : c / 12.92</a:t>
             </a:r>
           </a:p>
         </p:txBody>
@@ -4039,7 +4646,7 @@
         </p:nvCxnSpPr>
         <p:spPr>
           <a:xfrm>
-            <a:off x="4320000" y="4176000"/>
+            <a:off x="4500000" y="3887999"/>
             <a:ext cx="0" cy="108000"/>
           </a:xfrm>
           <a:prstGeom prst="line">
@@ -4049,6 +4656,7 @@
             <a:solidFill>
               <a:srgbClr val="000000"/>
             </a:solidFill>
+            <a:tailEnd type="triangle" w="med" len="med"/>
           </a:ln>
         </p:spPr>
         <p:style>
@@ -4074,14 +4682,14 @@
         </p:nvSpPr>
         <p:spPr>
           <a:xfrm>
-            <a:off x="1800000" y="4212000"/>
-            <a:ext cx="5040000" cy="720000"/>
+            <a:off x="1800000" y="3995999"/>
+            <a:ext cx="5400000" cy="612000"/>
           </a:xfrm>
           <a:prstGeom prst="roundRect">
             <a:avLst/>
           </a:prstGeom>
           <a:solidFill>
-            <a:srgbClr val="E2EFDA"/>
+            <a:srgbClr val="FFFFFF"/>
           </a:solidFill>
           <a:ln w="19050">
             <a:solidFill>
@@ -4109,9 +4717,23 @@
           <a:p>
             <a:pPr algn="ctr"/>
             <a:r>
-              <a:rPr sz="900" b="0"/>
-              <a:t>線形RGB → CIE XYZ (D65)
-3×3マトリクス変換</a:t>
+              <a:rPr sz="900" b="0">
+                <a:solidFill>
+                  <a:srgbClr val="000000"/>
+                </a:solidFill>
+              </a:rPr>
+              <a:t>線形RGB -&gt; CIE XYZ (D65)</a:t>
+            </a:r>
+          </a:p>
+          <a:p>
+            <a:pPr algn="ctr"/>
+            <a:r>
+              <a:rPr sz="900" b="0">
+                <a:solidFill>
+                  <a:srgbClr val="000000"/>
+                </a:solidFill>
+              </a:rPr>
+              <a:t>3x3 マトリクス変換</a:t>
             </a:r>
           </a:p>
         </p:txBody>
@@ -4124,7 +4746,7 @@
         </p:nvCxnSpPr>
         <p:spPr>
           <a:xfrm>
-            <a:off x="4320000" y="4932000"/>
+            <a:off x="4500000" y="4607999"/>
             <a:ext cx="0" cy="108000"/>
           </a:xfrm>
           <a:prstGeom prst="line">
@@ -4134,6 +4756,7 @@
             <a:solidFill>
               <a:srgbClr val="000000"/>
             </a:solidFill>
+            <a:tailEnd type="triangle" w="med" len="med"/>
           </a:ln>
         </p:spPr>
         <p:style>
@@ -4159,14 +4782,14 @@
         </p:nvSpPr>
         <p:spPr>
           <a:xfrm>
-            <a:off x="1800000" y="5040000"/>
-            <a:ext cx="5040000" cy="792000"/>
+            <a:off x="1800000" y="4715999"/>
+            <a:ext cx="5400000" cy="827999"/>
           </a:xfrm>
           <a:prstGeom prst="roundRect">
             <a:avLst/>
           </a:prstGeom>
           <a:solidFill>
-            <a:srgbClr val="E2EFDA"/>
+            <a:srgbClr val="FFFFFF"/>
           </a:solidFill>
           <a:ln w="19050">
             <a:solidFill>
@@ -4194,11 +4817,45 @@
           <a:p>
             <a:pPr algn="ctr"/>
             <a:r>
-              <a:rPr sz="900" b="0"/>
-              <a:t>CIE XYZ → L*a*b* (D65 white)
-L*=116·f(Y/Yn)-16
-a*=500·(f(X/Xn)-f(Y/Yn))
-b*=200·(f(Y/Yn)-f(Z/Zn))</a:t>
+              <a:rPr sz="900" b="0">
+                <a:solidFill>
+                  <a:srgbClr val="000000"/>
+                </a:solidFill>
+              </a:rPr>
+              <a:t>CIE XYZ -&gt; L*a*b* (D65白色点)</a:t>
+            </a:r>
+          </a:p>
+          <a:p>
+            <a:pPr algn="ctr"/>
+            <a:r>
+              <a:rPr sz="900" b="0">
+                <a:solidFill>
+                  <a:srgbClr val="000000"/>
+                </a:solidFill>
+              </a:rPr>
+              <a:t>L* = 116 f(Y/Yn) - 16</a:t>
+            </a:r>
+          </a:p>
+          <a:p>
+            <a:pPr algn="ctr"/>
+            <a:r>
+              <a:rPr sz="900" b="0">
+                <a:solidFill>
+                  <a:srgbClr val="000000"/>
+                </a:solidFill>
+              </a:rPr>
+              <a:t>a* = 500 (f(X/Xn) - f(Y/Yn))</a:t>
+            </a:r>
+          </a:p>
+          <a:p>
+            <a:pPr algn="ctr"/>
+            <a:r>
+              <a:rPr sz="900" b="0">
+                <a:solidFill>
+                  <a:srgbClr val="000000"/>
+                </a:solidFill>
+              </a:rPr>
+              <a:t>b* = 200 (f(Y/Yn) - f(Z/Zn))</a:t>
             </a:r>
           </a:p>
         </p:txBody>
@@ -4211,7 +4868,7 @@
         </p:nvCxnSpPr>
         <p:spPr>
           <a:xfrm>
-            <a:off x="4320000" y="5832000"/>
+            <a:off x="4500000" y="5543998"/>
             <a:ext cx="0" cy="108000"/>
           </a:xfrm>
           <a:prstGeom prst="line">
@@ -4221,6 +4878,7 @@
             <a:solidFill>
               <a:srgbClr val="000000"/>
             </a:solidFill>
+            <a:tailEnd type="triangle" w="med" len="med"/>
           </a:ln>
         </p:spPr>
         <p:style>
@@ -4246,14 +4904,14 @@
         </p:nvSpPr>
         <p:spPr>
           <a:xfrm>
-            <a:off x="1800000" y="5868000"/>
-            <a:ext cx="5040000" cy="720000"/>
+            <a:off x="1800000" y="5651998"/>
+            <a:ext cx="5400000" cy="612000"/>
           </a:xfrm>
           <a:prstGeom prst="roundRect">
             <a:avLst/>
           </a:prstGeom>
           <a:solidFill>
-            <a:srgbClr val="C6EFCE"/>
+            <a:srgbClr val="FFFFFF"/>
           </a:solidFill>
           <a:ln w="19050">
             <a:solidFill>
@@ -4281,7 +4939,11 @@
           <a:p>
             <a:pPr algn="ctr"/>
             <a:r>
-              <a:rPr sz="900" b="0"/>
+              <a:rPr sz="900" b="0">
+                <a:solidFill>
+                  <a:srgbClr val="000000"/>
+                </a:solidFill>
+              </a:rPr>
               <a:t>出力: L*, a*, b*</a:t>
             </a:r>
           </a:p>
@@ -4314,7 +4976,7 @@
         <p:spPr>
           <a:xfrm>
             <a:off x="360000" y="180000"/>
-            <a:ext cx="6480000" cy="540000"/>
+            <a:ext cx="8280000" cy="540000"/>
           </a:xfrm>
           <a:prstGeom prst="rect">
             <a:avLst/>
@@ -4329,8 +4991,12 @@
           <a:p>
             <a:pPr algn="ctr"/>
             <a:r>
-              <a:rPr sz="1400" b="1"/>
-              <a:t>【図3】目標色プリセット辞書のデータ構造</a:t>
+              <a:rPr sz="1400" b="1">
+                <a:solidFill>
+                  <a:srgbClr val="000000"/>
+                </a:solidFill>
+              </a:rPr>
+              <a:t>【図3】</a:t>
             </a:r>
           </a:p>
         </p:txBody>
@@ -4382,7 +5048,7 @@
                   </a:txBody>
                   <a:tcPr>
                     <a:solidFill>
-                      <a:srgbClr val="4F81BD"/>
+                      <a:srgbClr val="000000"/>
                     </a:solidFill>
                   </a:tcPr>
                 </a:tc>
@@ -4398,13 +5064,13 @@
                             <a:srgbClr val="FFFFFF"/>
                           </a:solidFill>
                         </a:rPr>
-                        <a:t>色名_ja</a:t>
+                        <a:t>色名(JA)</a:t>
                       </a:r>
                     </a:p>
                   </a:txBody>
                   <a:tcPr>
                     <a:solidFill>
-                      <a:srgbClr val="4F81BD"/>
+                      <a:srgbClr val="000000"/>
                     </a:solidFill>
                   </a:tcPr>
                 </a:tc>
@@ -4420,13 +5086,13 @@
                             <a:srgbClr val="FFFFFF"/>
                           </a:solidFill>
                         </a:rPr>
-                        <a:t>色名_en</a:t>
+                        <a:t>色名(EN)</a:t>
                       </a:r>
                     </a:p>
                   </a:txBody>
                   <a:tcPr>
                     <a:solidFill>
-                      <a:srgbClr val="4F81BD"/>
+                      <a:srgbClr val="000000"/>
                     </a:solidFill>
                   </a:tcPr>
                 </a:tc>
@@ -4448,7 +5114,7 @@
                   </a:txBody>
                   <a:tcPr>
                     <a:solidFill>
-                      <a:srgbClr val="4F81BD"/>
+                      <a:srgbClr val="000000"/>
                     </a:solidFill>
                   </a:tcPr>
                 </a:tc>
@@ -4470,7 +5136,7 @@
                   </a:txBody>
                   <a:tcPr>
                     <a:solidFill>
-                      <a:srgbClr val="4F81BD"/>
+                      <a:srgbClr val="000000"/>
                     </a:solidFill>
                   </a:tcPr>
                 </a:tc>
@@ -4492,7 +5158,7 @@
                   </a:txBody>
                   <a:tcPr>
                     <a:solidFill>
-                      <a:srgbClr val="4F81BD"/>
+                      <a:srgbClr val="000000"/>
                     </a:solidFill>
                   </a:tcPr>
                 </a:tc>
@@ -4514,7 +5180,7 @@
                   </a:txBody>
                   <a:tcPr>
                     <a:solidFill>
-                      <a:srgbClr val="4F81BD"/>
+                      <a:srgbClr val="000000"/>
                     </a:solidFill>
                   </a:tcPr>
                 </a:tc>
@@ -4536,7 +5202,7 @@
                   </a:txBody>
                   <a:tcPr>
                     <a:solidFill>
-                      <a:srgbClr val="4F81BD"/>
+                      <a:srgbClr val="000000"/>
                     </a:solidFill>
                   </a:tcPr>
                 </a:tc>
@@ -4549,14 +5215,18 @@
                     <a:p>
                       <a:pPr algn="ctr"/>
                       <a:r>
-                        <a:rPr sz="800"/>
+                        <a:rPr sz="800">
+                          <a:solidFill>
+                            <a:srgbClr val="000000"/>
+                          </a:solidFill>
+                        </a:rPr>
                         <a:t>1</a:t>
                       </a:r>
                     </a:p>
                   </a:txBody>
                   <a:tcPr>
                     <a:solidFill>
-                      <a:srgbClr val="DBE5F1"/>
+                      <a:srgbClr val="FFFFFF"/>
                     </a:solidFill>
                   </a:tcPr>
                 </a:tc>
@@ -4567,14 +5237,18 @@
                     <a:p>
                       <a:pPr algn="ctr"/>
                       <a:r>
-                        <a:rPr sz="800"/>
+                        <a:rPr sz="800">
+                          <a:solidFill>
+                            <a:srgbClr val="000000"/>
+                          </a:solidFill>
+                        </a:rPr>
                         <a:t>きつね色</a:t>
                       </a:r>
                     </a:p>
                   </a:txBody>
                   <a:tcPr>
                     <a:solidFill>
-                      <a:srgbClr val="DBE5F1"/>
+                      <a:srgbClr val="FFFFFF"/>
                     </a:solidFill>
                   </a:tcPr>
                 </a:tc>
@@ -4585,14 +5259,18 @@
                     <a:p>
                       <a:pPr algn="ctr"/>
                       <a:r>
-                        <a:rPr sz="800"/>
+                        <a:rPr sz="800">
+                          <a:solidFill>
+                            <a:srgbClr val="000000"/>
+                          </a:solidFill>
+                        </a:rPr>
                         <a:t>Golden Brown</a:t>
                       </a:r>
                     </a:p>
                   </a:txBody>
                   <a:tcPr>
                     <a:solidFill>
-                      <a:srgbClr val="DBE5F1"/>
+                      <a:srgbClr val="FFFFFF"/>
                     </a:solidFill>
                   </a:tcPr>
                 </a:tc>
@@ -4603,14 +5281,18 @@
                     <a:p>
                       <a:pPr algn="ctr"/>
                       <a:r>
-                        <a:rPr sz="800"/>
+                        <a:rPr sz="800">
+                          <a:solidFill>
+                            <a:srgbClr val="000000"/>
+                          </a:solidFill>
+                        </a:rPr>
                         <a:t>68.5</a:t>
                       </a:r>
                     </a:p>
                   </a:txBody>
                   <a:tcPr>
                     <a:solidFill>
-                      <a:srgbClr val="DBE5F1"/>
+                      <a:srgbClr val="FFFFFF"/>
                     </a:solidFill>
                   </a:tcPr>
                 </a:tc>
@@ -4621,14 +5303,18 @@
                     <a:p>
                       <a:pPr algn="ctr"/>
                       <a:r>
-                        <a:rPr sz="800"/>
+                        <a:rPr sz="800">
+                          <a:solidFill>
+                            <a:srgbClr val="000000"/>
+                          </a:solidFill>
+                        </a:rPr>
                         <a:t>12.3</a:t>
                       </a:r>
                     </a:p>
                   </a:txBody>
                   <a:tcPr>
                     <a:solidFill>
-                      <a:srgbClr val="DBE5F1"/>
+                      <a:srgbClr val="FFFFFF"/>
                     </a:solidFill>
                   </a:tcPr>
                 </a:tc>
@@ -4639,14 +5325,18 @@
                     <a:p>
                       <a:pPr algn="ctr"/>
                       <a:r>
-                        <a:rPr sz="800"/>
+                        <a:rPr sz="800">
+                          <a:solidFill>
+                            <a:srgbClr val="000000"/>
+                          </a:solidFill>
+                        </a:rPr>
                         <a:t>42.1</a:t>
                       </a:r>
                     </a:p>
                   </a:txBody>
                   <a:tcPr>
                     <a:solidFill>
-                      <a:srgbClr val="DBE5F1"/>
+                      <a:srgbClr val="FFFFFF"/>
                     </a:solidFill>
                   </a:tcPr>
                 </a:tc>
@@ -4657,14 +5347,18 @@
                     <a:p>
                       <a:pPr algn="ctr"/>
                       <a:r>
-                        <a:rPr sz="800"/>
+                        <a:rPr sz="800">
+                          <a:solidFill>
+                            <a:srgbClr val="000000"/>
+                          </a:solidFill>
+                        </a:rPr>
                         <a:t>6.0</a:t>
                       </a:r>
                     </a:p>
                   </a:txBody>
                   <a:tcPr>
                     <a:solidFill>
-                      <a:srgbClr val="DBE5F1"/>
+                      <a:srgbClr val="FFFFFF"/>
                     </a:solidFill>
                   </a:tcPr>
                 </a:tc>
@@ -4675,14 +5369,18 @@
                     <a:p>
                       <a:pPr algn="ctr"/>
                       <a:r>
-                        <a:rPr sz="800"/>
+                        <a:rPr sz="800">
+                          <a:solidFill>
+                            <a:srgbClr val="000000"/>
+                          </a:solidFill>
+                        </a:rPr>
                         <a:t>揚げ物・焼き物</a:t>
                       </a:r>
                     </a:p>
                   </a:txBody>
                   <a:tcPr>
                     <a:solidFill>
-                      <a:srgbClr val="DBE5F1"/>
+                      <a:srgbClr val="FFFFFF"/>
                     </a:solidFill>
                   </a:tcPr>
                 </a:tc>
@@ -4695,128 +5393,18 @@
                     <a:p>
                       <a:pPr algn="ctr"/>
                       <a:r>
-                        <a:rPr sz="800"/>
+                        <a:rPr sz="800">
+                          <a:solidFill>
+                            <a:srgbClr val="000000"/>
+                          </a:solidFill>
+                        </a:rPr>
                         <a:t>2</a:t>
-                      </a:r>
-                    </a:p>
-                  </a:txBody>
-                  <a:tcPr/>
-                </a:tc>
-                <a:tc>
-                  <a:txBody>
-                    <a:bodyPr/>
-                    <a:lstStyle/>
-                    <a:p>
-                      <a:pPr algn="ctr"/>
-                      <a:r>
-                        <a:rPr sz="800"/>
-                        <a:t>飴色</a:t>
-                      </a:r>
-                    </a:p>
-                  </a:txBody>
-                  <a:tcPr/>
-                </a:tc>
-                <a:tc>
-                  <a:txBody>
-                    <a:bodyPr/>
-                    <a:lstStyle/>
-                    <a:p>
-                      <a:pPr algn="ctr"/>
-                      <a:r>
-                        <a:rPr sz="800"/>
-                        <a:t>Caramel</a:t>
-                      </a:r>
-                    </a:p>
-                  </a:txBody>
-                  <a:tcPr/>
-                </a:tc>
-                <a:tc>
-                  <a:txBody>
-                    <a:bodyPr/>
-                    <a:lstStyle/>
-                    <a:p>
-                      <a:pPr algn="ctr"/>
-                      <a:r>
-                        <a:rPr sz="800"/>
-                        <a:t>73.2</a:t>
-                      </a:r>
-                    </a:p>
-                  </a:txBody>
-                  <a:tcPr/>
-                </a:tc>
-                <a:tc>
-                  <a:txBody>
-                    <a:bodyPr/>
-                    <a:lstStyle/>
-                    <a:p>
-                      <a:pPr algn="ctr"/>
-                      <a:r>
-                        <a:rPr sz="800"/>
-                        <a:t>8.7</a:t>
-                      </a:r>
-                    </a:p>
-                  </a:txBody>
-                  <a:tcPr/>
-                </a:tc>
-                <a:tc>
-                  <a:txBody>
-                    <a:bodyPr/>
-                    <a:lstStyle/>
-                    <a:p>
-                      <a:pPr algn="ctr"/>
-                      <a:r>
-                        <a:rPr sz="800"/>
-                        <a:t>38.5</a:t>
-                      </a:r>
-                    </a:p>
-                  </a:txBody>
-                  <a:tcPr/>
-                </a:tc>
-                <a:tc>
-                  <a:txBody>
-                    <a:bodyPr/>
-                    <a:lstStyle/>
-                    <a:p>
-                      <a:pPr algn="ctr"/>
-                      <a:r>
-                        <a:rPr sz="800"/>
-                        <a:t>5.0</a:t>
-                      </a:r>
-                    </a:p>
-                  </a:txBody>
-                  <a:tcPr/>
-                </a:tc>
-                <a:tc>
-                  <a:txBody>
-                    <a:bodyPr/>
-                    <a:lstStyle/>
-                    <a:p>
-                      <a:pPr algn="ctr"/>
-                      <a:r>
-                        <a:rPr sz="800"/>
-                        <a:t>炒め物</a:t>
-                      </a:r>
-                    </a:p>
-                  </a:txBody>
-                  <a:tcPr/>
-                </a:tc>
-              </a:tr>
-              <a:tr h="540000">
-                <a:tc>
-                  <a:txBody>
-                    <a:bodyPr/>
-                    <a:lstStyle/>
-                    <a:p>
-                      <a:pPr algn="ctr"/>
-                      <a:r>
-                        <a:rPr sz="800"/>
-                        <a:t>3</a:t>
                       </a:r>
                     </a:p>
                   </a:txBody>
                   <a:tcPr>
                     <a:solidFill>
-                      <a:srgbClr val="DBE5F1"/>
+                      <a:srgbClr val="FFFFFF"/>
                     </a:solidFill>
                   </a:tcPr>
                 </a:tc>
@@ -4827,14 +5415,18 @@
                     <a:p>
                       <a:pPr algn="ctr"/>
                       <a:r>
-                        <a:rPr sz="800"/>
-                        <a:t>ハシバミ色</a:t>
+                        <a:rPr sz="800">
+                          <a:solidFill>
+                            <a:srgbClr val="000000"/>
+                          </a:solidFill>
+                        </a:rPr>
+                        <a:t>飴色</a:t>
                       </a:r>
                     </a:p>
                   </a:txBody>
                   <a:tcPr>
                     <a:solidFill>
-                      <a:srgbClr val="DBE5F1"/>
+                      <a:srgbClr val="FFFFFF"/>
                     </a:solidFill>
                   </a:tcPr>
                 </a:tc>
@@ -4845,14 +5437,18 @@
                     <a:p>
                       <a:pPr algn="ctr"/>
                       <a:r>
-                        <a:rPr sz="800"/>
-                        <a:t>Hazelnut</a:t>
+                        <a:rPr sz="800">
+                          <a:solidFill>
+                            <a:srgbClr val="000000"/>
+                          </a:solidFill>
+                        </a:rPr>
+                        <a:t>Caramel</a:t>
                       </a:r>
                     </a:p>
                   </a:txBody>
                   <a:tcPr>
                     <a:solidFill>
-                      <a:srgbClr val="DBE5F1"/>
+                      <a:srgbClr val="FFFFFF"/>
                     </a:solidFill>
                   </a:tcPr>
                 </a:tc>
@@ -4863,14 +5459,18 @@
                     <a:p>
                       <a:pPr algn="ctr"/>
                       <a:r>
-                        <a:rPr sz="800"/>
-                        <a:t>65.0</a:t>
+                        <a:rPr sz="800">
+                          <a:solidFill>
+                            <a:srgbClr val="000000"/>
+                          </a:solidFill>
+                        </a:rPr>
+                        <a:t>73.2</a:t>
                       </a:r>
                     </a:p>
                   </a:txBody>
                   <a:tcPr>
                     <a:solidFill>
-                      <a:srgbClr val="DBE5F1"/>
+                      <a:srgbClr val="FFFFFF"/>
                     </a:solidFill>
                   </a:tcPr>
                 </a:tc>
@@ -4881,14 +5481,18 @@
                     <a:p>
                       <a:pPr algn="ctr"/>
                       <a:r>
-                        <a:rPr sz="800"/>
-                        <a:t>10.1</a:t>
+                        <a:rPr sz="800">
+                          <a:solidFill>
+                            <a:srgbClr val="000000"/>
+                          </a:solidFill>
+                        </a:rPr>
+                        <a:t>8.7</a:t>
                       </a:r>
                     </a:p>
                   </a:txBody>
                   <a:tcPr>
                     <a:solidFill>
-                      <a:srgbClr val="DBE5F1"/>
+                      <a:srgbClr val="FFFFFF"/>
                     </a:solidFill>
                   </a:tcPr>
                 </a:tc>
@@ -4899,14 +5503,18 @@
                     <a:p>
                       <a:pPr algn="ctr"/>
                       <a:r>
-                        <a:rPr sz="800"/>
-                        <a:t>30.2</a:t>
+                        <a:rPr sz="800">
+                          <a:solidFill>
+                            <a:srgbClr val="000000"/>
+                          </a:solidFill>
+                        </a:rPr>
+                        <a:t>38.5</a:t>
                       </a:r>
                     </a:p>
                   </a:txBody>
                   <a:tcPr>
                     <a:solidFill>
-                      <a:srgbClr val="DBE5F1"/>
+                      <a:srgbClr val="FFFFFF"/>
                     </a:solidFill>
                   </a:tcPr>
                 </a:tc>
@@ -4917,14 +5525,18 @@
                     <a:p>
                       <a:pPr algn="ctr"/>
                       <a:r>
-                        <a:rPr sz="800"/>
+                        <a:rPr sz="800">
+                          <a:solidFill>
+                            <a:srgbClr val="000000"/>
+                          </a:solidFill>
+                        </a:rPr>
                         <a:t>5.0</a:t>
                       </a:r>
                     </a:p>
                   </a:txBody>
                   <a:tcPr>
                     <a:solidFill>
-                      <a:srgbClr val="DBE5F1"/>
+                      <a:srgbClr val="FFFFFF"/>
                     </a:solidFill>
                   </a:tcPr>
                 </a:tc>
@@ -4935,14 +5547,18 @@
                     <a:p>
                       <a:pPr algn="ctr"/>
                       <a:r>
-                        <a:rPr sz="800"/>
-                        <a:t>焼き菓子</a:t>
+                        <a:rPr sz="800">
+                          <a:solidFill>
+                            <a:srgbClr val="000000"/>
+                          </a:solidFill>
+                        </a:rPr>
+                        <a:t>炒め物</a:t>
                       </a:r>
                     </a:p>
                   </a:txBody>
                   <a:tcPr>
                     <a:solidFill>
-                      <a:srgbClr val="DBE5F1"/>
+                      <a:srgbClr val="FFFFFF"/>
                     </a:solidFill>
                   </a:tcPr>
                 </a:tc>
@@ -4955,128 +5571,18 @@
                     <a:p>
                       <a:pPr algn="ctr"/>
                       <a:r>
-                        <a:rPr sz="800"/>
-                        <a:t>4</a:t>
-                      </a:r>
-                    </a:p>
-                  </a:txBody>
-                  <a:tcPr/>
-                </a:tc>
-                <a:tc>
-                  <a:txBody>
-                    <a:bodyPr/>
-                    <a:lstStyle/>
-                    <a:p>
-                      <a:pPr algn="ctr"/>
-                      <a:r>
-                        <a:rPr sz="800"/>
-                        <a:t>こんがり</a:t>
-                      </a:r>
-                    </a:p>
-                  </a:txBody>
-                  <a:tcPr/>
-                </a:tc>
-                <a:tc>
-                  <a:txBody>
-                    <a:bodyPr/>
-                    <a:lstStyle/>
-                    <a:p>
-                      <a:pPr algn="ctr"/>
-                      <a:r>
-                        <a:rPr sz="800"/>
-                        <a:t>Toasted</a:t>
-                      </a:r>
-                    </a:p>
-                  </a:txBody>
-                  <a:tcPr/>
-                </a:tc>
-                <a:tc>
-                  <a:txBody>
-                    <a:bodyPr/>
-                    <a:lstStyle/>
-                    <a:p>
-                      <a:pPr algn="ctr"/>
-                      <a:r>
-                        <a:rPr sz="800"/>
-                        <a:t>60.0</a:t>
-                      </a:r>
-                    </a:p>
-                  </a:txBody>
-                  <a:tcPr/>
-                </a:tc>
-                <a:tc>
-                  <a:txBody>
-                    <a:bodyPr/>
-                    <a:lstStyle/>
-                    <a:p>
-                      <a:pPr algn="ctr"/>
-                      <a:r>
-                        <a:rPr sz="800"/>
-                        <a:t>15.2</a:t>
-                      </a:r>
-                    </a:p>
-                  </a:txBody>
-                  <a:tcPr/>
-                </a:tc>
-                <a:tc>
-                  <a:txBody>
-                    <a:bodyPr/>
-                    <a:lstStyle/>
-                    <a:p>
-                      <a:pPr algn="ctr"/>
-                      <a:r>
-                        <a:rPr sz="800"/>
-                        <a:t>35.8</a:t>
-                      </a:r>
-                    </a:p>
-                  </a:txBody>
-                  <a:tcPr/>
-                </a:tc>
-                <a:tc>
-                  <a:txBody>
-                    <a:bodyPr/>
-                    <a:lstStyle/>
-                    <a:p>
-                      <a:pPr algn="ctr"/>
-                      <a:r>
-                        <a:rPr sz="800"/>
-                        <a:t>6.0</a:t>
-                      </a:r>
-                    </a:p>
-                  </a:txBody>
-                  <a:tcPr/>
-                </a:tc>
-                <a:tc>
-                  <a:txBody>
-                    <a:bodyPr/>
-                    <a:lstStyle/>
-                    <a:p>
-                      <a:pPr algn="ctr"/>
-                      <a:r>
-                        <a:rPr sz="800"/>
-                        <a:t>パン</a:t>
-                      </a:r>
-                    </a:p>
-                  </a:txBody>
-                  <a:tcPr/>
-                </a:tc>
-              </a:tr>
-              <a:tr h="540000">
-                <a:tc>
-                  <a:txBody>
-                    <a:bodyPr/>
-                    <a:lstStyle/>
-                    <a:p>
-                      <a:pPr algn="ctr"/>
-                      <a:r>
-                        <a:rPr sz="800"/>
-                        <a:t>5</a:t>
+                        <a:rPr sz="800">
+                          <a:solidFill>
+                            <a:srgbClr val="000000"/>
+                          </a:solidFill>
+                        </a:rPr>
+                        <a:t>3</a:t>
                       </a:r>
                     </a:p>
                   </a:txBody>
                   <a:tcPr>
                     <a:solidFill>
-                      <a:srgbClr val="DBE5F1"/>
+                      <a:srgbClr val="FFFFFF"/>
                     </a:solidFill>
                   </a:tcPr>
                 </a:tc>
@@ -5087,14 +5593,18 @@
                     <a:p>
                       <a:pPr algn="ctr"/>
                       <a:r>
-                        <a:rPr sz="800"/>
-                        <a:t>べっこう色</a:t>
+                        <a:rPr sz="800">
+                          <a:solidFill>
+                            <a:srgbClr val="000000"/>
+                          </a:solidFill>
+                        </a:rPr>
+                        <a:t>ハシバミ色</a:t>
                       </a:r>
                     </a:p>
                   </a:txBody>
                   <a:tcPr>
                     <a:solidFill>
-                      <a:srgbClr val="DBE5F1"/>
+                      <a:srgbClr val="FFFFFF"/>
                     </a:solidFill>
                   </a:tcPr>
                 </a:tc>
@@ -5105,14 +5615,18 @@
                     <a:p>
                       <a:pPr algn="ctr"/>
                       <a:r>
-                        <a:rPr sz="800"/>
-                        <a:t>Amber</a:t>
+                        <a:rPr sz="800">
+                          <a:solidFill>
+                            <a:srgbClr val="000000"/>
+                          </a:solidFill>
+                        </a:rPr>
+                        <a:t>Hazelnut</a:t>
                       </a:r>
                     </a:p>
                   </a:txBody>
                   <a:tcPr>
                     <a:solidFill>
-                      <a:srgbClr val="DBE5F1"/>
+                      <a:srgbClr val="FFFFFF"/>
                     </a:solidFill>
                   </a:tcPr>
                 </a:tc>
@@ -5123,14 +5637,18 @@
                     <a:p>
                       <a:pPr algn="ctr"/>
                       <a:r>
-                        <a:rPr sz="800"/>
-                        <a:t>55.0</a:t>
+                        <a:rPr sz="800">
+                          <a:solidFill>
+                            <a:srgbClr val="000000"/>
+                          </a:solidFill>
+                        </a:rPr>
+                        <a:t>65.0</a:t>
                       </a:r>
                     </a:p>
                   </a:txBody>
                   <a:tcPr>
                     <a:solidFill>
-                      <a:srgbClr val="DBE5F1"/>
+                      <a:srgbClr val="FFFFFF"/>
                     </a:solidFill>
                   </a:tcPr>
                 </a:tc>
@@ -5141,14 +5659,18 @@
                     <a:p>
                       <a:pPr algn="ctr"/>
                       <a:r>
-                        <a:rPr sz="800"/>
-                        <a:t>20.3</a:t>
+                        <a:rPr sz="800">
+                          <a:solidFill>
+                            <a:srgbClr val="000000"/>
+                          </a:solidFill>
+                        </a:rPr>
+                        <a:t>10.1</a:t>
                       </a:r>
                     </a:p>
                   </a:txBody>
                   <a:tcPr>
                     <a:solidFill>
-                      <a:srgbClr val="DBE5F1"/>
+                      <a:srgbClr val="FFFFFF"/>
                     </a:solidFill>
                   </a:tcPr>
                 </a:tc>
@@ -5159,14 +5681,18 @@
                     <a:p>
                       <a:pPr algn="ctr"/>
                       <a:r>
-                        <a:rPr sz="800"/>
-                        <a:t>45.0</a:t>
+                        <a:rPr sz="800">
+                          <a:solidFill>
+                            <a:srgbClr val="000000"/>
+                          </a:solidFill>
+                        </a:rPr>
+                        <a:t>30.2</a:t>
                       </a:r>
                     </a:p>
                   </a:txBody>
                   <a:tcPr>
                     <a:solidFill>
-                      <a:srgbClr val="DBE5F1"/>
+                      <a:srgbClr val="FFFFFF"/>
                     </a:solidFill>
                   </a:tcPr>
                 </a:tc>
@@ -5177,14 +5703,18 @@
                     <a:p>
                       <a:pPr algn="ctr"/>
                       <a:r>
-                        <a:rPr sz="800"/>
-                        <a:t>4.0</a:t>
+                        <a:rPr sz="800">
+                          <a:solidFill>
+                            <a:srgbClr val="000000"/>
+                          </a:solidFill>
+                        </a:rPr>
+                        <a:t>5.0</a:t>
                       </a:r>
                     </a:p>
                   </a:txBody>
                   <a:tcPr>
                     <a:solidFill>
-                      <a:srgbClr val="DBE5F1"/>
+                      <a:srgbClr val="FFFFFF"/>
                     </a:solidFill>
                   </a:tcPr>
                 </a:tc>
@@ -5195,14 +5725,18 @@
                     <a:p>
                       <a:pPr algn="ctr"/>
                       <a:r>
-                        <a:rPr sz="800"/>
-                        <a:t>カラメル</a:t>
+                        <a:rPr sz="800">
+                          <a:solidFill>
+                            <a:srgbClr val="000000"/>
+                          </a:solidFill>
+                        </a:rPr>
+                        <a:t>焼き菓子</a:t>
                       </a:r>
                     </a:p>
                   </a:txBody>
                   <a:tcPr>
                     <a:solidFill>
-                      <a:srgbClr val="DBE5F1"/>
+                      <a:srgbClr val="FFFFFF"/>
                     </a:solidFill>
                   </a:tcPr>
                 </a:tc>
@@ -5215,12 +5749,20 @@
                     <a:p>
                       <a:pPr algn="ctr"/>
                       <a:r>
-                        <a:rPr sz="800"/>
-                        <a:t>6</a:t>
+                        <a:rPr sz="800">
+                          <a:solidFill>
+                            <a:srgbClr val="000000"/>
+                          </a:solidFill>
+                        </a:rPr>
+                        <a:t>4</a:t>
                       </a:r>
                     </a:p>
                   </a:txBody>
-                  <a:tcPr/>
+                  <a:tcPr>
+                    <a:solidFill>
+                      <a:srgbClr val="FFFFFF"/>
+                    </a:solidFill>
+                  </a:tcPr>
                 </a:tc>
                 <a:tc>
                   <a:txBody>
@@ -5229,12 +5771,20 @@
                     <a:p>
                       <a:pPr algn="ctr"/>
                       <a:r>
-                        <a:rPr sz="800"/>
-                        <a:t>焦がしバター色</a:t>
+                        <a:rPr sz="800">
+                          <a:solidFill>
+                            <a:srgbClr val="000000"/>
+                          </a:solidFill>
+                        </a:rPr>
+                        <a:t>こんがり</a:t>
                       </a:r>
                     </a:p>
                   </a:txBody>
-                  <a:tcPr/>
+                  <a:tcPr>
+                    <a:solidFill>
+                      <a:srgbClr val="FFFFFF"/>
+                    </a:solidFill>
+                  </a:tcPr>
                 </a:tc>
                 <a:tc>
                   <a:txBody>
@@ -5243,12 +5793,20 @@
                     <a:p>
                       <a:pPr algn="ctr"/>
                       <a:r>
-                        <a:rPr sz="800"/>
-                        <a:t>Beurre Noisette</a:t>
+                        <a:rPr sz="800">
+                          <a:solidFill>
+                            <a:srgbClr val="000000"/>
+                          </a:solidFill>
+                        </a:rPr>
+                        <a:t>Toasted</a:t>
                       </a:r>
                     </a:p>
                   </a:txBody>
-                  <a:tcPr/>
+                  <a:tcPr>
+                    <a:solidFill>
+                      <a:srgbClr val="FFFFFF"/>
+                    </a:solidFill>
+                  </a:tcPr>
                 </a:tc>
                 <a:tc>
                   <a:txBody>
@@ -5257,12 +5815,20 @@
                     <a:p>
                       <a:pPr algn="ctr"/>
                       <a:r>
-                        <a:rPr sz="800"/>
-                        <a:t>48.0</a:t>
+                        <a:rPr sz="800">
+                          <a:solidFill>
+                            <a:srgbClr val="000000"/>
+                          </a:solidFill>
+                        </a:rPr>
+                        <a:t>60.0</a:t>
                       </a:r>
                     </a:p>
                   </a:txBody>
-                  <a:tcPr/>
+                  <a:tcPr>
+                    <a:solidFill>
+                      <a:srgbClr val="FFFFFF"/>
+                    </a:solidFill>
+                  </a:tcPr>
                 </a:tc>
                 <a:tc>
                   <a:txBody>
@@ -5271,12 +5837,20 @@
                     <a:p>
                       <a:pPr algn="ctr"/>
                       <a:r>
-                        <a:rPr sz="800"/>
-                        <a:t>12.5</a:t>
+                        <a:rPr sz="800">
+                          <a:solidFill>
+                            <a:srgbClr val="000000"/>
+                          </a:solidFill>
+                        </a:rPr>
+                        <a:t>15.2</a:t>
                       </a:r>
                     </a:p>
                   </a:txBody>
-                  <a:tcPr/>
+                  <a:tcPr>
+                    <a:solidFill>
+                      <a:srgbClr val="FFFFFF"/>
+                    </a:solidFill>
+                  </a:tcPr>
                 </a:tc>
                 <a:tc>
                   <a:txBody>
@@ -5285,12 +5859,20 @@
                     <a:p>
                       <a:pPr algn="ctr"/>
                       <a:r>
-                        <a:rPr sz="800"/>
-                        <a:t>28.0</a:t>
+                        <a:rPr sz="800">
+                          <a:solidFill>
+                            <a:srgbClr val="000000"/>
+                          </a:solidFill>
+                        </a:rPr>
+                        <a:t>35.8</a:t>
                       </a:r>
                     </a:p>
                   </a:txBody>
-                  <a:tcPr/>
+                  <a:tcPr>
+                    <a:solidFill>
+                      <a:srgbClr val="FFFFFF"/>
+                    </a:solidFill>
+                  </a:tcPr>
                 </a:tc>
                 <a:tc>
                   <a:txBody>
@@ -5299,12 +5881,20 @@
                     <a:p>
                       <a:pPr algn="ctr"/>
                       <a:r>
-                        <a:rPr sz="800"/>
-                        <a:t>4.0</a:t>
+                        <a:rPr sz="800">
+                          <a:solidFill>
+                            <a:srgbClr val="000000"/>
+                          </a:solidFill>
+                        </a:rPr>
+                        <a:t>6.0</a:t>
                       </a:r>
                     </a:p>
                   </a:txBody>
-                  <a:tcPr/>
+                  <a:tcPr>
+                    <a:solidFill>
+                      <a:srgbClr val="FFFFFF"/>
+                    </a:solidFill>
+                  </a:tcPr>
                 </a:tc>
                 <a:tc>
                   <a:txBody>
@@ -5313,12 +5903,20 @@
                     <a:p>
                       <a:pPr algn="ctr"/>
                       <a:r>
-                        <a:rPr sz="800"/>
-                        <a:t>ソース</a:t>
+                        <a:rPr sz="800">
+                          <a:solidFill>
+                            <a:srgbClr val="000000"/>
+                          </a:solidFill>
+                        </a:rPr>
+                        <a:t>パン</a:t>
                       </a:r>
                     </a:p>
                   </a:txBody>
-                  <a:tcPr/>
+                  <a:tcPr>
+                    <a:solidFill>
+                      <a:srgbClr val="FFFFFF"/>
+                    </a:solidFill>
+                  </a:tcPr>
                 </a:tc>
               </a:tr>
               <a:tr h="540000">
@@ -5329,14 +5927,18 @@
                     <a:p>
                       <a:pPr algn="ctr"/>
                       <a:r>
-                        <a:rPr sz="800"/>
-                        <a:t>N</a:t>
+                        <a:rPr sz="800">
+                          <a:solidFill>
+                            <a:srgbClr val="000000"/>
+                          </a:solidFill>
+                        </a:rPr>
+                        <a:t>5</a:t>
                       </a:r>
                     </a:p>
                   </a:txBody>
                   <a:tcPr>
                     <a:solidFill>
-                      <a:srgbClr val="DBE5F1"/>
+                      <a:srgbClr val="FFFFFF"/>
                     </a:solidFill>
                   </a:tcPr>
                 </a:tc>
@@ -5347,14 +5949,18 @@
                     <a:p>
                       <a:pPr algn="ctr"/>
                       <a:r>
-                        <a:rPr sz="800"/>
-                        <a:t>(ユーザー定義)</a:t>
+                        <a:rPr sz="800">
+                          <a:solidFill>
+                            <a:srgbClr val="000000"/>
+                          </a:solidFill>
+                        </a:rPr>
+                        <a:t>べっこう色</a:t>
                       </a:r>
                     </a:p>
                   </a:txBody>
                   <a:tcPr>
                     <a:solidFill>
-                      <a:srgbClr val="DBE5F1"/>
+                      <a:srgbClr val="FFFFFF"/>
                     </a:solidFill>
                   </a:tcPr>
                 </a:tc>
@@ -5365,14 +5971,18 @@
                     <a:p>
                       <a:pPr algn="ctr"/>
                       <a:r>
-                        <a:rPr sz="800"/>
-                        <a:t>(user-defined)</a:t>
+                        <a:rPr sz="800">
+                          <a:solidFill>
+                            <a:srgbClr val="000000"/>
+                          </a:solidFill>
+                        </a:rPr>
+                        <a:t>Amber</a:t>
                       </a:r>
                     </a:p>
                   </a:txBody>
                   <a:tcPr>
                     <a:solidFill>
-                      <a:srgbClr val="DBE5F1"/>
+                      <a:srgbClr val="FFFFFF"/>
                     </a:solidFill>
                   </a:tcPr>
                 </a:tc>
@@ -5383,14 +5993,18 @@
                     <a:p>
                       <a:pPr algn="ctr"/>
                       <a:r>
-                        <a:rPr sz="800"/>
-                        <a:t>...</a:t>
+                        <a:rPr sz="800">
+                          <a:solidFill>
+                            <a:srgbClr val="000000"/>
+                          </a:solidFill>
+                        </a:rPr>
+                        <a:t>55.0</a:t>
                       </a:r>
                     </a:p>
                   </a:txBody>
                   <a:tcPr>
                     <a:solidFill>
-                      <a:srgbClr val="DBE5F1"/>
+                      <a:srgbClr val="FFFFFF"/>
                     </a:solidFill>
                   </a:tcPr>
                 </a:tc>
@@ -5401,14 +6015,18 @@
                     <a:p>
                       <a:pPr algn="ctr"/>
                       <a:r>
-                        <a:rPr sz="800"/>
-                        <a:t>...</a:t>
+                        <a:rPr sz="800">
+                          <a:solidFill>
+                            <a:srgbClr val="000000"/>
+                          </a:solidFill>
+                        </a:rPr>
+                        <a:t>20.3</a:t>
                       </a:r>
                     </a:p>
                   </a:txBody>
                   <a:tcPr>
                     <a:solidFill>
-                      <a:srgbClr val="DBE5F1"/>
+                      <a:srgbClr val="FFFFFF"/>
                     </a:solidFill>
                   </a:tcPr>
                 </a:tc>
@@ -5419,14 +6037,18 @@
                     <a:p>
                       <a:pPr algn="ctr"/>
                       <a:r>
-                        <a:rPr sz="800"/>
-                        <a:t>...</a:t>
+                        <a:rPr sz="800">
+                          <a:solidFill>
+                            <a:srgbClr val="000000"/>
+                          </a:solidFill>
+                        </a:rPr>
+                        <a:t>45.0</a:t>
                       </a:r>
                     </a:p>
                   </a:txBody>
                   <a:tcPr>
                     <a:solidFill>
-                      <a:srgbClr val="DBE5F1"/>
+                      <a:srgbClr val="FFFFFF"/>
                     </a:solidFill>
                   </a:tcPr>
                 </a:tc>
@@ -5437,14 +6059,18 @@
                     <a:p>
                       <a:pPr algn="ctr"/>
                       <a:r>
-                        <a:rPr sz="800"/>
-                        <a:t>...</a:t>
+                        <a:rPr sz="800">
+                          <a:solidFill>
+                            <a:srgbClr val="000000"/>
+                          </a:solidFill>
+                        </a:rPr>
+                        <a:t>4.0</a:t>
                       </a:r>
                     </a:p>
                   </a:txBody>
                   <a:tcPr>
                     <a:solidFill>
-                      <a:srgbClr val="DBE5F1"/>
+                      <a:srgbClr val="FFFFFF"/>
                     </a:solidFill>
                   </a:tcPr>
                 </a:tc>
@@ -5455,14 +6081,374 @@
                     <a:p>
                       <a:pPr algn="ctr"/>
                       <a:r>
-                        <a:rPr sz="800"/>
+                        <a:rPr sz="800">
+                          <a:solidFill>
+                            <a:srgbClr val="000000"/>
+                          </a:solidFill>
+                        </a:rPr>
+                        <a:t>カラメル</a:t>
+                      </a:r>
+                    </a:p>
+                  </a:txBody>
+                  <a:tcPr>
+                    <a:solidFill>
+                      <a:srgbClr val="FFFFFF"/>
+                    </a:solidFill>
+                  </a:tcPr>
+                </a:tc>
+              </a:tr>
+              <a:tr h="540000">
+                <a:tc>
+                  <a:txBody>
+                    <a:bodyPr/>
+                    <a:lstStyle/>
+                    <a:p>
+                      <a:pPr algn="ctr"/>
+                      <a:r>
+                        <a:rPr sz="800">
+                          <a:solidFill>
+                            <a:srgbClr val="000000"/>
+                          </a:solidFill>
+                        </a:rPr>
+                        <a:t>6</a:t>
+                      </a:r>
+                    </a:p>
+                  </a:txBody>
+                  <a:tcPr>
+                    <a:solidFill>
+                      <a:srgbClr val="FFFFFF"/>
+                    </a:solidFill>
+                  </a:tcPr>
+                </a:tc>
+                <a:tc>
+                  <a:txBody>
+                    <a:bodyPr/>
+                    <a:lstStyle/>
+                    <a:p>
+                      <a:pPr algn="ctr"/>
+                      <a:r>
+                        <a:rPr sz="800">
+                          <a:solidFill>
+                            <a:srgbClr val="000000"/>
+                          </a:solidFill>
+                        </a:rPr>
+                        <a:t>焦がしバター色</a:t>
+                      </a:r>
+                    </a:p>
+                  </a:txBody>
+                  <a:tcPr>
+                    <a:solidFill>
+                      <a:srgbClr val="FFFFFF"/>
+                    </a:solidFill>
+                  </a:tcPr>
+                </a:tc>
+                <a:tc>
+                  <a:txBody>
+                    <a:bodyPr/>
+                    <a:lstStyle/>
+                    <a:p>
+                      <a:pPr algn="ctr"/>
+                      <a:r>
+                        <a:rPr sz="800">
+                          <a:solidFill>
+                            <a:srgbClr val="000000"/>
+                          </a:solidFill>
+                        </a:rPr>
+                        <a:t>Beurre Noisette</a:t>
+                      </a:r>
+                    </a:p>
+                  </a:txBody>
+                  <a:tcPr>
+                    <a:solidFill>
+                      <a:srgbClr val="FFFFFF"/>
+                    </a:solidFill>
+                  </a:tcPr>
+                </a:tc>
+                <a:tc>
+                  <a:txBody>
+                    <a:bodyPr/>
+                    <a:lstStyle/>
+                    <a:p>
+                      <a:pPr algn="ctr"/>
+                      <a:r>
+                        <a:rPr sz="800">
+                          <a:solidFill>
+                            <a:srgbClr val="000000"/>
+                          </a:solidFill>
+                        </a:rPr>
+                        <a:t>48.0</a:t>
+                      </a:r>
+                    </a:p>
+                  </a:txBody>
+                  <a:tcPr>
+                    <a:solidFill>
+                      <a:srgbClr val="FFFFFF"/>
+                    </a:solidFill>
+                  </a:tcPr>
+                </a:tc>
+                <a:tc>
+                  <a:txBody>
+                    <a:bodyPr/>
+                    <a:lstStyle/>
+                    <a:p>
+                      <a:pPr algn="ctr"/>
+                      <a:r>
+                        <a:rPr sz="800">
+                          <a:solidFill>
+                            <a:srgbClr val="000000"/>
+                          </a:solidFill>
+                        </a:rPr>
+                        <a:t>12.5</a:t>
+                      </a:r>
+                    </a:p>
+                  </a:txBody>
+                  <a:tcPr>
+                    <a:solidFill>
+                      <a:srgbClr val="FFFFFF"/>
+                    </a:solidFill>
+                  </a:tcPr>
+                </a:tc>
+                <a:tc>
+                  <a:txBody>
+                    <a:bodyPr/>
+                    <a:lstStyle/>
+                    <a:p>
+                      <a:pPr algn="ctr"/>
+                      <a:r>
+                        <a:rPr sz="800">
+                          <a:solidFill>
+                            <a:srgbClr val="000000"/>
+                          </a:solidFill>
+                        </a:rPr>
+                        <a:t>28.0</a:t>
+                      </a:r>
+                    </a:p>
+                  </a:txBody>
+                  <a:tcPr>
+                    <a:solidFill>
+                      <a:srgbClr val="FFFFFF"/>
+                    </a:solidFill>
+                  </a:tcPr>
+                </a:tc>
+                <a:tc>
+                  <a:txBody>
+                    <a:bodyPr/>
+                    <a:lstStyle/>
+                    <a:p>
+                      <a:pPr algn="ctr"/>
+                      <a:r>
+                        <a:rPr sz="800">
+                          <a:solidFill>
+                            <a:srgbClr val="000000"/>
+                          </a:solidFill>
+                        </a:rPr>
+                        <a:t>4.0</a:t>
+                      </a:r>
+                    </a:p>
+                  </a:txBody>
+                  <a:tcPr>
+                    <a:solidFill>
+                      <a:srgbClr val="FFFFFF"/>
+                    </a:solidFill>
+                  </a:tcPr>
+                </a:tc>
+                <a:tc>
+                  <a:txBody>
+                    <a:bodyPr/>
+                    <a:lstStyle/>
+                    <a:p>
+                      <a:pPr algn="ctr"/>
+                      <a:r>
+                        <a:rPr sz="800">
+                          <a:solidFill>
+                            <a:srgbClr val="000000"/>
+                          </a:solidFill>
+                        </a:rPr>
+                        <a:t>ソース</a:t>
+                      </a:r>
+                    </a:p>
+                  </a:txBody>
+                  <a:tcPr>
+                    <a:solidFill>
+                      <a:srgbClr val="FFFFFF"/>
+                    </a:solidFill>
+                  </a:tcPr>
+                </a:tc>
+              </a:tr>
+              <a:tr h="540000">
+                <a:tc>
+                  <a:txBody>
+                    <a:bodyPr/>
+                    <a:lstStyle/>
+                    <a:p>
+                      <a:pPr algn="ctr"/>
+                      <a:r>
+                        <a:rPr sz="800">
+                          <a:solidFill>
+                            <a:srgbClr val="000000"/>
+                          </a:solidFill>
+                        </a:rPr>
+                        <a:t>N</a:t>
+                      </a:r>
+                    </a:p>
+                  </a:txBody>
+                  <a:tcPr>
+                    <a:solidFill>
+                      <a:srgbClr val="FFFFFF"/>
+                    </a:solidFill>
+                  </a:tcPr>
+                </a:tc>
+                <a:tc>
+                  <a:txBody>
+                    <a:bodyPr/>
+                    <a:lstStyle/>
+                    <a:p>
+                      <a:pPr algn="ctr"/>
+                      <a:r>
+                        <a:rPr sz="800">
+                          <a:solidFill>
+                            <a:srgbClr val="000000"/>
+                          </a:solidFill>
+                        </a:rPr>
+                        <a:t>(ユーザー定義)</a:t>
+                      </a:r>
+                    </a:p>
+                  </a:txBody>
+                  <a:tcPr>
+                    <a:solidFill>
+                      <a:srgbClr val="FFFFFF"/>
+                    </a:solidFill>
+                  </a:tcPr>
+                </a:tc>
+                <a:tc>
+                  <a:txBody>
+                    <a:bodyPr/>
+                    <a:lstStyle/>
+                    <a:p>
+                      <a:pPr algn="ctr"/>
+                      <a:r>
+                        <a:rPr sz="800">
+                          <a:solidFill>
+                            <a:srgbClr val="000000"/>
+                          </a:solidFill>
+                        </a:rPr>
+                        <a:t>(user-defined)</a:t>
+                      </a:r>
+                    </a:p>
+                  </a:txBody>
+                  <a:tcPr>
+                    <a:solidFill>
+                      <a:srgbClr val="FFFFFF"/>
+                    </a:solidFill>
+                  </a:tcPr>
+                </a:tc>
+                <a:tc>
+                  <a:txBody>
+                    <a:bodyPr/>
+                    <a:lstStyle/>
+                    <a:p>
+                      <a:pPr algn="ctr"/>
+                      <a:r>
+                        <a:rPr sz="800">
+                          <a:solidFill>
+                            <a:srgbClr val="000000"/>
+                          </a:solidFill>
+                        </a:rPr>
                         <a:t>...</a:t>
                       </a:r>
                     </a:p>
                   </a:txBody>
                   <a:tcPr>
                     <a:solidFill>
-                      <a:srgbClr val="DBE5F1"/>
+                      <a:srgbClr val="FFFFFF"/>
+                    </a:solidFill>
+                  </a:tcPr>
+                </a:tc>
+                <a:tc>
+                  <a:txBody>
+                    <a:bodyPr/>
+                    <a:lstStyle/>
+                    <a:p>
+                      <a:pPr algn="ctr"/>
+                      <a:r>
+                        <a:rPr sz="800">
+                          <a:solidFill>
+                            <a:srgbClr val="000000"/>
+                          </a:solidFill>
+                        </a:rPr>
+                        <a:t>...</a:t>
+                      </a:r>
+                    </a:p>
+                  </a:txBody>
+                  <a:tcPr>
+                    <a:solidFill>
+                      <a:srgbClr val="FFFFFF"/>
+                    </a:solidFill>
+                  </a:tcPr>
+                </a:tc>
+                <a:tc>
+                  <a:txBody>
+                    <a:bodyPr/>
+                    <a:lstStyle/>
+                    <a:p>
+                      <a:pPr algn="ctr"/>
+                      <a:r>
+                        <a:rPr sz="800">
+                          <a:solidFill>
+                            <a:srgbClr val="000000"/>
+                          </a:solidFill>
+                        </a:rPr>
+                        <a:t>...</a:t>
+                      </a:r>
+                    </a:p>
+                  </a:txBody>
+                  <a:tcPr>
+                    <a:solidFill>
+                      <a:srgbClr val="FFFFFF"/>
+                    </a:solidFill>
+                  </a:tcPr>
+                </a:tc>
+                <a:tc>
+                  <a:txBody>
+                    <a:bodyPr/>
+                    <a:lstStyle/>
+                    <a:p>
+                      <a:pPr algn="ctr"/>
+                      <a:r>
+                        <a:rPr sz="800">
+                          <a:solidFill>
+                            <a:srgbClr val="000000"/>
+                          </a:solidFill>
+                        </a:rPr>
+                        <a:t>...</a:t>
+                      </a:r>
+                    </a:p>
+                  </a:txBody>
+                  <a:tcPr>
+                    <a:solidFill>
+                      <a:srgbClr val="FFFFFF"/>
+                    </a:solidFill>
+                  </a:tcPr>
+                </a:tc>
+                <a:tc>
+                  <a:txBody>
+                    <a:bodyPr/>
+                    <a:lstStyle/>
+                    <a:p>
+                      <a:pPr algn="ctr"/>
+                      <a:r>
+                        <a:rPr sz="800">
+                          <a:solidFill>
+                            <a:srgbClr val="000000"/>
+                          </a:solidFill>
+                        </a:rPr>
+                        <a:t>...</a:t>
+                      </a:r>
+                    </a:p>
+                  </a:txBody>
+                  <a:tcPr>
+                    <a:solidFill>
+                      <a:srgbClr val="FFFFFF"/>
                     </a:solidFill>
                   </a:tcPr>
                 </a:tc>
@@ -5498,7 +6484,7 @@
         <p:spPr>
           <a:xfrm>
             <a:off x="360000" y="180000"/>
-            <a:ext cx="6480000" cy="540000"/>
+            <a:ext cx="8280000" cy="540000"/>
           </a:xfrm>
           <a:prstGeom prst="rect">
             <a:avLst/>
@@ -5513,8 +6499,12 @@
           <a:p>
             <a:pPr algn="ctr"/>
             <a:r>
-              <a:rPr sz="1400" b="1"/>
-              <a:t>【図4】調理タイミング判定方法の処理フロー</a:t>
+              <a:rPr sz="1400" b="1">
+                <a:solidFill>
+                  <a:srgbClr val="000000"/>
+                </a:solidFill>
+              </a:rPr>
+              <a:t>【図4】</a:t>
             </a:r>
           </a:p>
         </p:txBody>
@@ -5527,14 +6517,14 @@
         </p:nvSpPr>
         <p:spPr>
           <a:xfrm>
-            <a:off x="2880000" y="1080000"/>
-            <a:ext cx="3240000" cy="648000"/>
+            <a:off x="3240000" y="900000"/>
+            <a:ext cx="2520000" cy="432000"/>
           </a:xfrm>
           <a:prstGeom prst="roundRect">
             <a:avLst/>
           </a:prstGeom>
           <a:solidFill>
-            <a:srgbClr val="FFF2CC"/>
+            <a:srgbClr val="FFFFFF"/>
           </a:solidFill>
           <a:ln w="19050">
             <a:solidFill>
@@ -5562,29 +6552,68 @@
           <a:p>
             <a:pPr algn="ctr"/>
             <a:r>
-              <a:rPr sz="900" b="0"/>
-              <a:t>S1: プリセットから
-目標色を選択</a:t>
-            </a:r>
-          </a:p>
-        </p:txBody>
-      </p:sp>
-      <p:sp>
-        <p:nvSpPr>
-          <p:cNvPr id="4" name="Rounded Rectangle 3"/>
+              <a:rPr sz="1000" b="1">
+                <a:solidFill>
+                  <a:srgbClr val="000000"/>
+                </a:solidFill>
+              </a:rPr>
+              <a:t>開始</a:t>
+            </a:r>
+          </a:p>
+        </p:txBody>
+      </p:sp>
+      <p:cxnSp>
+        <p:nvCxnSpPr>
+          <p:cNvPr id="4" name="Connector 3"/>
+          <p:cNvCxnSpPr/>
+          <p:nvPr/>
+        </p:nvCxnSpPr>
+        <p:spPr>
+          <a:xfrm>
+            <a:off x="4500000" y="1332000"/>
+            <a:ext cx="0" cy="180000"/>
+          </a:xfrm>
+          <a:prstGeom prst="line">
+            <a:avLst/>
+          </a:prstGeom>
+          <a:ln w="19050">
+            <a:solidFill>
+              <a:srgbClr val="000000"/>
+            </a:solidFill>
+            <a:tailEnd type="triangle" w="med" len="med"/>
+          </a:ln>
+        </p:spPr>
+        <p:style>
+          <a:lnRef idx="2">
+            <a:schemeClr val="accent1"/>
+          </a:lnRef>
+          <a:fillRef idx="0">
+            <a:schemeClr val="accent1"/>
+          </a:fillRef>
+          <a:effectRef idx="1">
+            <a:schemeClr val="accent1"/>
+          </a:effectRef>
+          <a:fontRef idx="minor">
+            <a:schemeClr val="tx1"/>
+          </a:fontRef>
+        </p:style>
+      </p:cxnSp>
+      <p:sp>
+        <p:nvSpPr>
+          <p:cNvPr id="5" name="Rounded Rectangle 4"/>
           <p:cNvSpPr/>
           <p:nvPr/>
         </p:nvSpPr>
         <p:spPr>
           <a:xfrm>
-            <a:off x="2880000" y="1872000"/>
-            <a:ext cx="3240000" cy="648000"/>
+            <a:off x="2700000" y="1512000"/>
+            <a:ext cx="3600000" cy="468000"/>
           </a:xfrm>
           <a:prstGeom prst="roundRect">
             <a:avLst/>
           </a:prstGeom>
           <a:solidFill>
-            <a:srgbClr val="F2F2F2"/>
+            <a:srgbClr val="FFFFFF"/>
           </a:solidFill>
           <a:ln w="19050">
             <a:solidFill>
@@ -5612,29 +6641,68 @@
           <a:p>
             <a:pPr algn="ctr"/>
             <a:r>
-              <a:rPr sz="900" b="0"/>
-              <a:t>S2: 白色基準面の計測
-→ 補正係数算出</a:t>
-            </a:r>
-          </a:p>
-        </p:txBody>
-      </p:sp>
-      <p:sp>
-        <p:nvSpPr>
-          <p:cNvPr id="5" name="Rounded Rectangle 4"/>
+              <a:rPr sz="900" b="0">
+                <a:solidFill>
+                  <a:srgbClr val="000000"/>
+                </a:solidFill>
+              </a:rPr>
+              <a:t>S1: プリセットから目標色を選択</a:t>
+            </a:r>
+          </a:p>
+        </p:txBody>
+      </p:sp>
+      <p:cxnSp>
+        <p:nvCxnSpPr>
+          <p:cNvPr id="6" name="Connector 5"/>
+          <p:cNvCxnSpPr/>
+          <p:nvPr/>
+        </p:nvCxnSpPr>
+        <p:spPr>
+          <a:xfrm>
+            <a:off x="4500000" y="1980000"/>
+            <a:ext cx="0" cy="144000"/>
+          </a:xfrm>
+          <a:prstGeom prst="line">
+            <a:avLst/>
+          </a:prstGeom>
+          <a:ln w="19050">
+            <a:solidFill>
+              <a:srgbClr val="000000"/>
+            </a:solidFill>
+            <a:tailEnd type="triangle" w="med" len="med"/>
+          </a:ln>
+        </p:spPr>
+        <p:style>
+          <a:lnRef idx="2">
+            <a:schemeClr val="accent1"/>
+          </a:lnRef>
+          <a:fillRef idx="0">
+            <a:schemeClr val="accent1"/>
+          </a:fillRef>
+          <a:effectRef idx="1">
+            <a:schemeClr val="accent1"/>
+          </a:effectRef>
+          <a:fontRef idx="minor">
+            <a:schemeClr val="tx1"/>
+          </a:fontRef>
+        </p:style>
+      </p:cxnSp>
+      <p:sp>
+        <p:nvSpPr>
+          <p:cNvPr id="7" name="Rounded Rectangle 6"/>
           <p:cNvSpPr/>
           <p:nvPr/>
         </p:nvSpPr>
         <p:spPr>
           <a:xfrm>
-            <a:off x="2880000" y="2664000"/>
-            <a:ext cx="3240000" cy="648000"/>
+            <a:off x="2700000" y="2124000"/>
+            <a:ext cx="3600000" cy="468000"/>
           </a:xfrm>
           <a:prstGeom prst="roundRect">
             <a:avLst/>
           </a:prstGeom>
           <a:solidFill>
-            <a:srgbClr val="DBE5F1"/>
+            <a:srgbClr val="FFFFFF"/>
           </a:solidFill>
           <a:ln w="19050">
             <a:solidFill>
@@ -5662,29 +6730,68 @@
           <a:p>
             <a:pPr algn="ctr"/>
             <a:r>
-              <a:rPr sz="900" b="0"/>
-              <a:t>S3: 食品初期色を計測
-→ 初期ΔE算出</a:t>
-            </a:r>
-          </a:p>
-        </p:txBody>
-      </p:sp>
-      <p:sp>
-        <p:nvSpPr>
-          <p:cNvPr id="6" name="Rounded Rectangle 5"/>
+              <a:rPr sz="900" b="0">
+                <a:solidFill>
+                  <a:srgbClr val="000000"/>
+                </a:solidFill>
+              </a:rPr>
+              <a:t>S2: 白色基準面の計測 -&gt; 補正係数算出</a:t>
+            </a:r>
+          </a:p>
+        </p:txBody>
+      </p:sp>
+      <p:cxnSp>
+        <p:nvCxnSpPr>
+          <p:cNvPr id="8" name="Connector 7"/>
+          <p:cNvCxnSpPr/>
+          <p:nvPr/>
+        </p:nvCxnSpPr>
+        <p:spPr>
+          <a:xfrm>
+            <a:off x="4500000" y="2592000"/>
+            <a:ext cx="0" cy="144000"/>
+          </a:xfrm>
+          <a:prstGeom prst="line">
+            <a:avLst/>
+          </a:prstGeom>
+          <a:ln w="19050">
+            <a:solidFill>
+              <a:srgbClr val="000000"/>
+            </a:solidFill>
+            <a:tailEnd type="triangle" w="med" len="med"/>
+          </a:ln>
+        </p:spPr>
+        <p:style>
+          <a:lnRef idx="2">
+            <a:schemeClr val="accent1"/>
+          </a:lnRef>
+          <a:fillRef idx="0">
+            <a:schemeClr val="accent1"/>
+          </a:fillRef>
+          <a:effectRef idx="1">
+            <a:schemeClr val="accent1"/>
+          </a:effectRef>
+          <a:fontRef idx="minor">
+            <a:schemeClr val="tx1"/>
+          </a:fontRef>
+        </p:style>
+      </p:cxnSp>
+      <p:sp>
+        <p:nvSpPr>
+          <p:cNvPr id="9" name="Rounded Rectangle 8"/>
           <p:cNvSpPr/>
           <p:nvPr/>
         </p:nvSpPr>
         <p:spPr>
           <a:xfrm>
-            <a:off x="2880000" y="3456000"/>
-            <a:ext cx="3240000" cy="648000"/>
+            <a:off x="2700000" y="2736000"/>
+            <a:ext cx="3600000" cy="468000"/>
           </a:xfrm>
           <a:prstGeom prst="roundRect">
             <a:avLst/>
           </a:prstGeom>
           <a:solidFill>
-            <a:srgbClr val="E2EFDA"/>
+            <a:srgbClr val="FFFFFF"/>
           </a:solidFill>
           <a:ln w="19050">
             <a:solidFill>
@@ -5712,22 +6819,25 @@
           <a:p>
             <a:pPr algn="ctr"/>
             <a:r>
-              <a:rPr sz="900" b="0"/>
-              <a:t>S4: 食品色の連続計測
-RGBC→L*a*b*→ΔE算出</a:t>
+              <a:rPr sz="900" b="0">
+                <a:solidFill>
+                  <a:srgbClr val="000000"/>
+                </a:solidFill>
+              </a:rPr>
+              <a:t>S3: 食品初期色を計測 -&gt; 初期ΔE算出</a:t>
             </a:r>
           </a:p>
         </p:txBody>
       </p:sp>
       <p:cxnSp>
         <p:nvCxnSpPr>
-          <p:cNvPr id="7" name="Connector 6"/>
+          <p:cNvPr id="10" name="Connector 9"/>
           <p:cNvCxnSpPr/>
           <p:nvPr/>
         </p:nvCxnSpPr>
         <p:spPr>
           <a:xfrm>
-            <a:off x="4500000" y="1728000"/>
+            <a:off x="4500000" y="3204000"/>
             <a:ext cx="0" cy="144000"/>
           </a:xfrm>
           <a:prstGeom prst="line">
@@ -5737,6 +6847,230 @@
             <a:solidFill>
               <a:srgbClr val="000000"/>
             </a:solidFill>
+            <a:tailEnd type="triangle" w="med" len="med"/>
+          </a:ln>
+        </p:spPr>
+        <p:style>
+          <a:lnRef idx="2">
+            <a:schemeClr val="accent1"/>
+          </a:lnRef>
+          <a:fillRef idx="0">
+            <a:schemeClr val="accent1"/>
+          </a:fillRef>
+          <a:effectRef idx="1">
+            <a:schemeClr val="accent1"/>
+          </a:effectRef>
+          <a:fontRef idx="minor">
+            <a:schemeClr val="tx1"/>
+          </a:fontRef>
+        </p:style>
+      </p:cxnSp>
+      <p:sp>
+        <p:nvSpPr>
+          <p:cNvPr id="11" name="Rounded Rectangle 10"/>
+          <p:cNvSpPr/>
+          <p:nvPr/>
+        </p:nvSpPr>
+        <p:spPr>
+          <a:xfrm>
+            <a:off x="2700000" y="3348000"/>
+            <a:ext cx="3600000" cy="540000"/>
+          </a:xfrm>
+          <a:prstGeom prst="roundRect">
+            <a:avLst/>
+          </a:prstGeom>
+          <a:solidFill>
+            <a:srgbClr val="FFFFFF"/>
+          </a:solidFill>
+          <a:ln w="19050">
+            <a:solidFill>
+              <a:srgbClr val="000000"/>
+            </a:solidFill>
+          </a:ln>
+        </p:spPr>
+        <p:style>
+          <a:lnRef idx="1">
+            <a:schemeClr val="accent1"/>
+          </a:lnRef>
+          <a:fillRef idx="3">
+            <a:schemeClr val="accent1"/>
+          </a:fillRef>
+          <a:effectRef idx="2">
+            <a:schemeClr val="accent1"/>
+          </a:effectRef>
+          <a:fontRef idx="minor">
+            <a:schemeClr val="lt1"/>
+          </a:fontRef>
+        </p:style>
+        <p:txBody>
+          <a:bodyPr rtlCol="0" anchor="ctr" wrap="square" lIns="50800" rIns="50800" tIns="25400" bIns="25400"/>
+          <a:lstStyle/>
+          <a:p>
+            <a:pPr algn="ctr"/>
+            <a:r>
+              <a:rPr sz="900" b="0">
+                <a:solidFill>
+                  <a:srgbClr val="000000"/>
+                </a:solidFill>
+              </a:rPr>
+              <a:t>S4: 食品色の連続計測ループ</a:t>
+            </a:r>
+          </a:p>
+          <a:p>
+            <a:pPr algn="ctr"/>
+            <a:r>
+              <a:rPr sz="900" b="0">
+                <a:solidFill>
+                  <a:srgbClr val="000000"/>
+                </a:solidFill>
+              </a:rPr>
+              <a:t>RGBC -&gt; L*a*b* -&gt; ΔE算出</a:t>
+            </a:r>
+          </a:p>
+        </p:txBody>
+      </p:sp>
+      <p:cxnSp>
+        <p:nvCxnSpPr>
+          <p:cNvPr id="12" name="Connector 11"/>
+          <p:cNvCxnSpPr/>
+          <p:nvPr/>
+        </p:nvCxnSpPr>
+        <p:spPr>
+          <a:xfrm>
+            <a:off x="4500000" y="3888000"/>
+            <a:ext cx="0" cy="216000"/>
+          </a:xfrm>
+          <a:prstGeom prst="line">
+            <a:avLst/>
+          </a:prstGeom>
+          <a:ln w="19050">
+            <a:solidFill>
+              <a:srgbClr val="000000"/>
+            </a:solidFill>
+            <a:tailEnd type="triangle" w="med" len="med"/>
+          </a:ln>
+        </p:spPr>
+        <p:style>
+          <a:lnRef idx="2">
+            <a:schemeClr val="accent1"/>
+          </a:lnRef>
+          <a:fillRef idx="0">
+            <a:schemeClr val="accent1"/>
+          </a:fillRef>
+          <a:effectRef idx="1">
+            <a:schemeClr val="accent1"/>
+          </a:effectRef>
+          <a:fontRef idx="minor">
+            <a:schemeClr val="tx1"/>
+          </a:fontRef>
+        </p:style>
+      </p:cxnSp>
+      <p:sp>
+        <p:nvSpPr>
+          <p:cNvPr id="13" name="Diamond 12"/>
+          <p:cNvSpPr/>
+          <p:nvPr/>
+        </p:nvSpPr>
+        <p:spPr>
+          <a:xfrm>
+            <a:off x="3420000" y="4104000"/>
+            <a:ext cx="2160000" cy="900000"/>
+          </a:xfrm>
+          <a:prstGeom prst="diamond">
+            <a:avLst/>
+          </a:prstGeom>
+          <a:solidFill>
+            <a:srgbClr val="FFFFFF"/>
+          </a:solidFill>
+          <a:ln w="19050">
+            <a:solidFill>
+              <a:srgbClr val="000000"/>
+            </a:solidFill>
+          </a:ln>
+        </p:spPr>
+        <p:style>
+          <a:lnRef idx="1">
+            <a:schemeClr val="accent1"/>
+          </a:lnRef>
+          <a:fillRef idx="3">
+            <a:schemeClr val="accent1"/>
+          </a:fillRef>
+          <a:effectRef idx="2">
+            <a:schemeClr val="accent1"/>
+          </a:effectRef>
+          <a:fontRef idx="minor">
+            <a:schemeClr val="lt1"/>
+          </a:fontRef>
+        </p:style>
+        <p:txBody>
+          <a:bodyPr rtlCol="0" anchor="ctr" wrap="square" lIns="25400" rIns="25400" tIns="25400" bIns="25400"/>
+          <a:lstStyle/>
+          <a:p>
+            <a:pPr algn="ctr"/>
+            <a:r>
+              <a:rPr sz="1000" b="1">
+                <a:solidFill>
+                  <a:srgbClr val="000000"/>
+                </a:solidFill>
+              </a:rPr>
+              <a:t>ΔE &lt; 閾値?</a:t>
+            </a:r>
+          </a:p>
+        </p:txBody>
+      </p:sp>
+      <p:sp>
+        <p:nvSpPr>
+          <p:cNvPr id="14" name="TextBox 13"/>
+          <p:cNvSpPr txBox="1"/>
+          <p:nvPr/>
+        </p:nvSpPr>
+        <p:spPr>
+          <a:xfrm>
+            <a:off x="5760000" y="4392000"/>
+            <a:ext cx="720000" cy="216000"/>
+          </a:xfrm>
+          <a:prstGeom prst="rect">
+            <a:avLst/>
+          </a:prstGeom>
+          <a:noFill/>
+        </p:spPr>
+        <p:txBody>
+          <a:bodyPr wrap="square">
+            <a:spAutoFit/>
+          </a:bodyPr>
+          <a:lstStyle/>
+          <a:p>
+            <a:pPr algn="l"/>
+            <a:r>
+              <a:rPr sz="900" b="1">
+                <a:solidFill>
+                  <a:srgbClr val="000000"/>
+                </a:solidFill>
+              </a:rPr>
+              <a:t>No</a:t>
+            </a:r>
+          </a:p>
+        </p:txBody>
+      </p:sp>
+      <p:cxnSp>
+        <p:nvCxnSpPr>
+          <p:cNvPr id="15" name="Connector 14"/>
+          <p:cNvCxnSpPr/>
+          <p:nvPr/>
+        </p:nvCxnSpPr>
+        <p:spPr>
+          <a:xfrm>
+            <a:off x="5580000" y="4572000"/>
+            <a:ext cx="900000" cy="0"/>
+          </a:xfrm>
+          <a:prstGeom prst="line">
+            <a:avLst/>
+          </a:prstGeom>
+          <a:ln w="19050">
+            <a:solidFill>
+              <a:srgbClr val="000000"/>
+            </a:solidFill>
+            <a:tailEnd type="triangle" w="med" len="med"/>
           </a:ln>
         </p:spPr>
         <p:style>
@@ -5756,14 +7090,14 @@
       </p:cxnSp>
       <p:cxnSp>
         <p:nvCxnSpPr>
-          <p:cNvPr id="8" name="Connector 7"/>
+          <p:cNvPr id="16" name="Connector 15"/>
           <p:cNvCxnSpPr/>
           <p:nvPr/>
         </p:nvCxnSpPr>
         <p:spPr>
-          <a:xfrm>
-            <a:off x="4500000" y="2520000"/>
-            <a:ext cx="0" cy="144000"/>
+          <a:xfrm flipV="1">
+            <a:off x="6480000" y="3600000"/>
+            <a:ext cx="0" cy="972000"/>
           </a:xfrm>
           <a:prstGeom prst="line">
             <a:avLst/>
@@ -5791,14 +7125,14 @@
       </p:cxnSp>
       <p:cxnSp>
         <p:nvCxnSpPr>
-          <p:cNvPr id="9" name="Connector 8"/>
+          <p:cNvPr id="17" name="Connector 16"/>
           <p:cNvCxnSpPr/>
           <p:nvPr/>
         </p:nvCxnSpPr>
         <p:spPr>
-          <a:xfrm>
-            <a:off x="4500000" y="3312000"/>
-            <a:ext cx="0" cy="144000"/>
+          <a:xfrm flipH="1">
+            <a:off x="6300000" y="3600000"/>
+            <a:ext cx="180000" cy="0"/>
           </a:xfrm>
           <a:prstGeom prst="line">
             <a:avLst/>
@@ -5807,6 +7141,7 @@
             <a:solidFill>
               <a:srgbClr val="000000"/>
             </a:solidFill>
+            <a:tailEnd type="triangle" w="med" len="med"/>
           </a:ln>
         </p:spPr>
         <p:style>
@@ -5826,20 +7161,20 @@
       </p:cxnSp>
       <p:sp>
         <p:nvSpPr>
-          <p:cNvPr id="10" name="Rounded Rectangle 9"/>
+          <p:cNvPr id="18" name="Rounded Rectangle 17"/>
           <p:cNvSpPr/>
           <p:nvPr/>
         </p:nvSpPr>
         <p:spPr>
           <a:xfrm>
-            <a:off x="2880000" y="4320000"/>
-            <a:ext cx="3240000" cy="540000"/>
+            <a:off x="540000" y="4212000"/>
+            <a:ext cx="2340000" cy="720000"/>
           </a:xfrm>
           <a:prstGeom prst="roundRect">
             <a:avLst/>
           </a:prstGeom>
           <a:solidFill>
-            <a:srgbClr val="FFD7D7"/>
+            <a:srgbClr val="FFFFFF"/>
           </a:solidFill>
           <a:ln w="19050">
             <a:solidFill>
@@ -5867,22 +7202,37 @@
           <a:p>
             <a:pPr algn="ctr"/>
             <a:r>
-              <a:rPr sz="1000" b="1"/>
-              <a:t>ΔE &lt; 閾値？</a:t>
+              <a:rPr sz="800" b="0">
+                <a:solidFill>
+                  <a:srgbClr val="000000"/>
+                </a:solidFill>
+              </a:rPr>
+              <a:t>予測: 残りサイクル &lt; 5 ?</a:t>
+            </a:r>
+          </a:p>
+          <a:p>
+            <a:pPr algn="ctr"/>
+            <a:r>
+              <a:rPr sz="800" b="0">
+                <a:solidFill>
+                  <a:srgbClr val="000000"/>
+                </a:solidFill>
+              </a:rPr>
+              <a:t>-&gt; 予告通知出力</a:t>
             </a:r>
           </a:p>
         </p:txBody>
       </p:sp>
       <p:cxnSp>
         <p:nvCxnSpPr>
-          <p:cNvPr id="11" name="Connector 10"/>
+          <p:cNvPr id="19" name="Connector 18"/>
           <p:cNvCxnSpPr/>
           <p:nvPr/>
         </p:nvCxnSpPr>
         <p:spPr>
-          <a:xfrm>
-            <a:off x="4500000" y="4104000"/>
-            <a:ext cx="0" cy="216000"/>
+          <a:xfrm flipH="1">
+            <a:off x="2880000" y="4572000"/>
+            <a:ext cx="540000" cy="0"/>
           </a:xfrm>
           <a:prstGeom prst="line">
             <a:avLst/>
@@ -5891,6 +7241,7 @@
             <a:solidFill>
               <a:srgbClr val="000000"/>
             </a:solidFill>
+            <a:tailEnd type="triangle" w="med" len="med"/>
           </a:ln>
         </p:spPr>
         <p:style>
@@ -5910,14 +7261,14 @@
       </p:cxnSp>
       <p:sp>
         <p:nvSpPr>
-          <p:cNvPr id="12" name="TextBox 11"/>
+          <p:cNvPr id="20" name="TextBox 19"/>
           <p:cNvSpPr txBox="1"/>
           <p:nvPr/>
         </p:nvSpPr>
         <p:spPr>
           <a:xfrm>
-            <a:off x="6192000" y="4392000"/>
-            <a:ext cx="720000" cy="288000"/>
+            <a:off x="4140000" y="4968000"/>
+            <a:ext cx="720000" cy="216000"/>
           </a:xfrm>
           <a:prstGeom prst="rect">
             <a:avLst/>
@@ -5932,22 +7283,26 @@
           <a:p>
             <a:pPr algn="l"/>
             <a:r>
-              <a:rPr sz="900" b="0"/>
-              <a:t>No</a:t>
+              <a:rPr sz="900" b="1">
+                <a:solidFill>
+                  <a:srgbClr val="000000"/>
+                </a:solidFill>
+              </a:rPr>
+              <a:t>Yes</a:t>
             </a:r>
           </a:p>
         </p:txBody>
       </p:sp>
       <p:cxnSp>
         <p:nvCxnSpPr>
-          <p:cNvPr id="13" name="Connector 12"/>
+          <p:cNvPr id="21" name="Connector 20"/>
           <p:cNvCxnSpPr/>
           <p:nvPr/>
         </p:nvCxnSpPr>
         <p:spPr>
           <a:xfrm>
-            <a:off x="6120000" y="4572000"/>
-            <a:ext cx="720000" cy="0"/>
+            <a:off x="4500000" y="5004000"/>
+            <a:ext cx="0" cy="324000"/>
           </a:xfrm>
           <a:prstGeom prst="line">
             <a:avLst/>
@@ -5956,6 +7311,7 @@
             <a:solidFill>
               <a:srgbClr val="000000"/>
             </a:solidFill>
+            <a:tailEnd type="triangle" w="med" len="med"/>
           </a:ln>
         </p:spPr>
         <p:style>
@@ -5973,24 +7329,89 @@
           </a:fontRef>
         </p:style>
       </p:cxnSp>
-      <p:cxnSp>
-        <p:nvCxnSpPr>
-          <p:cNvPr id="14" name="Connector 13"/>
-          <p:cNvCxnSpPr/>
-          <p:nvPr/>
-        </p:nvCxnSpPr>
-        <p:spPr>
-          <a:xfrm flipV="1">
-            <a:off x="6840000" y="3780000"/>
-            <a:ext cx="0" cy="792000"/>
-          </a:xfrm>
-          <a:prstGeom prst="line">
-            <a:avLst/>
-          </a:prstGeom>
+      <p:sp>
+        <p:nvSpPr>
+          <p:cNvPr id="22" name="Rounded Rectangle 21"/>
+          <p:cNvSpPr/>
+          <p:nvPr/>
+        </p:nvSpPr>
+        <p:spPr>
+          <a:xfrm>
+            <a:off x="2700000" y="5328000"/>
+            <a:ext cx="3600000" cy="540000"/>
+          </a:xfrm>
+          <a:prstGeom prst="roundRect">
+            <a:avLst/>
+          </a:prstGeom>
+          <a:solidFill>
+            <a:srgbClr val="FFFFFF"/>
+          </a:solidFill>
           <a:ln w="19050">
             <a:solidFill>
               <a:srgbClr val="000000"/>
             </a:solidFill>
+          </a:ln>
+        </p:spPr>
+        <p:style>
+          <a:lnRef idx="1">
+            <a:schemeClr val="accent1"/>
+          </a:lnRef>
+          <a:fillRef idx="3">
+            <a:schemeClr val="accent1"/>
+          </a:fillRef>
+          <a:effectRef idx="2">
+            <a:schemeClr val="accent1"/>
+          </a:effectRef>
+          <a:fontRef idx="minor">
+            <a:schemeClr val="lt1"/>
+          </a:fontRef>
+        </p:style>
+        <p:txBody>
+          <a:bodyPr rtlCol="0" anchor="ctr" wrap="square" lIns="50800" rIns="50800" tIns="25400" bIns="25400"/>
+          <a:lstStyle/>
+          <a:p>
+            <a:pPr algn="ctr"/>
+            <a:r>
+              <a:rPr sz="900" b="0">
+                <a:solidFill>
+                  <a:srgbClr val="000000"/>
+                </a:solidFill>
+              </a:rPr>
+              <a:t>S5: 目標色到達通知</a:t>
+            </a:r>
+          </a:p>
+          <a:p>
+            <a:pPr algn="ctr"/>
+            <a:r>
+              <a:rPr sz="900" b="0">
+                <a:solidFill>
+                  <a:srgbClr val="000000"/>
+                </a:solidFill>
+              </a:rPr>
+              <a:t>アラーム音出力 / 到達画面表示</a:t>
+            </a:r>
+          </a:p>
+        </p:txBody>
+      </p:sp>
+      <p:cxnSp>
+        <p:nvCxnSpPr>
+          <p:cNvPr id="23" name="Connector 22"/>
+          <p:cNvCxnSpPr/>
+          <p:nvPr/>
+        </p:nvCxnSpPr>
+        <p:spPr>
+          <a:xfrm>
+            <a:off x="4500000" y="5868000"/>
+            <a:ext cx="0" cy="180000"/>
+          </a:xfrm>
+          <a:prstGeom prst="line">
+            <a:avLst/>
+          </a:prstGeom>
+          <a:ln w="19050">
+            <a:solidFill>
+              <a:srgbClr val="000000"/>
+            </a:solidFill>
+            <a:tailEnd type="triangle" w="med" len="med"/>
           </a:ln>
         </p:spPr>
         <p:style>
@@ -6008,87 +7429,22 @@
           </a:fontRef>
         </p:style>
       </p:cxnSp>
-      <p:cxnSp>
-        <p:nvCxnSpPr>
-          <p:cNvPr id="15" name="Connector 14"/>
-          <p:cNvCxnSpPr/>
-          <p:nvPr/>
-        </p:nvCxnSpPr>
-        <p:spPr>
-          <a:xfrm flipH="1">
-            <a:off x="6120000" y="3780000"/>
-            <a:ext cx="720000" cy="0"/>
-          </a:xfrm>
-          <a:prstGeom prst="line">
-            <a:avLst/>
-          </a:prstGeom>
-          <a:ln w="19050">
-            <a:solidFill>
-              <a:srgbClr val="000000"/>
-            </a:solidFill>
-          </a:ln>
-        </p:spPr>
-        <p:style>
-          <a:lnRef idx="2">
-            <a:schemeClr val="accent1"/>
-          </a:lnRef>
-          <a:fillRef idx="0">
-            <a:schemeClr val="accent1"/>
-          </a:fillRef>
-          <a:effectRef idx="1">
-            <a:schemeClr val="accent1"/>
-          </a:effectRef>
-          <a:fontRef idx="minor">
-            <a:schemeClr val="tx1"/>
-          </a:fontRef>
-        </p:style>
-      </p:cxnSp>
-      <p:sp>
-        <p:nvSpPr>
-          <p:cNvPr id="16" name="TextBox 15"/>
-          <p:cNvSpPr txBox="1"/>
-          <p:nvPr/>
-        </p:nvSpPr>
-        <p:spPr>
-          <a:xfrm>
-            <a:off x="2520000" y="4752000"/>
-            <a:ext cx="720000" cy="288000"/>
-          </a:xfrm>
-          <a:prstGeom prst="rect">
-            <a:avLst/>
-          </a:prstGeom>
-          <a:noFill/>
-        </p:spPr>
-        <p:txBody>
-          <a:bodyPr wrap="square">
-            <a:spAutoFit/>
-          </a:bodyPr>
-          <a:lstStyle/>
-          <a:p>
-            <a:pPr algn="l"/>
-            <a:r>
-              <a:rPr sz="900" b="0"/>
-              <a:t>Yes</a:t>
-            </a:r>
-          </a:p>
-        </p:txBody>
-      </p:sp>
-      <p:sp>
-        <p:nvSpPr>
-          <p:cNvPr id="17" name="Rounded Rectangle 16"/>
+      <p:sp>
+        <p:nvSpPr>
+          <p:cNvPr id="24" name="Rounded Rectangle 23"/>
           <p:cNvSpPr/>
           <p:nvPr/>
         </p:nvSpPr>
         <p:spPr>
           <a:xfrm>
-            <a:off x="720000" y="4320000"/>
-            <a:ext cx="1980000" cy="540000"/>
+            <a:off x="3240000" y="6048000"/>
+            <a:ext cx="2520000" cy="432000"/>
           </a:xfrm>
           <a:prstGeom prst="roundRect">
             <a:avLst/>
           </a:prstGeom>
           <a:solidFill>
-            <a:srgbClr val="FCE4D6"/>
+            <a:srgbClr val="FFFFFF"/>
           </a:solidFill>
           <a:ln w="19050">
             <a:solidFill>
@@ -6116,98 +7472,16 @@
           <a:p>
             <a:pPr algn="ctr"/>
             <a:r>
-              <a:rPr sz="800" b="0"/>
-              <a:t>予測: 残りcycles &lt; 5
-→ 予告通知出力</a:t>
-            </a:r>
-          </a:p>
-        </p:txBody>
-      </p:sp>
-      <p:sp>
-        <p:nvSpPr>
-          <p:cNvPr id="18" name="Rounded Rectangle 17"/>
-          <p:cNvSpPr/>
-          <p:nvPr/>
-        </p:nvSpPr>
-        <p:spPr>
-          <a:xfrm>
-            <a:off x="2880000" y="5220000"/>
-            <a:ext cx="3240000" cy="648000"/>
-          </a:xfrm>
-          <a:prstGeom prst="roundRect">
-            <a:avLst/>
-          </a:prstGeom>
-          <a:solidFill>
-            <a:srgbClr val="C6EFCE"/>
-          </a:solidFill>
-          <a:ln w="19050">
-            <a:solidFill>
-              <a:srgbClr val="000000"/>
-            </a:solidFill>
-          </a:ln>
-        </p:spPr>
-        <p:style>
-          <a:lnRef idx="1">
-            <a:schemeClr val="accent1"/>
-          </a:lnRef>
-          <a:fillRef idx="3">
-            <a:schemeClr val="accent1"/>
-          </a:fillRef>
-          <a:effectRef idx="2">
-            <a:schemeClr val="accent1"/>
-          </a:effectRef>
-          <a:fontRef idx="minor">
-            <a:schemeClr val="lt1"/>
-          </a:fontRef>
-        </p:style>
-        <p:txBody>
-          <a:bodyPr rtlCol="0" anchor="ctr" wrap="square" lIns="50800" rIns="50800" tIns="25400" bIns="25400"/>
-          <a:lstStyle/>
-          <a:p>
-            <a:pPr algn="ctr"/>
-            <a:r>
-              <a:rPr sz="900" b="0"/>
-              <a:t>S5: 目標色到達通知
-アラーム音出力・到達画面表示</a:t>
-            </a:r>
-          </a:p>
-        </p:txBody>
-      </p:sp>
-      <p:cxnSp>
-        <p:nvCxnSpPr>
-          <p:cNvPr id="19" name="Connector 18"/>
-          <p:cNvCxnSpPr/>
-          <p:nvPr/>
-        </p:nvCxnSpPr>
-        <p:spPr>
-          <a:xfrm>
-            <a:off x="4500000" y="4860000"/>
-            <a:ext cx="0" cy="360000"/>
-          </a:xfrm>
-          <a:prstGeom prst="line">
-            <a:avLst/>
-          </a:prstGeom>
-          <a:ln w="19050">
-            <a:solidFill>
-              <a:srgbClr val="000000"/>
-            </a:solidFill>
-          </a:ln>
-        </p:spPr>
-        <p:style>
-          <a:lnRef idx="2">
-            <a:schemeClr val="accent1"/>
-          </a:lnRef>
-          <a:fillRef idx="0">
-            <a:schemeClr val="accent1"/>
-          </a:fillRef>
-          <a:effectRef idx="1">
-            <a:schemeClr val="accent1"/>
-          </a:effectRef>
-          <a:fontRef idx="minor">
-            <a:schemeClr val="tx1"/>
-          </a:fontRef>
-        </p:style>
-      </p:cxnSp>
+              <a:rPr sz="1000" b="1">
+                <a:solidFill>
+                  <a:srgbClr val="000000"/>
+                </a:solidFill>
+              </a:rPr>
+              <a:t>終了</a:t>
+            </a:r>
+          </a:p>
+        </p:txBody>
+      </p:sp>
     </p:spTree>
   </p:cSld>
   <p:clrMapOvr>
@@ -6235,7 +7509,7 @@
         <p:spPr>
           <a:xfrm>
             <a:off x="360000" y="180000"/>
-            <a:ext cx="6480000" cy="540000"/>
+            <a:ext cx="8280000" cy="540000"/>
           </a:xfrm>
           <a:prstGeom prst="rect">
             <a:avLst/>
@@ -6250,8 +7524,12 @@
           <a:p>
             <a:pPr algn="ctr"/>
             <a:r>
-              <a:rPr sz="1400" b="1"/>
-              <a:t>【図5】ΔE時系列追跡および予測通知の動作説明図</a:t>
+              <a:rPr sz="1400" b="1">
+                <a:solidFill>
+                  <a:srgbClr val="000000"/>
+                </a:solidFill>
+              </a:rPr>
+              <a:t>【図5】</a:t>
             </a:r>
           </a:p>
         </p:txBody>
@@ -6264,13 +7542,13 @@
         </p:nvCxnSpPr>
         <p:spPr>
           <a:xfrm>
-            <a:off x="1080000" y="1080000"/>
-            <a:ext cx="0" cy="4680000"/>
+            <a:off x="1260000" y="1080000"/>
+            <a:ext cx="0" cy="4500000"/>
           </a:xfrm>
           <a:prstGeom prst="line">
             <a:avLst/>
           </a:prstGeom>
-          <a:ln w="12700">
+          <a:ln w="19050">
             <a:solidFill>
               <a:srgbClr val="000000"/>
             </a:solidFill>
@@ -6299,7 +7577,7 @@
         </p:nvSpPr>
         <p:spPr>
           <a:xfrm>
-            <a:off x="360000" y="900000"/>
+            <a:off x="540000" y="900000"/>
             <a:ext cx="720000" cy="288000"/>
           </a:xfrm>
           <a:prstGeom prst="rect">
@@ -6315,7 +7593,11 @@
           <a:p>
             <a:pPr algn="l"/>
             <a:r>
-              <a:rPr sz="1000" b="1"/>
+              <a:rPr sz="1100" b="1">
+                <a:solidFill>
+                  <a:srgbClr val="000000"/>
+                </a:solidFill>
+              </a:rPr>
               <a:t>ΔE</a:t>
             </a:r>
           </a:p>
@@ -6329,13 +7611,13 @@
         </p:nvCxnSpPr>
         <p:spPr>
           <a:xfrm>
-            <a:off x="1080000" y="5760000"/>
-            <a:ext cx="6840000" cy="0"/>
+            <a:off x="1260000" y="5580000"/>
+            <a:ext cx="6660000" cy="0"/>
           </a:xfrm>
           <a:prstGeom prst="line">
             <a:avLst/>
           </a:prstGeom>
-          <a:ln w="12700">
+          <a:ln w="19050">
             <a:solidFill>
               <a:srgbClr val="000000"/>
             </a:solidFill>
@@ -6364,8 +7646,8 @@
         </p:nvSpPr>
         <p:spPr>
           <a:xfrm>
-            <a:off x="3600000" y="5832000"/>
-            <a:ext cx="1800000" cy="288000"/>
+            <a:off x="3600000" y="5652000"/>
+            <a:ext cx="2880000" cy="288000"/>
           </a:xfrm>
           <a:prstGeom prst="rect">
             <a:avLst/>
@@ -6380,8 +7662,12 @@
           <a:p>
             <a:pPr algn="l"/>
             <a:r>
-              <a:rPr sz="900" b="0"/>
-              <a:t>時間（サイクル）</a:t>
+              <a:rPr sz="900" b="0">
+                <a:solidFill>
+                  <a:srgbClr val="000000"/>
+                </a:solidFill>
+              </a:rPr>
+              <a:t>時間 (計測サイクル)</a:t>
             </a:r>
           </a:p>
         </p:txBody>
@@ -6394,8 +7680,8 @@
         </p:nvSpPr>
         <p:spPr>
           <a:xfrm>
-            <a:off x="540000" y="1260000"/>
-            <a:ext cx="540000" cy="216000"/>
+            <a:off x="720000" y="1260000"/>
+            <a:ext cx="540000" cy="180000"/>
           </a:xfrm>
           <a:prstGeom prst="rect">
             <a:avLst/>
@@ -6410,172 +7696,26 @@
           <a:p>
             <a:pPr algn="l"/>
             <a:r>
-              <a:rPr sz="800" b="0"/>
+              <a:rPr sz="800" b="0">
+                <a:solidFill>
+                  <a:srgbClr val="000000"/>
+                </a:solidFill>
+              </a:rPr>
               <a:t>50</a:t>
-            </a:r>
-          </a:p>
-        </p:txBody>
-      </p:sp>
-      <p:sp>
-        <p:nvSpPr>
-          <p:cNvPr id="8" name="TextBox 7"/>
-          <p:cNvSpPr txBox="1"/>
-          <p:nvPr/>
-        </p:nvSpPr>
-        <p:spPr>
-          <a:xfrm>
-            <a:off x="540000" y="1980000"/>
-            <a:ext cx="540000" cy="216000"/>
-          </a:xfrm>
-          <a:prstGeom prst="rect">
-            <a:avLst/>
-          </a:prstGeom>
-          <a:noFill/>
-        </p:spPr>
-        <p:txBody>
-          <a:bodyPr wrap="square">
-            <a:spAutoFit/>
-          </a:bodyPr>
-          <a:lstStyle/>
-          <a:p>
-            <a:pPr algn="l"/>
-            <a:r>
-              <a:rPr sz="800" b="0"/>
-              <a:t>40</a:t>
-            </a:r>
-          </a:p>
-        </p:txBody>
-      </p:sp>
-      <p:sp>
-        <p:nvSpPr>
-          <p:cNvPr id="9" name="TextBox 8"/>
-          <p:cNvSpPr txBox="1"/>
-          <p:nvPr/>
-        </p:nvSpPr>
-        <p:spPr>
-          <a:xfrm>
-            <a:off x="540000" y="2700000"/>
-            <a:ext cx="540000" cy="216000"/>
-          </a:xfrm>
-          <a:prstGeom prst="rect">
-            <a:avLst/>
-          </a:prstGeom>
-          <a:noFill/>
-        </p:spPr>
-        <p:txBody>
-          <a:bodyPr wrap="square">
-            <a:spAutoFit/>
-          </a:bodyPr>
-          <a:lstStyle/>
-          <a:p>
-            <a:pPr algn="l"/>
-            <a:r>
-              <a:rPr sz="800" b="0"/>
-              <a:t>30</a:t>
-            </a:r>
-          </a:p>
-        </p:txBody>
-      </p:sp>
-      <p:sp>
-        <p:nvSpPr>
-          <p:cNvPr id="10" name="TextBox 9"/>
-          <p:cNvSpPr txBox="1"/>
-          <p:nvPr/>
-        </p:nvSpPr>
-        <p:spPr>
-          <a:xfrm>
-            <a:off x="540000" y="3420000"/>
-            <a:ext cx="540000" cy="216000"/>
-          </a:xfrm>
-          <a:prstGeom prst="rect">
-            <a:avLst/>
-          </a:prstGeom>
-          <a:noFill/>
-        </p:spPr>
-        <p:txBody>
-          <a:bodyPr wrap="square">
-            <a:spAutoFit/>
-          </a:bodyPr>
-          <a:lstStyle/>
-          <a:p>
-            <a:pPr algn="l"/>
-            <a:r>
-              <a:rPr sz="800" b="0"/>
-              <a:t>20</a:t>
-            </a:r>
-          </a:p>
-        </p:txBody>
-      </p:sp>
-      <p:sp>
-        <p:nvSpPr>
-          <p:cNvPr id="11" name="TextBox 10"/>
-          <p:cNvSpPr txBox="1"/>
-          <p:nvPr/>
-        </p:nvSpPr>
-        <p:spPr>
-          <a:xfrm>
-            <a:off x="540000" y="4500000"/>
-            <a:ext cx="540000" cy="216000"/>
-          </a:xfrm>
-          <a:prstGeom prst="rect">
-            <a:avLst/>
-          </a:prstGeom>
-          <a:noFill/>
-        </p:spPr>
-        <p:txBody>
-          <a:bodyPr wrap="square">
-            <a:spAutoFit/>
-          </a:bodyPr>
-          <a:lstStyle/>
-          <a:p>
-            <a:pPr algn="l"/>
-            <a:r>
-              <a:rPr sz="800" b="0"/>
-              <a:t>10</a:t>
-            </a:r>
-          </a:p>
-        </p:txBody>
-      </p:sp>
-      <p:sp>
-        <p:nvSpPr>
-          <p:cNvPr id="12" name="TextBox 11"/>
-          <p:cNvSpPr txBox="1"/>
-          <p:nvPr/>
-        </p:nvSpPr>
-        <p:spPr>
-          <a:xfrm>
-            <a:off x="540000" y="5040000"/>
-            <a:ext cx="540000" cy="216000"/>
-          </a:xfrm>
-          <a:prstGeom prst="rect">
-            <a:avLst/>
-          </a:prstGeom>
-          <a:noFill/>
-        </p:spPr>
-        <p:txBody>
-          <a:bodyPr wrap="square">
-            <a:spAutoFit/>
-          </a:bodyPr>
-          <a:lstStyle/>
-          <a:p>
-            <a:pPr algn="l"/>
-            <a:r>
-              <a:rPr sz="800" b="0"/>
-              <a:t>5</a:t>
             </a:r>
           </a:p>
         </p:txBody>
       </p:sp>
       <p:cxnSp>
         <p:nvCxnSpPr>
-          <p:cNvPr id="13" name="Connector 12"/>
+          <p:cNvPr id="8" name="Connector 7"/>
           <p:cNvCxnSpPr/>
           <p:nvPr/>
         </p:nvCxnSpPr>
         <p:spPr>
           <a:xfrm>
-            <a:off x="1080000" y="5220000"/>
-            <a:ext cx="6840000" cy="0"/>
+            <a:off x="1188000" y="1332000"/>
+            <a:ext cx="72000" cy="0"/>
           </a:xfrm>
           <a:prstGeom prst="line">
             <a:avLst/>
@@ -6584,7 +7724,6 @@
             <a:solidFill>
               <a:srgbClr val="000000"/>
             </a:solidFill>
-            <a:prstDash val="dash"/>
           </a:ln>
         </p:spPr>
         <p:style>
@@ -6604,14 +7743,14 @@
       </p:cxnSp>
       <p:sp>
         <p:nvSpPr>
-          <p:cNvPr id="14" name="TextBox 13"/>
+          <p:cNvPr id="9" name="TextBox 8"/>
           <p:cNvSpPr txBox="1"/>
           <p:nvPr/>
         </p:nvSpPr>
         <p:spPr>
           <a:xfrm>
-            <a:off x="6480000" y="5040000"/>
-            <a:ext cx="1800000" cy="216000"/>
+            <a:off x="720000" y="1908000"/>
+            <a:ext cx="540000" cy="180000"/>
           </a:xfrm>
           <a:prstGeom prst="rect">
             <a:avLst/>
@@ -6626,27 +7765,684 @@
           <a:p>
             <a:pPr algn="l"/>
             <a:r>
-              <a:rPr sz="800" b="0"/>
-              <a:t>ΔE閾値=5.0</a:t>
+              <a:rPr sz="800" b="0">
+                <a:solidFill>
+                  <a:srgbClr val="000000"/>
+                </a:solidFill>
+              </a:rPr>
+              <a:t>40</a:t>
             </a:r>
           </a:p>
         </p:txBody>
       </p:sp>
       <p:cxnSp>
         <p:nvCxnSpPr>
-          <p:cNvPr id="15" name="Connector 14"/>
+          <p:cNvPr id="10" name="Connector 9"/>
           <p:cNvCxnSpPr/>
           <p:nvPr/>
         </p:nvCxnSpPr>
         <p:spPr>
           <a:xfrm>
-            <a:off x="1440000" y="1440000"/>
-            <a:ext cx="720000" cy="360000"/>
+            <a:off x="1188000" y="1980000"/>
+            <a:ext cx="72000" cy="0"/>
           </a:xfrm>
           <a:prstGeom prst="line">
             <a:avLst/>
           </a:prstGeom>
           <a:ln w="12700">
+            <a:solidFill>
+              <a:srgbClr val="000000"/>
+            </a:solidFill>
+          </a:ln>
+        </p:spPr>
+        <p:style>
+          <a:lnRef idx="2">
+            <a:schemeClr val="accent1"/>
+          </a:lnRef>
+          <a:fillRef idx="0">
+            <a:schemeClr val="accent1"/>
+          </a:fillRef>
+          <a:effectRef idx="1">
+            <a:schemeClr val="accent1"/>
+          </a:effectRef>
+          <a:fontRef idx="minor">
+            <a:schemeClr val="tx1"/>
+          </a:fontRef>
+        </p:style>
+      </p:cxnSp>
+      <p:sp>
+        <p:nvSpPr>
+          <p:cNvPr id="11" name="TextBox 10"/>
+          <p:cNvSpPr txBox="1"/>
+          <p:nvPr/>
+        </p:nvSpPr>
+        <p:spPr>
+          <a:xfrm>
+            <a:off x="720000" y="2556000"/>
+            <a:ext cx="540000" cy="180000"/>
+          </a:xfrm>
+          <a:prstGeom prst="rect">
+            <a:avLst/>
+          </a:prstGeom>
+          <a:noFill/>
+        </p:spPr>
+        <p:txBody>
+          <a:bodyPr wrap="square">
+            <a:spAutoFit/>
+          </a:bodyPr>
+          <a:lstStyle/>
+          <a:p>
+            <a:pPr algn="l"/>
+            <a:r>
+              <a:rPr sz="800" b="0">
+                <a:solidFill>
+                  <a:srgbClr val="000000"/>
+                </a:solidFill>
+              </a:rPr>
+              <a:t>30</a:t>
+            </a:r>
+          </a:p>
+        </p:txBody>
+      </p:sp>
+      <p:cxnSp>
+        <p:nvCxnSpPr>
+          <p:cNvPr id="12" name="Connector 11"/>
+          <p:cNvCxnSpPr/>
+          <p:nvPr/>
+        </p:nvCxnSpPr>
+        <p:spPr>
+          <a:xfrm>
+            <a:off x="1188000" y="2628000"/>
+            <a:ext cx="72000" cy="0"/>
+          </a:xfrm>
+          <a:prstGeom prst="line">
+            <a:avLst/>
+          </a:prstGeom>
+          <a:ln w="12700">
+            <a:solidFill>
+              <a:srgbClr val="000000"/>
+            </a:solidFill>
+          </a:ln>
+        </p:spPr>
+        <p:style>
+          <a:lnRef idx="2">
+            <a:schemeClr val="accent1"/>
+          </a:lnRef>
+          <a:fillRef idx="0">
+            <a:schemeClr val="accent1"/>
+          </a:fillRef>
+          <a:effectRef idx="1">
+            <a:schemeClr val="accent1"/>
+          </a:effectRef>
+          <a:fontRef idx="minor">
+            <a:schemeClr val="tx1"/>
+          </a:fontRef>
+        </p:style>
+      </p:cxnSp>
+      <p:sp>
+        <p:nvSpPr>
+          <p:cNvPr id="13" name="TextBox 12"/>
+          <p:cNvSpPr txBox="1"/>
+          <p:nvPr/>
+        </p:nvSpPr>
+        <p:spPr>
+          <a:xfrm>
+            <a:off x="720000" y="3240000"/>
+            <a:ext cx="540000" cy="180000"/>
+          </a:xfrm>
+          <a:prstGeom prst="rect">
+            <a:avLst/>
+          </a:prstGeom>
+          <a:noFill/>
+        </p:spPr>
+        <p:txBody>
+          <a:bodyPr wrap="square">
+            <a:spAutoFit/>
+          </a:bodyPr>
+          <a:lstStyle/>
+          <a:p>
+            <a:pPr algn="l"/>
+            <a:r>
+              <a:rPr sz="800" b="0">
+                <a:solidFill>
+                  <a:srgbClr val="000000"/>
+                </a:solidFill>
+              </a:rPr>
+              <a:t>20</a:t>
+            </a:r>
+          </a:p>
+        </p:txBody>
+      </p:sp>
+      <p:cxnSp>
+        <p:nvCxnSpPr>
+          <p:cNvPr id="14" name="Connector 13"/>
+          <p:cNvCxnSpPr/>
+          <p:nvPr/>
+        </p:nvCxnSpPr>
+        <p:spPr>
+          <a:xfrm>
+            <a:off x="1188000" y="3312000"/>
+            <a:ext cx="72000" cy="0"/>
+          </a:xfrm>
+          <a:prstGeom prst="line">
+            <a:avLst/>
+          </a:prstGeom>
+          <a:ln w="12700">
+            <a:solidFill>
+              <a:srgbClr val="000000"/>
+            </a:solidFill>
+          </a:ln>
+        </p:spPr>
+        <p:style>
+          <a:lnRef idx="2">
+            <a:schemeClr val="accent1"/>
+          </a:lnRef>
+          <a:fillRef idx="0">
+            <a:schemeClr val="accent1"/>
+          </a:fillRef>
+          <a:effectRef idx="1">
+            <a:schemeClr val="accent1"/>
+          </a:effectRef>
+          <a:fontRef idx="minor">
+            <a:schemeClr val="tx1"/>
+          </a:fontRef>
+        </p:style>
+      </p:cxnSp>
+      <p:sp>
+        <p:nvSpPr>
+          <p:cNvPr id="15" name="TextBox 14"/>
+          <p:cNvSpPr txBox="1"/>
+          <p:nvPr/>
+        </p:nvSpPr>
+        <p:spPr>
+          <a:xfrm>
+            <a:off x="720000" y="4248000"/>
+            <a:ext cx="540000" cy="180000"/>
+          </a:xfrm>
+          <a:prstGeom prst="rect">
+            <a:avLst/>
+          </a:prstGeom>
+          <a:noFill/>
+        </p:spPr>
+        <p:txBody>
+          <a:bodyPr wrap="square">
+            <a:spAutoFit/>
+          </a:bodyPr>
+          <a:lstStyle/>
+          <a:p>
+            <a:pPr algn="l"/>
+            <a:r>
+              <a:rPr sz="800" b="0">
+                <a:solidFill>
+                  <a:srgbClr val="000000"/>
+                </a:solidFill>
+              </a:rPr>
+              <a:t>10</a:t>
+            </a:r>
+          </a:p>
+        </p:txBody>
+      </p:sp>
+      <p:cxnSp>
+        <p:nvCxnSpPr>
+          <p:cNvPr id="16" name="Connector 15"/>
+          <p:cNvCxnSpPr/>
+          <p:nvPr/>
+        </p:nvCxnSpPr>
+        <p:spPr>
+          <a:xfrm>
+            <a:off x="1188000" y="4320000"/>
+            <a:ext cx="72000" cy="0"/>
+          </a:xfrm>
+          <a:prstGeom prst="line">
+            <a:avLst/>
+          </a:prstGeom>
+          <a:ln w="12700">
+            <a:solidFill>
+              <a:srgbClr val="000000"/>
+            </a:solidFill>
+          </a:ln>
+        </p:spPr>
+        <p:style>
+          <a:lnRef idx="2">
+            <a:schemeClr val="accent1"/>
+          </a:lnRef>
+          <a:fillRef idx="0">
+            <a:schemeClr val="accent1"/>
+          </a:fillRef>
+          <a:effectRef idx="1">
+            <a:schemeClr val="accent1"/>
+          </a:effectRef>
+          <a:fontRef idx="minor">
+            <a:schemeClr val="tx1"/>
+          </a:fontRef>
+        </p:style>
+      </p:cxnSp>
+      <p:sp>
+        <p:nvSpPr>
+          <p:cNvPr id="17" name="TextBox 16"/>
+          <p:cNvSpPr txBox="1"/>
+          <p:nvPr/>
+        </p:nvSpPr>
+        <p:spPr>
+          <a:xfrm>
+            <a:off x="720000" y="4752000"/>
+            <a:ext cx="540000" cy="180000"/>
+          </a:xfrm>
+          <a:prstGeom prst="rect">
+            <a:avLst/>
+          </a:prstGeom>
+          <a:noFill/>
+        </p:spPr>
+        <p:txBody>
+          <a:bodyPr wrap="square">
+            <a:spAutoFit/>
+          </a:bodyPr>
+          <a:lstStyle/>
+          <a:p>
+            <a:pPr algn="l"/>
+            <a:r>
+              <a:rPr sz="800" b="0">
+                <a:solidFill>
+                  <a:srgbClr val="000000"/>
+                </a:solidFill>
+              </a:rPr>
+              <a:t>5</a:t>
+            </a:r>
+          </a:p>
+        </p:txBody>
+      </p:sp>
+      <p:cxnSp>
+        <p:nvCxnSpPr>
+          <p:cNvPr id="18" name="Connector 17"/>
+          <p:cNvCxnSpPr/>
+          <p:nvPr/>
+        </p:nvCxnSpPr>
+        <p:spPr>
+          <a:xfrm>
+            <a:off x="1188000" y="4824000"/>
+            <a:ext cx="72000" cy="0"/>
+          </a:xfrm>
+          <a:prstGeom prst="line">
+            <a:avLst/>
+          </a:prstGeom>
+          <a:ln w="12700">
+            <a:solidFill>
+              <a:srgbClr val="000000"/>
+            </a:solidFill>
+          </a:ln>
+        </p:spPr>
+        <p:style>
+          <a:lnRef idx="2">
+            <a:schemeClr val="accent1"/>
+          </a:lnRef>
+          <a:fillRef idx="0">
+            <a:schemeClr val="accent1"/>
+          </a:fillRef>
+          <a:effectRef idx="1">
+            <a:schemeClr val="accent1"/>
+          </a:effectRef>
+          <a:fontRef idx="minor">
+            <a:schemeClr val="tx1"/>
+          </a:fontRef>
+        </p:style>
+      </p:cxnSp>
+      <p:sp>
+        <p:nvSpPr>
+          <p:cNvPr id="19" name="TextBox 18"/>
+          <p:cNvSpPr txBox="1"/>
+          <p:nvPr/>
+        </p:nvSpPr>
+        <p:spPr>
+          <a:xfrm>
+            <a:off x="1188000" y="5580000"/>
+            <a:ext cx="432000" cy="180000"/>
+          </a:xfrm>
+          <a:prstGeom prst="rect">
+            <a:avLst/>
+          </a:prstGeom>
+          <a:noFill/>
+        </p:spPr>
+        <p:txBody>
+          <a:bodyPr wrap="square">
+            <a:spAutoFit/>
+          </a:bodyPr>
+          <a:lstStyle/>
+          <a:p>
+            <a:pPr algn="ctr"/>
+            <a:r>
+              <a:rPr sz="700" b="0">
+                <a:solidFill>
+                  <a:srgbClr val="000000"/>
+                </a:solidFill>
+              </a:rPr>
+              <a:t>0</a:t>
+            </a:r>
+          </a:p>
+        </p:txBody>
+      </p:sp>
+      <p:sp>
+        <p:nvSpPr>
+          <p:cNvPr id="20" name="TextBox 19"/>
+          <p:cNvSpPr txBox="1"/>
+          <p:nvPr/>
+        </p:nvSpPr>
+        <p:spPr>
+          <a:xfrm>
+            <a:off x="1980000" y="5580000"/>
+            <a:ext cx="432000" cy="180000"/>
+          </a:xfrm>
+          <a:prstGeom prst="rect">
+            <a:avLst/>
+          </a:prstGeom>
+          <a:noFill/>
+        </p:spPr>
+        <p:txBody>
+          <a:bodyPr wrap="square">
+            <a:spAutoFit/>
+          </a:bodyPr>
+          <a:lstStyle/>
+          <a:p>
+            <a:pPr algn="ctr"/>
+            <a:r>
+              <a:rPr sz="700" b="0">
+                <a:solidFill>
+                  <a:srgbClr val="000000"/>
+                </a:solidFill>
+              </a:rPr>
+              <a:t>5</a:t>
+            </a:r>
+          </a:p>
+        </p:txBody>
+      </p:sp>
+      <p:sp>
+        <p:nvSpPr>
+          <p:cNvPr id="21" name="TextBox 20"/>
+          <p:cNvSpPr txBox="1"/>
+          <p:nvPr/>
+        </p:nvSpPr>
+        <p:spPr>
+          <a:xfrm>
+            <a:off x="2772000" y="5580000"/>
+            <a:ext cx="432000" cy="180000"/>
+          </a:xfrm>
+          <a:prstGeom prst="rect">
+            <a:avLst/>
+          </a:prstGeom>
+          <a:noFill/>
+        </p:spPr>
+        <p:txBody>
+          <a:bodyPr wrap="square">
+            <a:spAutoFit/>
+          </a:bodyPr>
+          <a:lstStyle/>
+          <a:p>
+            <a:pPr algn="ctr"/>
+            <a:r>
+              <a:rPr sz="700" b="0">
+                <a:solidFill>
+                  <a:srgbClr val="000000"/>
+                </a:solidFill>
+              </a:rPr>
+              <a:t>10</a:t>
+            </a:r>
+          </a:p>
+        </p:txBody>
+      </p:sp>
+      <p:sp>
+        <p:nvSpPr>
+          <p:cNvPr id="22" name="TextBox 21"/>
+          <p:cNvSpPr txBox="1"/>
+          <p:nvPr/>
+        </p:nvSpPr>
+        <p:spPr>
+          <a:xfrm>
+            <a:off x="3564000" y="5580000"/>
+            <a:ext cx="432000" cy="180000"/>
+          </a:xfrm>
+          <a:prstGeom prst="rect">
+            <a:avLst/>
+          </a:prstGeom>
+          <a:noFill/>
+        </p:spPr>
+        <p:txBody>
+          <a:bodyPr wrap="square">
+            <a:spAutoFit/>
+          </a:bodyPr>
+          <a:lstStyle/>
+          <a:p>
+            <a:pPr algn="ctr"/>
+            <a:r>
+              <a:rPr sz="700" b="0">
+                <a:solidFill>
+                  <a:srgbClr val="000000"/>
+                </a:solidFill>
+              </a:rPr>
+              <a:t>15</a:t>
+            </a:r>
+          </a:p>
+        </p:txBody>
+      </p:sp>
+      <p:sp>
+        <p:nvSpPr>
+          <p:cNvPr id="23" name="TextBox 22"/>
+          <p:cNvSpPr txBox="1"/>
+          <p:nvPr/>
+        </p:nvSpPr>
+        <p:spPr>
+          <a:xfrm>
+            <a:off x="4356000" y="5580000"/>
+            <a:ext cx="432000" cy="180000"/>
+          </a:xfrm>
+          <a:prstGeom prst="rect">
+            <a:avLst/>
+          </a:prstGeom>
+          <a:noFill/>
+        </p:spPr>
+        <p:txBody>
+          <a:bodyPr wrap="square">
+            <a:spAutoFit/>
+          </a:bodyPr>
+          <a:lstStyle/>
+          <a:p>
+            <a:pPr algn="ctr"/>
+            <a:r>
+              <a:rPr sz="700" b="0">
+                <a:solidFill>
+                  <a:srgbClr val="000000"/>
+                </a:solidFill>
+              </a:rPr>
+              <a:t>20</a:t>
+            </a:r>
+          </a:p>
+        </p:txBody>
+      </p:sp>
+      <p:sp>
+        <p:nvSpPr>
+          <p:cNvPr id="24" name="TextBox 23"/>
+          <p:cNvSpPr txBox="1"/>
+          <p:nvPr/>
+        </p:nvSpPr>
+        <p:spPr>
+          <a:xfrm>
+            <a:off x="5148000" y="5580000"/>
+            <a:ext cx="432000" cy="180000"/>
+          </a:xfrm>
+          <a:prstGeom prst="rect">
+            <a:avLst/>
+          </a:prstGeom>
+          <a:noFill/>
+        </p:spPr>
+        <p:txBody>
+          <a:bodyPr wrap="square">
+            <a:spAutoFit/>
+          </a:bodyPr>
+          <a:lstStyle/>
+          <a:p>
+            <a:pPr algn="ctr"/>
+            <a:r>
+              <a:rPr sz="700" b="0">
+                <a:solidFill>
+                  <a:srgbClr val="000000"/>
+                </a:solidFill>
+              </a:rPr>
+              <a:t>25</a:t>
+            </a:r>
+          </a:p>
+        </p:txBody>
+      </p:sp>
+      <p:sp>
+        <p:nvSpPr>
+          <p:cNvPr id="25" name="TextBox 24"/>
+          <p:cNvSpPr txBox="1"/>
+          <p:nvPr/>
+        </p:nvSpPr>
+        <p:spPr>
+          <a:xfrm>
+            <a:off x="5940000" y="5580000"/>
+            <a:ext cx="432000" cy="180000"/>
+          </a:xfrm>
+          <a:prstGeom prst="rect">
+            <a:avLst/>
+          </a:prstGeom>
+          <a:noFill/>
+        </p:spPr>
+        <p:txBody>
+          <a:bodyPr wrap="square">
+            <a:spAutoFit/>
+          </a:bodyPr>
+          <a:lstStyle/>
+          <a:p>
+            <a:pPr algn="ctr"/>
+            <a:r>
+              <a:rPr sz="700" b="0">
+                <a:solidFill>
+                  <a:srgbClr val="000000"/>
+                </a:solidFill>
+              </a:rPr>
+              <a:t>30</a:t>
+            </a:r>
+          </a:p>
+        </p:txBody>
+      </p:sp>
+      <p:sp>
+        <p:nvSpPr>
+          <p:cNvPr id="26" name="TextBox 25"/>
+          <p:cNvSpPr txBox="1"/>
+          <p:nvPr/>
+        </p:nvSpPr>
+        <p:spPr>
+          <a:xfrm>
+            <a:off x="6732000" y="5580000"/>
+            <a:ext cx="432000" cy="180000"/>
+          </a:xfrm>
+          <a:prstGeom prst="rect">
+            <a:avLst/>
+          </a:prstGeom>
+          <a:noFill/>
+        </p:spPr>
+        <p:txBody>
+          <a:bodyPr wrap="square">
+            <a:spAutoFit/>
+          </a:bodyPr>
+          <a:lstStyle/>
+          <a:p>
+            <a:pPr algn="ctr"/>
+            <a:r>
+              <a:rPr sz="700" b="0">
+                <a:solidFill>
+                  <a:srgbClr val="000000"/>
+                </a:solidFill>
+              </a:rPr>
+              <a:t>35</a:t>
+            </a:r>
+          </a:p>
+        </p:txBody>
+      </p:sp>
+      <p:cxnSp>
+        <p:nvCxnSpPr>
+          <p:cNvPr id="27" name="Connector 26"/>
+          <p:cNvCxnSpPr/>
+          <p:nvPr/>
+        </p:nvCxnSpPr>
+        <p:spPr>
+          <a:xfrm>
+            <a:off x="1260000" y="4824000"/>
+            <a:ext cx="6660000" cy="0"/>
+          </a:xfrm>
+          <a:prstGeom prst="line">
+            <a:avLst/>
+          </a:prstGeom>
+          <a:ln w="19050">
+            <a:solidFill>
+              <a:srgbClr val="000000"/>
+            </a:solidFill>
+            <a:prstDash val="dash"/>
+          </a:ln>
+        </p:spPr>
+        <p:style>
+          <a:lnRef idx="2">
+            <a:schemeClr val="accent1"/>
+          </a:lnRef>
+          <a:fillRef idx="0">
+            <a:schemeClr val="accent1"/>
+          </a:fillRef>
+          <a:effectRef idx="1">
+            <a:schemeClr val="accent1"/>
+          </a:effectRef>
+          <a:fontRef idx="minor">
+            <a:schemeClr val="tx1"/>
+          </a:fontRef>
+        </p:style>
+      </p:cxnSp>
+      <p:sp>
+        <p:nvSpPr>
+          <p:cNvPr id="28" name="TextBox 27"/>
+          <p:cNvSpPr txBox="1"/>
+          <p:nvPr/>
+        </p:nvSpPr>
+        <p:spPr>
+          <a:xfrm>
+            <a:off x="6660000" y="4608000"/>
+            <a:ext cx="1440000" cy="216000"/>
+          </a:xfrm>
+          <a:prstGeom prst="rect">
+            <a:avLst/>
+          </a:prstGeom>
+          <a:noFill/>
+        </p:spPr>
+        <p:txBody>
+          <a:bodyPr wrap="square">
+            <a:spAutoFit/>
+          </a:bodyPr>
+          <a:lstStyle/>
+          <a:p>
+            <a:pPr algn="l"/>
+            <a:r>
+              <a:rPr sz="800" b="1">
+                <a:solidFill>
+                  <a:srgbClr val="000000"/>
+                </a:solidFill>
+              </a:rPr>
+              <a:t>ΔE閾値 = 5.0</a:t>
+            </a:r>
+          </a:p>
+        </p:txBody>
+      </p:sp>
+      <p:cxnSp>
+        <p:nvCxnSpPr>
+          <p:cNvPr id="29" name="Connector 28"/>
+          <p:cNvCxnSpPr/>
+          <p:nvPr/>
+        </p:nvCxnSpPr>
+        <p:spPr>
+          <a:xfrm>
+            <a:off x="1440000" y="1368000"/>
+            <a:ext cx="540000" cy="252000"/>
+          </a:xfrm>
+          <a:prstGeom prst="line">
+            <a:avLst/>
+          </a:prstGeom>
+          <a:ln w="25400">
             <a:solidFill>
               <a:srgbClr val="000000"/>
             </a:solidFill>
@@ -6669,19 +8465,19 @@
       </p:cxnSp>
       <p:cxnSp>
         <p:nvCxnSpPr>
-          <p:cNvPr id="16" name="Connector 15"/>
+          <p:cNvPr id="30" name="Connector 29"/>
           <p:cNvCxnSpPr/>
           <p:nvPr/>
         </p:nvCxnSpPr>
         <p:spPr>
           <a:xfrm>
-            <a:off x="2160000" y="1800000"/>
-            <a:ext cx="720000" cy="540000"/>
+            <a:off x="1980000" y="1620000"/>
+            <a:ext cx="540000" cy="324000"/>
           </a:xfrm>
           <a:prstGeom prst="line">
             <a:avLst/>
           </a:prstGeom>
-          <a:ln w="12700">
+          <a:ln w="25400">
             <a:solidFill>
               <a:srgbClr val="000000"/>
             </a:solidFill>
@@ -6704,19 +8500,19 @@
       </p:cxnSp>
       <p:cxnSp>
         <p:nvCxnSpPr>
-          <p:cNvPr id="17" name="Connector 16"/>
+          <p:cNvPr id="31" name="Connector 30"/>
           <p:cNvCxnSpPr/>
           <p:nvPr/>
         </p:nvCxnSpPr>
         <p:spPr>
           <a:xfrm>
-            <a:off x="2880000" y="2340000"/>
-            <a:ext cx="720000" cy="540000"/>
+            <a:off x="2520000" y="1944000"/>
+            <a:ext cx="540000" cy="396000"/>
           </a:xfrm>
           <a:prstGeom prst="line">
             <a:avLst/>
           </a:prstGeom>
-          <a:ln w="12700">
+          <a:ln w="25400">
             <a:solidFill>
               <a:srgbClr val="000000"/>
             </a:solidFill>
@@ -6739,19 +8535,19 @@
       </p:cxnSp>
       <p:cxnSp>
         <p:nvCxnSpPr>
-          <p:cNvPr id="18" name="Connector 17"/>
+          <p:cNvPr id="32" name="Connector 31"/>
           <p:cNvCxnSpPr/>
           <p:nvPr/>
         </p:nvCxnSpPr>
         <p:spPr>
           <a:xfrm>
-            <a:off x="3600000" y="2880000"/>
-            <a:ext cx="720000" cy="540000"/>
+            <a:off x="3060000" y="2340000"/>
+            <a:ext cx="540000" cy="360000"/>
           </a:xfrm>
           <a:prstGeom prst="line">
             <a:avLst/>
           </a:prstGeom>
-          <a:ln w="12700">
+          <a:ln w="25400">
             <a:solidFill>
               <a:srgbClr val="000000"/>
             </a:solidFill>
@@ -6774,19 +8570,19 @@
       </p:cxnSp>
       <p:cxnSp>
         <p:nvCxnSpPr>
-          <p:cNvPr id="19" name="Connector 18"/>
+          <p:cNvPr id="33" name="Connector 32"/>
           <p:cNvCxnSpPr/>
           <p:nvPr/>
         </p:nvCxnSpPr>
         <p:spPr>
           <a:xfrm>
-            <a:off x="4320000" y="3420000"/>
-            <a:ext cx="720000" cy="540000"/>
+            <a:off x="3600000" y="2700000"/>
+            <a:ext cx="540000" cy="396000"/>
           </a:xfrm>
           <a:prstGeom prst="line">
             <a:avLst/>
           </a:prstGeom>
-          <a:ln w="12700">
+          <a:ln w="25400">
             <a:solidFill>
               <a:srgbClr val="000000"/>
             </a:solidFill>
@@ -6809,19 +8605,19 @@
       </p:cxnSp>
       <p:cxnSp>
         <p:nvCxnSpPr>
-          <p:cNvPr id="20" name="Connector 19"/>
+          <p:cNvPr id="34" name="Connector 33"/>
           <p:cNvCxnSpPr/>
           <p:nvPr/>
         </p:nvCxnSpPr>
         <p:spPr>
           <a:xfrm>
-            <a:off x="5040000" y="3960000"/>
-            <a:ext cx="720000" cy="540000"/>
+            <a:off x="4140000" y="3096000"/>
+            <a:ext cx="540000" cy="432000"/>
           </a:xfrm>
           <a:prstGeom prst="line">
             <a:avLst/>
           </a:prstGeom>
-          <a:ln w="12700">
+          <a:ln w="25400">
             <a:solidFill>
               <a:srgbClr val="000000"/>
             </a:solidFill>
@@ -6844,19 +8640,19 @@
       </p:cxnSp>
       <p:cxnSp>
         <p:nvCxnSpPr>
-          <p:cNvPr id="21" name="Connector 20"/>
+          <p:cNvPr id="35" name="Connector 34"/>
           <p:cNvCxnSpPr/>
           <p:nvPr/>
         </p:nvCxnSpPr>
         <p:spPr>
           <a:xfrm>
-            <a:off x="5760000" y="4500000"/>
-            <a:ext cx="720000" cy="360000"/>
+            <a:off x="4680000" y="3528000"/>
+            <a:ext cx="540000" cy="360000"/>
           </a:xfrm>
           <a:prstGeom prst="line">
             <a:avLst/>
           </a:prstGeom>
-          <a:ln w="12700">
+          <a:ln w="25400">
             <a:solidFill>
               <a:srgbClr val="000000"/>
             </a:solidFill>
@@ -6879,19 +8675,19 @@
       </p:cxnSp>
       <p:cxnSp>
         <p:nvCxnSpPr>
-          <p:cNvPr id="22" name="Connector 21"/>
+          <p:cNvPr id="36" name="Connector 35"/>
           <p:cNvCxnSpPr/>
           <p:nvPr/>
         </p:nvCxnSpPr>
         <p:spPr>
           <a:xfrm>
-            <a:off x="6480000" y="4860000"/>
+            <a:off x="5220000" y="3888000"/>
             <a:ext cx="540000" cy="360000"/>
           </a:xfrm>
           <a:prstGeom prst="line">
             <a:avLst/>
           </a:prstGeom>
-          <a:ln w="12700">
+          <a:ln w="25400">
             <a:solidFill>
               <a:srgbClr val="000000"/>
             </a:solidFill>
@@ -6912,16 +8708,706 @@
           </a:fontRef>
         </p:style>
       </p:cxnSp>
-      <p:sp>
-        <p:nvSpPr>
-          <p:cNvPr id="23" name="TextBox 22"/>
+      <p:cxnSp>
+        <p:nvCxnSpPr>
+          <p:cNvPr id="37" name="Connector 36"/>
+          <p:cNvCxnSpPr/>
+          <p:nvPr/>
+        </p:nvCxnSpPr>
+        <p:spPr>
+          <a:xfrm>
+            <a:off x="5760000" y="4248000"/>
+            <a:ext cx="540000" cy="324000"/>
+          </a:xfrm>
+          <a:prstGeom prst="line">
+            <a:avLst/>
+          </a:prstGeom>
+          <a:ln w="25400">
+            <a:solidFill>
+              <a:srgbClr val="000000"/>
+            </a:solidFill>
+          </a:ln>
+        </p:spPr>
+        <p:style>
+          <a:lnRef idx="2">
+            <a:schemeClr val="accent1"/>
+          </a:lnRef>
+          <a:fillRef idx="0">
+            <a:schemeClr val="accent1"/>
+          </a:fillRef>
+          <a:effectRef idx="1">
+            <a:schemeClr val="accent1"/>
+          </a:effectRef>
+          <a:fontRef idx="minor">
+            <a:schemeClr val="tx1"/>
+          </a:fontRef>
+        </p:style>
+      </p:cxnSp>
+      <p:cxnSp>
+        <p:nvCxnSpPr>
+          <p:cNvPr id="38" name="Connector 37"/>
+          <p:cNvCxnSpPr/>
+          <p:nvPr/>
+        </p:nvCxnSpPr>
+        <p:spPr>
+          <a:xfrm>
+            <a:off x="6300000" y="4572000"/>
+            <a:ext cx="540000" cy="216000"/>
+          </a:xfrm>
+          <a:prstGeom prst="line">
+            <a:avLst/>
+          </a:prstGeom>
+          <a:ln w="25400">
+            <a:solidFill>
+              <a:srgbClr val="000000"/>
+            </a:solidFill>
+          </a:ln>
+        </p:spPr>
+        <p:style>
+          <a:lnRef idx="2">
+            <a:schemeClr val="accent1"/>
+          </a:lnRef>
+          <a:fillRef idx="0">
+            <a:schemeClr val="accent1"/>
+          </a:fillRef>
+          <a:effectRef idx="1">
+            <a:schemeClr val="accent1"/>
+          </a:effectRef>
+          <a:fontRef idx="minor">
+            <a:schemeClr val="tx1"/>
+          </a:fontRef>
+        </p:style>
+      </p:cxnSp>
+      <p:cxnSp>
+        <p:nvCxnSpPr>
+          <p:cNvPr id="39" name="Connector 38"/>
+          <p:cNvCxnSpPr/>
+          <p:nvPr/>
+        </p:nvCxnSpPr>
+        <p:spPr>
+          <a:xfrm>
+            <a:off x="6840000" y="4788000"/>
+            <a:ext cx="360000" cy="36000"/>
+          </a:xfrm>
+          <a:prstGeom prst="line">
+            <a:avLst/>
+          </a:prstGeom>
+          <a:ln w="25400">
+            <a:solidFill>
+              <a:srgbClr val="000000"/>
+            </a:solidFill>
+          </a:ln>
+        </p:spPr>
+        <p:style>
+          <a:lnRef idx="2">
+            <a:schemeClr val="accent1"/>
+          </a:lnRef>
+          <a:fillRef idx="0">
+            <a:schemeClr val="accent1"/>
+          </a:fillRef>
+          <a:effectRef idx="1">
+            <a:schemeClr val="accent1"/>
+          </a:effectRef>
+          <a:fontRef idx="minor">
+            <a:schemeClr val="tx1"/>
+          </a:fontRef>
+        </p:style>
+      </p:cxnSp>
+      <p:sp>
+        <p:nvSpPr>
+          <p:cNvPr id="40" name="Oval 39"/>
+          <p:cNvSpPr/>
+          <p:nvPr/>
+        </p:nvSpPr>
+        <p:spPr>
+          <a:xfrm>
+            <a:off x="1396800" y="1324800"/>
+            <a:ext cx="86400" cy="86400"/>
+          </a:xfrm>
+          <a:prstGeom prst="ellipse">
+            <a:avLst/>
+          </a:prstGeom>
+          <a:solidFill>
+            <a:srgbClr val="000000"/>
+          </a:solidFill>
+          <a:ln w="6350">
+            <a:solidFill>
+              <a:srgbClr val="000000"/>
+            </a:solidFill>
+          </a:ln>
+        </p:spPr>
+        <p:style>
+          <a:lnRef idx="1">
+            <a:schemeClr val="accent1"/>
+          </a:lnRef>
+          <a:fillRef idx="3">
+            <a:schemeClr val="accent1"/>
+          </a:fillRef>
+          <a:effectRef idx="2">
+            <a:schemeClr val="accent1"/>
+          </a:effectRef>
+          <a:fontRef idx="minor">
+            <a:schemeClr val="lt1"/>
+          </a:fontRef>
+        </p:style>
+        <p:txBody>
+          <a:bodyPr rtlCol="0" anchor="ctr"/>
+          <a:lstStyle/>
+          <a:p>
+            <a:pPr algn="ctr"/>
+          </a:p>
+        </p:txBody>
+      </p:sp>
+      <p:sp>
+        <p:nvSpPr>
+          <p:cNvPr id="41" name="Oval 40"/>
+          <p:cNvSpPr/>
+          <p:nvPr/>
+        </p:nvSpPr>
+        <p:spPr>
+          <a:xfrm>
+            <a:off x="1936800" y="1576800"/>
+            <a:ext cx="86400" cy="86400"/>
+          </a:xfrm>
+          <a:prstGeom prst="ellipse">
+            <a:avLst/>
+          </a:prstGeom>
+          <a:solidFill>
+            <a:srgbClr val="000000"/>
+          </a:solidFill>
+          <a:ln w="6350">
+            <a:solidFill>
+              <a:srgbClr val="000000"/>
+            </a:solidFill>
+          </a:ln>
+        </p:spPr>
+        <p:style>
+          <a:lnRef idx="1">
+            <a:schemeClr val="accent1"/>
+          </a:lnRef>
+          <a:fillRef idx="3">
+            <a:schemeClr val="accent1"/>
+          </a:fillRef>
+          <a:effectRef idx="2">
+            <a:schemeClr val="accent1"/>
+          </a:effectRef>
+          <a:fontRef idx="minor">
+            <a:schemeClr val="lt1"/>
+          </a:fontRef>
+        </p:style>
+        <p:txBody>
+          <a:bodyPr rtlCol="0" anchor="ctr"/>
+          <a:lstStyle/>
+          <a:p>
+            <a:pPr algn="ctr"/>
+          </a:p>
+        </p:txBody>
+      </p:sp>
+      <p:sp>
+        <p:nvSpPr>
+          <p:cNvPr id="42" name="Oval 41"/>
+          <p:cNvSpPr/>
+          <p:nvPr/>
+        </p:nvSpPr>
+        <p:spPr>
+          <a:xfrm>
+            <a:off x="2476800" y="1900800"/>
+            <a:ext cx="86400" cy="86400"/>
+          </a:xfrm>
+          <a:prstGeom prst="ellipse">
+            <a:avLst/>
+          </a:prstGeom>
+          <a:solidFill>
+            <a:srgbClr val="000000"/>
+          </a:solidFill>
+          <a:ln w="6350">
+            <a:solidFill>
+              <a:srgbClr val="000000"/>
+            </a:solidFill>
+          </a:ln>
+        </p:spPr>
+        <p:style>
+          <a:lnRef idx="1">
+            <a:schemeClr val="accent1"/>
+          </a:lnRef>
+          <a:fillRef idx="3">
+            <a:schemeClr val="accent1"/>
+          </a:fillRef>
+          <a:effectRef idx="2">
+            <a:schemeClr val="accent1"/>
+          </a:effectRef>
+          <a:fontRef idx="minor">
+            <a:schemeClr val="lt1"/>
+          </a:fontRef>
+        </p:style>
+        <p:txBody>
+          <a:bodyPr rtlCol="0" anchor="ctr"/>
+          <a:lstStyle/>
+          <a:p>
+            <a:pPr algn="ctr"/>
+          </a:p>
+        </p:txBody>
+      </p:sp>
+      <p:sp>
+        <p:nvSpPr>
+          <p:cNvPr id="43" name="Oval 42"/>
+          <p:cNvSpPr/>
+          <p:nvPr/>
+        </p:nvSpPr>
+        <p:spPr>
+          <a:xfrm>
+            <a:off x="3016800" y="2296800"/>
+            <a:ext cx="86400" cy="86400"/>
+          </a:xfrm>
+          <a:prstGeom prst="ellipse">
+            <a:avLst/>
+          </a:prstGeom>
+          <a:solidFill>
+            <a:srgbClr val="000000"/>
+          </a:solidFill>
+          <a:ln w="6350">
+            <a:solidFill>
+              <a:srgbClr val="000000"/>
+            </a:solidFill>
+          </a:ln>
+        </p:spPr>
+        <p:style>
+          <a:lnRef idx="1">
+            <a:schemeClr val="accent1"/>
+          </a:lnRef>
+          <a:fillRef idx="3">
+            <a:schemeClr val="accent1"/>
+          </a:fillRef>
+          <a:effectRef idx="2">
+            <a:schemeClr val="accent1"/>
+          </a:effectRef>
+          <a:fontRef idx="minor">
+            <a:schemeClr val="lt1"/>
+          </a:fontRef>
+        </p:style>
+        <p:txBody>
+          <a:bodyPr rtlCol="0" anchor="ctr"/>
+          <a:lstStyle/>
+          <a:p>
+            <a:pPr algn="ctr"/>
+          </a:p>
+        </p:txBody>
+      </p:sp>
+      <p:sp>
+        <p:nvSpPr>
+          <p:cNvPr id="44" name="Oval 43"/>
+          <p:cNvSpPr/>
+          <p:nvPr/>
+        </p:nvSpPr>
+        <p:spPr>
+          <a:xfrm>
+            <a:off x="3556800" y="2656800"/>
+            <a:ext cx="86400" cy="86400"/>
+          </a:xfrm>
+          <a:prstGeom prst="ellipse">
+            <a:avLst/>
+          </a:prstGeom>
+          <a:solidFill>
+            <a:srgbClr val="000000"/>
+          </a:solidFill>
+          <a:ln w="6350">
+            <a:solidFill>
+              <a:srgbClr val="000000"/>
+            </a:solidFill>
+          </a:ln>
+        </p:spPr>
+        <p:style>
+          <a:lnRef idx="1">
+            <a:schemeClr val="accent1"/>
+          </a:lnRef>
+          <a:fillRef idx="3">
+            <a:schemeClr val="accent1"/>
+          </a:fillRef>
+          <a:effectRef idx="2">
+            <a:schemeClr val="accent1"/>
+          </a:effectRef>
+          <a:fontRef idx="minor">
+            <a:schemeClr val="lt1"/>
+          </a:fontRef>
+        </p:style>
+        <p:txBody>
+          <a:bodyPr rtlCol="0" anchor="ctr"/>
+          <a:lstStyle/>
+          <a:p>
+            <a:pPr algn="ctr"/>
+          </a:p>
+        </p:txBody>
+      </p:sp>
+      <p:sp>
+        <p:nvSpPr>
+          <p:cNvPr id="45" name="Oval 44"/>
+          <p:cNvSpPr/>
+          <p:nvPr/>
+        </p:nvSpPr>
+        <p:spPr>
+          <a:xfrm>
+            <a:off x="4096800" y="3052800"/>
+            <a:ext cx="86400" cy="86400"/>
+          </a:xfrm>
+          <a:prstGeom prst="ellipse">
+            <a:avLst/>
+          </a:prstGeom>
+          <a:solidFill>
+            <a:srgbClr val="000000"/>
+          </a:solidFill>
+          <a:ln w="6350">
+            <a:solidFill>
+              <a:srgbClr val="000000"/>
+            </a:solidFill>
+          </a:ln>
+        </p:spPr>
+        <p:style>
+          <a:lnRef idx="1">
+            <a:schemeClr val="accent1"/>
+          </a:lnRef>
+          <a:fillRef idx="3">
+            <a:schemeClr val="accent1"/>
+          </a:fillRef>
+          <a:effectRef idx="2">
+            <a:schemeClr val="accent1"/>
+          </a:effectRef>
+          <a:fontRef idx="minor">
+            <a:schemeClr val="lt1"/>
+          </a:fontRef>
+        </p:style>
+        <p:txBody>
+          <a:bodyPr rtlCol="0" anchor="ctr"/>
+          <a:lstStyle/>
+          <a:p>
+            <a:pPr algn="ctr"/>
+          </a:p>
+        </p:txBody>
+      </p:sp>
+      <p:sp>
+        <p:nvSpPr>
+          <p:cNvPr id="46" name="Oval 45"/>
+          <p:cNvSpPr/>
+          <p:nvPr/>
+        </p:nvSpPr>
+        <p:spPr>
+          <a:xfrm>
+            <a:off x="4636800" y="3484800"/>
+            <a:ext cx="86400" cy="86400"/>
+          </a:xfrm>
+          <a:prstGeom prst="ellipse">
+            <a:avLst/>
+          </a:prstGeom>
+          <a:solidFill>
+            <a:srgbClr val="000000"/>
+          </a:solidFill>
+          <a:ln w="6350">
+            <a:solidFill>
+              <a:srgbClr val="000000"/>
+            </a:solidFill>
+          </a:ln>
+        </p:spPr>
+        <p:style>
+          <a:lnRef idx="1">
+            <a:schemeClr val="accent1"/>
+          </a:lnRef>
+          <a:fillRef idx="3">
+            <a:schemeClr val="accent1"/>
+          </a:fillRef>
+          <a:effectRef idx="2">
+            <a:schemeClr val="accent1"/>
+          </a:effectRef>
+          <a:fontRef idx="minor">
+            <a:schemeClr val="lt1"/>
+          </a:fontRef>
+        </p:style>
+        <p:txBody>
+          <a:bodyPr rtlCol="0" anchor="ctr"/>
+          <a:lstStyle/>
+          <a:p>
+            <a:pPr algn="ctr"/>
+          </a:p>
+        </p:txBody>
+      </p:sp>
+      <p:sp>
+        <p:nvSpPr>
+          <p:cNvPr id="47" name="Oval 46"/>
+          <p:cNvSpPr/>
+          <p:nvPr/>
+        </p:nvSpPr>
+        <p:spPr>
+          <a:xfrm>
+            <a:off x="5176800" y="3844800"/>
+            <a:ext cx="86400" cy="86400"/>
+          </a:xfrm>
+          <a:prstGeom prst="ellipse">
+            <a:avLst/>
+          </a:prstGeom>
+          <a:solidFill>
+            <a:srgbClr val="000000"/>
+          </a:solidFill>
+          <a:ln w="6350">
+            <a:solidFill>
+              <a:srgbClr val="000000"/>
+            </a:solidFill>
+          </a:ln>
+        </p:spPr>
+        <p:style>
+          <a:lnRef idx="1">
+            <a:schemeClr val="accent1"/>
+          </a:lnRef>
+          <a:fillRef idx="3">
+            <a:schemeClr val="accent1"/>
+          </a:fillRef>
+          <a:effectRef idx="2">
+            <a:schemeClr val="accent1"/>
+          </a:effectRef>
+          <a:fontRef idx="minor">
+            <a:schemeClr val="lt1"/>
+          </a:fontRef>
+        </p:style>
+        <p:txBody>
+          <a:bodyPr rtlCol="0" anchor="ctr"/>
+          <a:lstStyle/>
+          <a:p>
+            <a:pPr algn="ctr"/>
+          </a:p>
+        </p:txBody>
+      </p:sp>
+      <p:sp>
+        <p:nvSpPr>
+          <p:cNvPr id="48" name="Oval 47"/>
+          <p:cNvSpPr/>
+          <p:nvPr/>
+        </p:nvSpPr>
+        <p:spPr>
+          <a:xfrm>
+            <a:off x="5716800" y="4204800"/>
+            <a:ext cx="86400" cy="86400"/>
+          </a:xfrm>
+          <a:prstGeom prst="ellipse">
+            <a:avLst/>
+          </a:prstGeom>
+          <a:solidFill>
+            <a:srgbClr val="000000"/>
+          </a:solidFill>
+          <a:ln w="6350">
+            <a:solidFill>
+              <a:srgbClr val="000000"/>
+            </a:solidFill>
+          </a:ln>
+        </p:spPr>
+        <p:style>
+          <a:lnRef idx="1">
+            <a:schemeClr val="accent1"/>
+          </a:lnRef>
+          <a:fillRef idx="3">
+            <a:schemeClr val="accent1"/>
+          </a:fillRef>
+          <a:effectRef idx="2">
+            <a:schemeClr val="accent1"/>
+          </a:effectRef>
+          <a:fontRef idx="minor">
+            <a:schemeClr val="lt1"/>
+          </a:fontRef>
+        </p:style>
+        <p:txBody>
+          <a:bodyPr rtlCol="0" anchor="ctr"/>
+          <a:lstStyle/>
+          <a:p>
+            <a:pPr algn="ctr"/>
+          </a:p>
+        </p:txBody>
+      </p:sp>
+      <p:sp>
+        <p:nvSpPr>
+          <p:cNvPr id="49" name="Oval 48"/>
+          <p:cNvSpPr/>
+          <p:nvPr/>
+        </p:nvSpPr>
+        <p:spPr>
+          <a:xfrm>
+            <a:off x="6256800" y="4528800"/>
+            <a:ext cx="86400" cy="86400"/>
+          </a:xfrm>
+          <a:prstGeom prst="ellipse">
+            <a:avLst/>
+          </a:prstGeom>
+          <a:solidFill>
+            <a:srgbClr val="000000"/>
+          </a:solidFill>
+          <a:ln w="6350">
+            <a:solidFill>
+              <a:srgbClr val="000000"/>
+            </a:solidFill>
+          </a:ln>
+        </p:spPr>
+        <p:style>
+          <a:lnRef idx="1">
+            <a:schemeClr val="accent1"/>
+          </a:lnRef>
+          <a:fillRef idx="3">
+            <a:schemeClr val="accent1"/>
+          </a:fillRef>
+          <a:effectRef idx="2">
+            <a:schemeClr val="accent1"/>
+          </a:effectRef>
+          <a:fontRef idx="minor">
+            <a:schemeClr val="lt1"/>
+          </a:fontRef>
+        </p:style>
+        <p:txBody>
+          <a:bodyPr rtlCol="0" anchor="ctr"/>
+          <a:lstStyle/>
+          <a:p>
+            <a:pPr algn="ctr"/>
+          </a:p>
+        </p:txBody>
+      </p:sp>
+      <p:sp>
+        <p:nvSpPr>
+          <p:cNvPr id="50" name="Oval 49"/>
+          <p:cNvSpPr/>
+          <p:nvPr/>
+        </p:nvSpPr>
+        <p:spPr>
+          <a:xfrm>
+            <a:off x="6796800" y="4744800"/>
+            <a:ext cx="86400" cy="86400"/>
+          </a:xfrm>
+          <a:prstGeom prst="ellipse">
+            <a:avLst/>
+          </a:prstGeom>
+          <a:solidFill>
+            <a:srgbClr val="000000"/>
+          </a:solidFill>
+          <a:ln w="6350">
+            <a:solidFill>
+              <a:srgbClr val="000000"/>
+            </a:solidFill>
+          </a:ln>
+        </p:spPr>
+        <p:style>
+          <a:lnRef idx="1">
+            <a:schemeClr val="accent1"/>
+          </a:lnRef>
+          <a:fillRef idx="3">
+            <a:schemeClr val="accent1"/>
+          </a:fillRef>
+          <a:effectRef idx="2">
+            <a:schemeClr val="accent1"/>
+          </a:effectRef>
+          <a:fontRef idx="minor">
+            <a:schemeClr val="lt1"/>
+          </a:fontRef>
+        </p:style>
+        <p:txBody>
+          <a:bodyPr rtlCol="0" anchor="ctr"/>
+          <a:lstStyle/>
+          <a:p>
+            <a:pPr algn="ctr"/>
+          </a:p>
+        </p:txBody>
+      </p:sp>
+      <p:sp>
+        <p:nvSpPr>
+          <p:cNvPr id="51" name="Oval 50"/>
+          <p:cNvSpPr/>
+          <p:nvPr/>
+        </p:nvSpPr>
+        <p:spPr>
+          <a:xfrm>
+            <a:off x="7156800" y="4780800"/>
+            <a:ext cx="86400" cy="86400"/>
+          </a:xfrm>
+          <a:prstGeom prst="ellipse">
+            <a:avLst/>
+          </a:prstGeom>
+          <a:solidFill>
+            <a:srgbClr val="000000"/>
+          </a:solidFill>
+          <a:ln w="6350">
+            <a:solidFill>
+              <a:srgbClr val="000000"/>
+            </a:solidFill>
+          </a:ln>
+        </p:spPr>
+        <p:style>
+          <a:lnRef idx="1">
+            <a:schemeClr val="accent1"/>
+          </a:lnRef>
+          <a:fillRef idx="3">
+            <a:schemeClr val="accent1"/>
+          </a:fillRef>
+          <a:effectRef idx="2">
+            <a:schemeClr val="accent1"/>
+          </a:effectRef>
+          <a:fontRef idx="minor">
+            <a:schemeClr val="lt1"/>
+          </a:fontRef>
+        </p:style>
+        <p:txBody>
+          <a:bodyPr rtlCol="0" anchor="ctr"/>
+          <a:lstStyle/>
+          <a:p>
+            <a:pPr algn="ctr"/>
+          </a:p>
+        </p:txBody>
+      </p:sp>
+      <p:sp>
+        <p:nvSpPr>
+          <p:cNvPr id="52" name="Oval 51"/>
+          <p:cNvSpPr/>
+          <p:nvPr/>
+        </p:nvSpPr>
+        <p:spPr>
+          <a:xfrm>
+            <a:off x="5130000" y="3798000"/>
+            <a:ext cx="180000" cy="180000"/>
+          </a:xfrm>
+          <a:prstGeom prst="ellipse">
+            <a:avLst/>
+          </a:prstGeom>
+          <a:solidFill>
+            <a:srgbClr val="FFFFFF"/>
+          </a:solidFill>
+          <a:ln w="25400">
+            <a:solidFill>
+              <a:srgbClr val="000000"/>
+            </a:solidFill>
+          </a:ln>
+        </p:spPr>
+        <p:style>
+          <a:lnRef idx="1">
+            <a:schemeClr val="accent1"/>
+          </a:lnRef>
+          <a:fillRef idx="3">
+            <a:schemeClr val="accent1"/>
+          </a:fillRef>
+          <a:effectRef idx="2">
+            <a:schemeClr val="accent1"/>
+          </a:effectRef>
+          <a:fontRef idx="minor">
+            <a:schemeClr val="lt1"/>
+          </a:fontRef>
+        </p:style>
+        <p:txBody>
+          <a:bodyPr rtlCol="0" anchor="ctr"/>
+          <a:lstStyle/>
+          <a:p>
+            <a:pPr algn="ctr"/>
+          </a:p>
+        </p:txBody>
+      </p:sp>
+      <p:sp>
+        <p:nvSpPr>
+          <p:cNvPr id="53" name="TextBox 52"/>
           <p:cNvSpPr txBox="1"/>
           <p:nvPr/>
         </p:nvSpPr>
         <p:spPr>
           <a:xfrm>
-            <a:off x="4680000" y="3600000"/>
-            <a:ext cx="1800000" cy="360000"/>
+            <a:off x="5400000" y="3672000"/>
+            <a:ext cx="2160000" cy="288000"/>
           </a:xfrm>
           <a:prstGeom prst="rect">
             <a:avLst/>
@@ -6936,23 +9422,116 @@
           <a:p>
             <a:pPr algn="l"/>
             <a:r>
-              <a:rPr sz="800" b="0"/>
-              <a:t>● 予告通知発動
-(残り≈5サイクル)</a:t>
-            </a:r>
-          </a:p>
-        </p:txBody>
-      </p:sp>
-      <p:sp>
-        <p:nvSpPr>
-          <p:cNvPr id="24" name="TextBox 23"/>
+              <a:rPr sz="800" b="0">
+                <a:solidFill>
+                  <a:srgbClr val="000000"/>
+                </a:solidFill>
+              </a:rPr>
+              <a:t>(P) 予告通知発動 (残り約5サイクル)</a:t>
+            </a:r>
+          </a:p>
+        </p:txBody>
+      </p:sp>
+      <p:sp>
+        <p:nvSpPr>
+          <p:cNvPr id="54" name="Oval 53"/>
+          <p:cNvSpPr/>
+          <p:nvPr/>
+        </p:nvSpPr>
+        <p:spPr>
+          <a:xfrm>
+            <a:off x="7092000" y="4716000"/>
+            <a:ext cx="216000" cy="216000"/>
+          </a:xfrm>
+          <a:prstGeom prst="ellipse">
+            <a:avLst/>
+          </a:prstGeom>
+          <a:solidFill>
+            <a:srgbClr val="000000"/>
+          </a:solidFill>
+          <a:ln w="25400">
+            <a:solidFill>
+              <a:srgbClr val="000000"/>
+            </a:solidFill>
+          </a:ln>
+        </p:spPr>
+        <p:style>
+          <a:lnRef idx="1">
+            <a:schemeClr val="accent1"/>
+          </a:lnRef>
+          <a:fillRef idx="3">
+            <a:schemeClr val="accent1"/>
+          </a:fillRef>
+          <a:effectRef idx="2">
+            <a:schemeClr val="accent1"/>
+          </a:effectRef>
+          <a:fontRef idx="minor">
+            <a:schemeClr val="lt1"/>
+          </a:fontRef>
+        </p:style>
+        <p:txBody>
+          <a:bodyPr rtlCol="0" anchor="ctr"/>
+          <a:lstStyle/>
+          <a:p>
+            <a:pPr algn="ctr"/>
+          </a:p>
+        </p:txBody>
+      </p:sp>
+      <p:sp>
+        <p:nvSpPr>
+          <p:cNvPr id="55" name="Oval 54"/>
+          <p:cNvSpPr/>
+          <p:nvPr/>
+        </p:nvSpPr>
+        <p:spPr>
+          <a:xfrm>
+            <a:off x="7146000" y="4770000"/>
+            <a:ext cx="108000" cy="108000"/>
+          </a:xfrm>
+          <a:prstGeom prst="ellipse">
+            <a:avLst/>
+          </a:prstGeom>
+          <a:solidFill>
+            <a:srgbClr val="FFFFFF"/>
+          </a:solidFill>
+          <a:ln w="12700">
+            <a:solidFill>
+              <a:srgbClr val="000000"/>
+            </a:solidFill>
+          </a:ln>
+        </p:spPr>
+        <p:style>
+          <a:lnRef idx="1">
+            <a:schemeClr val="accent1"/>
+          </a:lnRef>
+          <a:fillRef idx="3">
+            <a:schemeClr val="accent1"/>
+          </a:fillRef>
+          <a:effectRef idx="2">
+            <a:schemeClr val="accent1"/>
+          </a:effectRef>
+          <a:fontRef idx="minor">
+            <a:schemeClr val="lt1"/>
+          </a:fontRef>
+        </p:style>
+        <p:txBody>
+          <a:bodyPr rtlCol="0" anchor="ctr"/>
+          <a:lstStyle/>
+          <a:p>
+            <a:pPr algn="ctr"/>
+          </a:p>
+        </p:txBody>
+      </p:sp>
+      <p:sp>
+        <p:nvSpPr>
+          <p:cNvPr id="56" name="TextBox 55"/>
           <p:cNvSpPr txBox="1"/>
           <p:nvPr/>
         </p:nvSpPr>
         <p:spPr>
           <a:xfrm>
-            <a:off x="6660000" y="5328000"/>
-            <a:ext cx="1800000" cy="360000"/>
+            <a:off x="5400000" y="5040000"/>
+            <a:ext cx="2160000" cy="288000"/>
           </a:xfrm>
           <a:prstGeom prst="rect">
             <a:avLst/>
@@ -6967,23 +9546,26 @@
           <a:p>
             <a:pPr algn="l"/>
             <a:r>
-              <a:rPr sz="800" b="1"/>
-              <a:t>★ 目標到達
-→ アラーム</a:t>
-            </a:r>
-          </a:p>
-        </p:txBody>
-      </p:sp>
-      <p:sp>
-        <p:nvSpPr>
-          <p:cNvPr id="25" name="TextBox 24"/>
+              <a:rPr sz="800" b="1">
+                <a:solidFill>
+                  <a:srgbClr val="000000"/>
+                </a:solidFill>
+              </a:rPr>
+              <a:t>(R) 目標到達 -&gt; アラーム</a:t>
+            </a:r>
+          </a:p>
+        </p:txBody>
+      </p:sp>
+      <p:sp>
+        <p:nvSpPr>
+          <p:cNvPr id="57" name="TextBox 56"/>
           <p:cNvSpPr txBox="1"/>
           <p:nvPr/>
         </p:nvSpPr>
         <p:spPr>
           <a:xfrm>
-            <a:off x="1080000" y="6120000"/>
-            <a:ext cx="7200000" cy="360000"/>
+            <a:off x="1260000" y="5940000"/>
+            <a:ext cx="7200000" cy="288000"/>
           </a:xfrm>
           <a:prstGeom prst="rect">
             <a:avLst/>
@@ -6998,8 +9580,12 @@
           <a:p>
             <a:pPr algn="l"/>
             <a:r>
-              <a:rPr sz="800" b="0"/>
-              <a:t>凡例:  ─── = ΔE計測値の推移   ● = 予告通知発動点   ★ = 目標到達（ΔE &lt; 閾値）   --- = ΔE閾値ライン</a:t>
+              <a:rPr sz="800" b="0">
+                <a:solidFill>
+                  <a:srgbClr val="000000"/>
+                </a:solidFill>
+              </a:rPr>
+              <a:t>凡例:  --- ΔE計測値   (P) 予告通知発動点   (R) 目標到達 (ΔE &lt; 閾値)   - - - ΔE閾値</a:t>
             </a:r>
           </a:p>
         </p:txBody>
@@ -7031,7 +9617,7 @@
         <p:spPr>
           <a:xfrm>
             <a:off x="360000" y="180000"/>
-            <a:ext cx="6480000" cy="540000"/>
+            <a:ext cx="8280000" cy="540000"/>
           </a:xfrm>
           <a:prstGeom prst="rect">
             <a:avLst/>
@@ -7046,8 +9632,12 @@
           <a:p>
             <a:pPr algn="ctr"/>
             <a:r>
-              <a:rPr sz="1400" b="1"/>
-              <a:t>【図6】外付けクリップオン型実装例の外観図</a:t>
+              <a:rPr sz="1400" b="1">
+                <a:solidFill>
+                  <a:srgbClr val="000000"/>
+                </a:solidFill>
+              </a:rPr>
+              <a:t>【図6】</a:t>
             </a:r>
           </a:p>
         </p:txBody>
@@ -7060,14 +9650,14 @@
         </p:nvSpPr>
         <p:spPr>
           <a:xfrm>
-            <a:off x="3240000" y="1080000"/>
-            <a:ext cx="2520000" cy="1800000"/>
+            <a:off x="3240000" y="900000"/>
+            <a:ext cx="2520000" cy="1620000"/>
           </a:xfrm>
           <a:prstGeom prst="rect">
             <a:avLst/>
           </a:prstGeom>
           <a:solidFill>
-            <a:srgbClr val="DBE5F1"/>
+            <a:srgbClr val="FFFFFF"/>
           </a:solidFill>
           <a:ln w="19050">
             <a:solidFill>
@@ -7093,17 +9683,58 @@
           <a:bodyPr rtlCol="0" anchor="ctr" wrap="square" lIns="38100" rIns="38100" tIns="25400" bIns="25400"/>
           <a:lstStyle/>
           <a:p>
-            <a:pPr algn="ctr"/>
-            <a:r>
-              <a:rPr sz="800"/>
-              <a:t>CoreS3 本体
-┌──────────┐
-│ dE: 12.3   │
-│ ████░░░    │
-│ Target:    │
-│ きつね色   │
-└──────────┘
-表示部 130</a:t>
+            <a:pPr algn="l"/>
+            <a:r>
+              <a:rPr sz="900" b="0">
+                <a:solidFill>
+                  <a:srgbClr val="000000"/>
+                </a:solidFill>
+              </a:rPr>
+              <a:t>表示部 130 / CoreS3</a:t>
+            </a:r>
+          </a:p>
+          <a:p>
+            <a:pPr algn="l"/>
+            <a:r>
+              <a:rPr sz="900" b="0">
+                <a:solidFill>
+                  <a:srgbClr val="000000"/>
+                </a:solidFill>
+              </a:rPr>
+              <a:t/>
+            </a:r>
+          </a:p>
+          <a:p>
+            <a:pPr algn="l"/>
+            <a:r>
+              <a:rPr sz="900" b="0">
+                <a:solidFill>
+                  <a:srgbClr val="000000"/>
+                </a:solidFill>
+              </a:rPr>
+              <a:t>  dE: 12.3</a:t>
+            </a:r>
+          </a:p>
+          <a:p>
+            <a:pPr algn="l"/>
+            <a:r>
+              <a:rPr sz="900" b="0">
+                <a:solidFill>
+                  <a:srgbClr val="000000"/>
+                </a:solidFill>
+              </a:rPr>
+              <a:t>  [========&gt;        ] 62%</a:t>
+            </a:r>
+          </a:p>
+          <a:p>
+            <a:pPr algn="l"/>
+            <a:r>
+              <a:rPr sz="900" b="0">
+                <a:solidFill>
+                  <a:srgbClr val="000000"/>
+                </a:solidFill>
+              </a:rPr>
+              <a:t>  目標: きつね色</a:t>
             </a:r>
           </a:p>
         </p:txBody>
@@ -7116,8 +9747,8 @@
         </p:nvSpPr>
         <p:spPr>
           <a:xfrm>
-            <a:off x="3960000" y="2880000"/>
-            <a:ext cx="1440000" cy="216000"/>
+            <a:off x="5940000" y="1260000"/>
+            <a:ext cx="2520000" cy="216000"/>
           </a:xfrm>
           <a:prstGeom prst="rect">
             <a:avLst/>
@@ -7132,28 +9763,101 @@
           <a:p>
             <a:pPr algn="l"/>
             <a:r>
-              <a:rPr sz="800" b="0"/>
-              <a:t>│ Grove cable (I2C)</a:t>
-            </a:r>
-          </a:p>
-        </p:txBody>
-      </p:sp>
-      <p:sp>
-        <p:nvSpPr>
-          <p:cNvPr id="5" name="Rectangle 4"/>
+              <a:rPr sz="800" b="0">
+                <a:solidFill>
+                  <a:srgbClr val="000000"/>
+                </a:solidFill>
+              </a:rPr>
+              <a:t>&lt;- タッチスクリーン (2インチ)</a:t>
+            </a:r>
+          </a:p>
+        </p:txBody>
+      </p:sp>
+      <p:sp>
+        <p:nvSpPr>
+          <p:cNvPr id="5" name="TextBox 4"/>
+          <p:cNvSpPr txBox="1"/>
+          <p:nvPr/>
+        </p:nvSpPr>
+        <p:spPr>
+          <a:xfrm>
+            <a:off x="3780000" y="2592000"/>
+            <a:ext cx="1800000" cy="216000"/>
+          </a:xfrm>
+          <a:prstGeom prst="rect">
+            <a:avLst/>
+          </a:prstGeom>
+          <a:noFill/>
+        </p:spPr>
+        <p:txBody>
+          <a:bodyPr wrap="square">
+            <a:spAutoFit/>
+          </a:bodyPr>
+          <a:lstStyle/>
+          <a:p>
+            <a:pPr algn="ctr"/>
+            <a:r>
+              <a:rPr sz="800" b="0">
+                <a:solidFill>
+                  <a:srgbClr val="000000"/>
+                </a:solidFill>
+              </a:rPr>
+              <a:t>Groveケーブル (I2C)</a:t>
+            </a:r>
+          </a:p>
+        </p:txBody>
+      </p:sp>
+      <p:cxnSp>
+        <p:nvCxnSpPr>
+          <p:cNvPr id="6" name="Connector 5"/>
+          <p:cNvCxnSpPr/>
+          <p:nvPr/>
+        </p:nvCxnSpPr>
+        <p:spPr>
+          <a:xfrm>
+            <a:off x="4500000" y="2520000"/>
+            <a:ext cx="0" cy="360000"/>
+          </a:xfrm>
+          <a:prstGeom prst="line">
+            <a:avLst/>
+          </a:prstGeom>
+          <a:ln w="19050">
+            <a:solidFill>
+              <a:srgbClr val="000000"/>
+            </a:solidFill>
+          </a:ln>
+        </p:spPr>
+        <p:style>
+          <a:lnRef idx="2">
+            <a:schemeClr val="accent1"/>
+          </a:lnRef>
+          <a:fillRef idx="0">
+            <a:schemeClr val="accent1"/>
+          </a:fillRef>
+          <a:effectRef idx="1">
+            <a:schemeClr val="accent1"/>
+          </a:effectRef>
+          <a:fontRef idx="minor">
+            <a:schemeClr val="tx1"/>
+          </a:fontRef>
+        </p:style>
+      </p:cxnSp>
+      <p:sp>
+        <p:nvSpPr>
+          <p:cNvPr id="7" name="Rectangle 6"/>
           <p:cNvSpPr/>
           <p:nvPr/>
         </p:nvSpPr>
         <p:spPr>
           <a:xfrm>
-            <a:off x="3600000" y="3240000"/>
+            <a:off x="3600000" y="2880000"/>
             <a:ext cx="1800000" cy="900000"/>
           </a:xfrm>
           <a:prstGeom prst="rect">
             <a:avLst/>
           </a:prstGeom>
           <a:solidFill>
-            <a:srgbClr val="FFF2CC"/>
+            <a:srgbClr val="FFFFFF"/>
           </a:solidFill>
           <a:ln w="19050">
             <a:solidFill>
@@ -7179,32 +9883,67 @@
           <a:bodyPr rtlCol="0" anchor="ctr" wrap="square" lIns="38100" rIns="38100" tIns="25400" bIns="25400"/>
           <a:lstStyle/>
           <a:p>
-            <a:pPr algn="ctr"/>
-            <a:r>
-              <a:rPr sz="900"/>
-              <a:t>センサー部 110
-◉ RGBCセンサー 111
-◎ 白色LED 112</a:t>
-            </a:r>
-          </a:p>
-        </p:txBody>
-      </p:sp>
-      <p:sp>
-        <p:nvSpPr>
-          <p:cNvPr id="6" name="Rectangle 5"/>
+            <a:pPr algn="l"/>
+            <a:r>
+              <a:rPr sz="900" b="0">
+                <a:solidFill>
+                  <a:srgbClr val="000000"/>
+                </a:solidFill>
+              </a:rPr>
+              <a:t>センサー部 110</a:t>
+            </a:r>
+          </a:p>
+          <a:p>
+            <a:pPr algn="l"/>
+            <a:r>
+              <a:rPr sz="900" b="0">
+                <a:solidFill>
+                  <a:srgbClr val="000000"/>
+                </a:solidFill>
+              </a:rPr>
+              <a:t/>
+            </a:r>
+          </a:p>
+          <a:p>
+            <a:pPr algn="l"/>
+            <a:r>
+              <a:rPr sz="900" b="0">
+                <a:solidFill>
+                  <a:srgbClr val="000000"/>
+                </a:solidFill>
+              </a:rPr>
+              <a:t>(o) RGBCセンサー 111</a:t>
+            </a:r>
+          </a:p>
+          <a:p>
+            <a:pPr algn="l"/>
+            <a:r>
+              <a:rPr sz="900" b="0">
+                <a:solidFill>
+                  <a:srgbClr val="000000"/>
+                </a:solidFill>
+              </a:rPr>
+              <a:t>(o) 白色LED 112</a:t>
+            </a:r>
+          </a:p>
+        </p:txBody>
+      </p:sp>
+      <p:sp>
+        <p:nvSpPr>
+          <p:cNvPr id="8" name="Rectangle 7"/>
           <p:cNvSpPr/>
           <p:nvPr/>
         </p:nvSpPr>
         <p:spPr>
           <a:xfrm>
-            <a:off x="2880000" y="4320000"/>
-            <a:ext cx="3240000" cy="180000"/>
+            <a:off x="2880000" y="3960000"/>
+            <a:ext cx="3240000" cy="216000"/>
           </a:xfrm>
           <a:prstGeom prst="rect">
             <a:avLst/>
           </a:prstGeom>
           <a:solidFill>
-            <a:srgbClr val="808080"/>
+            <a:srgbClr val="000000"/>
           </a:solidFill>
           <a:ln w="19050">
             <a:solidFill>
@@ -7236,13 +9975,13 @@
       </p:sp>
       <p:sp>
         <p:nvSpPr>
-          <p:cNvPr id="7" name="TextBox 6"/>
+          <p:cNvPr id="9" name="TextBox 8"/>
           <p:cNvSpPr txBox="1"/>
           <p:nvPr/>
         </p:nvSpPr>
         <p:spPr>
           <a:xfrm>
-            <a:off x="6300000" y="4140000"/>
+            <a:off x="6300000" y="3780000"/>
             <a:ext cx="1800000" cy="288000"/>
           </a:xfrm>
           <a:prstGeom prst="rect">
@@ -7258,28 +9997,32 @@
           <a:p>
             <a:pPr algn="l"/>
             <a:r>
-              <a:rPr sz="900" b="0"/>
-              <a:t>← クリップ機構</a:t>
-            </a:r>
-          </a:p>
-        </p:txBody>
-      </p:sp>
-      <p:sp>
-        <p:nvSpPr>
-          <p:cNvPr id="8" name="Rectangle 7"/>
+              <a:rPr sz="900" b="0">
+                <a:solidFill>
+                  <a:srgbClr val="000000"/>
+                </a:solidFill>
+              </a:rPr>
+              <a:t>&lt;- クリップ機構</a:t>
+            </a:r>
+          </a:p>
+        </p:txBody>
+      </p:sp>
+      <p:sp>
+        <p:nvSpPr>
+          <p:cNvPr id="10" name="Rectangle 9"/>
           <p:cNvSpPr/>
           <p:nvPr/>
         </p:nvSpPr>
         <p:spPr>
           <a:xfrm>
-            <a:off x="3060000" y="4500000"/>
-            <a:ext cx="2880000" cy="360000"/>
+            <a:off x="2700000" y="4176000"/>
+            <a:ext cx="3600000" cy="432000"/>
           </a:xfrm>
           <a:prstGeom prst="rect">
             <a:avLst/>
           </a:prstGeom>
           <a:solidFill>
-            <a:srgbClr val="BFBFBF"/>
+            <a:srgbClr val="FFFFFF"/>
           </a:solidFill>
           <a:ln w="19050">
             <a:solidFill>
@@ -7307,7 +10050,11 @@
           <a:p>
             <a:pPr algn="ctr"/>
             <a:r>
-              <a:rPr sz="900"/>
+              <a:rPr sz="900" b="0">
+                <a:solidFill>
+                  <a:srgbClr val="000000"/>
+                </a:solidFill>
+              </a:rPr>
               <a:t>鍋 / フライパンの縁</a:t>
             </a:r>
           </a:p>
@@ -7315,14 +10062,14 @@
       </p:sp>
       <p:sp>
         <p:nvSpPr>
-          <p:cNvPr id="9" name="TextBox 8"/>
+          <p:cNvPr id="11" name="TextBox 10"/>
           <p:cNvSpPr txBox="1"/>
           <p:nvPr/>
         </p:nvSpPr>
         <p:spPr>
           <a:xfrm>
-            <a:off x="3960000" y="5040000"/>
-            <a:ext cx="1440000" cy="288000"/>
+            <a:off x="3600000" y="4788000"/>
+            <a:ext cx="2160000" cy="288000"/>
           </a:xfrm>
           <a:prstGeom prst="rect">
             <a:avLst/>
@@ -7335,30 +10082,70 @@
           </a:bodyPr>
           <a:lstStyle/>
           <a:p>
-            <a:pPr algn="l"/>
-            <a:r>
-              <a:rPr sz="900" b="1"/>
-              <a:t>▼ 照射・計測方向</a:t>
-            </a:r>
-          </a:p>
-        </p:txBody>
-      </p:sp>
-      <p:sp>
-        <p:nvSpPr>
-          <p:cNvPr id="10" name="Rectangle 9"/>
+            <a:pPr algn="ctr"/>
+            <a:r>
+              <a:rPr sz="900" b="1">
+                <a:solidFill>
+                  <a:srgbClr val="000000"/>
+                </a:solidFill>
+              </a:rPr>
+              <a:t>照射・計測方向</a:t>
+            </a:r>
+          </a:p>
+        </p:txBody>
+      </p:sp>
+      <p:cxnSp>
+        <p:nvCxnSpPr>
+          <p:cNvPr id="12" name="Connector 11"/>
+          <p:cNvCxnSpPr/>
+          <p:nvPr/>
+        </p:nvCxnSpPr>
+        <p:spPr>
+          <a:xfrm>
+            <a:off x="4500000" y="5040000"/>
+            <a:ext cx="0" cy="288000"/>
+          </a:xfrm>
+          <a:prstGeom prst="line">
+            <a:avLst/>
+          </a:prstGeom>
+          <a:ln w="19050">
+            <a:solidFill>
+              <a:srgbClr val="000000"/>
+            </a:solidFill>
+            <a:tailEnd type="triangle" w="med" len="med"/>
+          </a:ln>
+        </p:spPr>
+        <p:style>
+          <a:lnRef idx="2">
+            <a:schemeClr val="accent1"/>
+          </a:lnRef>
+          <a:fillRef idx="0">
+            <a:schemeClr val="accent1"/>
+          </a:fillRef>
+          <a:effectRef idx="1">
+            <a:schemeClr val="accent1"/>
+          </a:effectRef>
+          <a:fontRef idx="minor">
+            <a:schemeClr val="tx1"/>
+          </a:fontRef>
+        </p:style>
+      </p:cxnSp>
+      <p:sp>
+        <p:nvSpPr>
+          <p:cNvPr id="13" name="Rectangle 12"/>
           <p:cNvSpPr/>
           <p:nvPr/>
         </p:nvSpPr>
         <p:spPr>
           <a:xfrm>
-            <a:off x="2880000" y="5400000"/>
-            <a:ext cx="3240000" cy="720000"/>
+            <a:off x="2700000" y="5328000"/>
+            <a:ext cx="3600000" cy="720000"/>
           </a:xfrm>
           <a:prstGeom prst="rect">
             <a:avLst/>
           </a:prstGeom>
           <a:solidFill>
-            <a:srgbClr val="FFE0B2"/>
+            <a:srgbClr val="FFFFFF"/>
           </a:solidFill>
           <a:ln w="19050">
             <a:solidFill>
@@ -7386,23 +10173,37 @@
           <a:p>
             <a:pPr algn="ctr"/>
             <a:r>
-              <a:rPr sz="1000"/>
-              <a:t>調理中の食品
-（被計測対象）</a:t>
-            </a:r>
-          </a:p>
-        </p:txBody>
-      </p:sp>
-      <p:sp>
-        <p:nvSpPr>
-          <p:cNvPr id="11" name="TextBox 10"/>
+              <a:rPr sz="1000" b="0">
+                <a:solidFill>
+                  <a:srgbClr val="000000"/>
+                </a:solidFill>
+              </a:rPr>
+              <a:t>調理中の食品</a:t>
+            </a:r>
+          </a:p>
+          <a:p>
+            <a:pPr algn="ctr"/>
+            <a:r>
+              <a:rPr sz="1000" b="0">
+                <a:solidFill>
+                  <a:srgbClr val="000000"/>
+                </a:solidFill>
+              </a:rPr>
+              <a:t>(被計測対象)</a:t>
+            </a:r>
+          </a:p>
+        </p:txBody>
+      </p:sp>
+      <p:sp>
+        <p:nvSpPr>
+          <p:cNvPr id="14" name="TextBox 13"/>
           <p:cNvSpPr txBox="1"/>
           <p:nvPr/>
         </p:nvSpPr>
         <p:spPr>
           <a:xfrm>
-            <a:off x="360000" y="3420000"/>
-            <a:ext cx="2520000" cy="720000"/>
+            <a:off x="360000" y="3060000"/>
+            <a:ext cx="2340000" cy="900000"/>
           </a:xfrm>
           <a:prstGeom prst="rect">
             <a:avLst/>
@@ -7417,12 +10218,67 @@
           <a:p>
             <a:pPr algn="l"/>
             <a:r>
-              <a:rPr sz="800" b="0"/>
-              <a:t>計測距離:
-数cm〜10cm
-照明:
-白色LED内蔵
-(照明条件統一)</a:t>
+              <a:rPr sz="800" b="0">
+                <a:solidFill>
+                  <a:srgbClr val="000000"/>
+                </a:solidFill>
+              </a:rPr>
+              <a:t>計測距離:</a:t>
+            </a:r>
+          </a:p>
+          <a:p>
+            <a:pPr algn="l"/>
+            <a:r>
+              <a:rPr sz="800" b="0">
+                <a:solidFill>
+                  <a:srgbClr val="000000"/>
+                </a:solidFill>
+              </a:rPr>
+              <a:t>数cm - 10cm</a:t>
+            </a:r>
+          </a:p>
+          <a:p>
+            <a:pPr algn="l"/>
+            <a:r>
+              <a:rPr sz="800" b="0">
+                <a:solidFill>
+                  <a:srgbClr val="000000"/>
+                </a:solidFill>
+              </a:rPr>
+              <a:t/>
+            </a:r>
+          </a:p>
+          <a:p>
+            <a:pPr algn="l"/>
+            <a:r>
+              <a:rPr sz="800" b="0">
+                <a:solidFill>
+                  <a:srgbClr val="000000"/>
+                </a:solidFill>
+              </a:rPr>
+              <a:t>照明:</a:t>
+            </a:r>
+          </a:p>
+          <a:p>
+            <a:pPr algn="l"/>
+            <a:r>
+              <a:rPr sz="800" b="0">
+                <a:solidFill>
+                  <a:srgbClr val="000000"/>
+                </a:solidFill>
+              </a:rPr>
+              <a:t>白色LED内蔵</a:t>
+            </a:r>
+          </a:p>
+          <a:p>
+            <a:pPr algn="l"/>
+            <a:r>
+              <a:rPr sz="800" b="0">
+                <a:solidFill>
+                  <a:srgbClr val="000000"/>
+                </a:solidFill>
+              </a:rPr>
+              <a:t>(照明条件を統一)</a:t>
             </a:r>
           </a:p>
         </p:txBody>
@@ -7454,7 +10310,7 @@
         <p:spPr>
           <a:xfrm>
             <a:off x="360000" y="180000"/>
-            <a:ext cx="6480000" cy="540000"/>
+            <a:ext cx="8280000" cy="540000"/>
           </a:xfrm>
           <a:prstGeom prst="rect">
             <a:avLst/>
@@ -7469,8 +10325,12 @@
           <a:p>
             <a:pPr algn="ctr"/>
             <a:r>
-              <a:rPr sz="1400" b="1"/>
-              <a:t>【図7】ユーザーインターフェース画面遷移図</a:t>
+              <a:rPr sz="1400" b="1">
+                <a:solidFill>
+                  <a:srgbClr val="000000"/>
+                </a:solidFill>
+              </a:rPr>
+              <a:t>【図7】</a:t>
             </a:r>
           </a:p>
         </p:txBody>
@@ -7490,7 +10350,7 @@
             <a:avLst/>
           </a:prstGeom>
           <a:solidFill>
-            <a:srgbClr val="FFF2CC"/>
+            <a:srgbClr val="FFFFFF"/>
           </a:solidFill>
           <a:ln w="19050">
             <a:solidFill>
@@ -7518,15 +10378,100 @@
           <a:p>
             <a:pPr algn="l"/>
             <a:r>
-              <a:rPr sz="800"/>
-              <a:t>MENU画面
-TONGE
-■ きつね色
-■ 飴色
-■ ハシバミ色
-■ こんがり
-■ べっこう色
-■ 焦がしバター</a:t>
+              <a:rPr sz="800" b="0">
+                <a:solidFill>
+                  <a:srgbClr val="000000"/>
+                </a:solidFill>
+              </a:rPr>
+              <a:t>MENU画面</a:t>
+            </a:r>
+          </a:p>
+          <a:p>
+            <a:pPr algn="l"/>
+            <a:r>
+              <a:rPr sz="800" b="0">
+                <a:solidFill>
+                  <a:srgbClr val="000000"/>
+                </a:solidFill>
+              </a:rPr>
+              <a:t/>
+            </a:r>
+          </a:p>
+          <a:p>
+            <a:pPr algn="l"/>
+            <a:r>
+              <a:rPr sz="800" b="0">
+                <a:solidFill>
+                  <a:srgbClr val="000000"/>
+                </a:solidFill>
+              </a:rPr>
+              <a:t>TONGE</a:t>
+            </a:r>
+          </a:p>
+          <a:p>
+            <a:pPr algn="l"/>
+            <a:r>
+              <a:rPr sz="800" b="0">
+                <a:solidFill>
+                  <a:srgbClr val="000000"/>
+                </a:solidFill>
+              </a:rPr>
+              <a:t>  &gt; きつね色</a:t>
+            </a:r>
+          </a:p>
+          <a:p>
+            <a:pPr algn="l"/>
+            <a:r>
+              <a:rPr sz="800" b="0">
+                <a:solidFill>
+                  <a:srgbClr val="000000"/>
+                </a:solidFill>
+              </a:rPr>
+              <a:t>  &gt; 飴色</a:t>
+            </a:r>
+          </a:p>
+          <a:p>
+            <a:pPr algn="l"/>
+            <a:r>
+              <a:rPr sz="800" b="0">
+                <a:solidFill>
+                  <a:srgbClr val="000000"/>
+                </a:solidFill>
+              </a:rPr>
+              <a:t>  &gt; ハシバミ色</a:t>
+            </a:r>
+          </a:p>
+          <a:p>
+            <a:pPr algn="l"/>
+            <a:r>
+              <a:rPr sz="800" b="0">
+                <a:solidFill>
+                  <a:srgbClr val="000000"/>
+                </a:solidFill>
+              </a:rPr>
+              <a:t>  &gt; こんがり</a:t>
+            </a:r>
+          </a:p>
+          <a:p>
+            <a:pPr algn="l"/>
+            <a:r>
+              <a:rPr sz="800" b="0">
+                <a:solidFill>
+                  <a:srgbClr val="000000"/>
+                </a:solidFill>
+              </a:rPr>
+              <a:t>  &gt; べっこう色</a:t>
+            </a:r>
+          </a:p>
+          <a:p>
+            <a:pPr algn="l"/>
+            <a:r>
+              <a:rPr sz="800" b="0">
+                <a:solidFill>
+                  <a:srgbClr val="000000"/>
+                </a:solidFill>
+              </a:rPr>
+              <a:t>  &gt; 焦がしバター</a:t>
             </a:r>
           </a:p>
         </p:txBody>
@@ -7546,7 +10491,7 @@
             <a:avLst/>
           </a:prstGeom>
           <a:solidFill>
-            <a:srgbClr val="DBE5F1"/>
+            <a:srgbClr val="FFFFFF"/>
           </a:solidFill>
           <a:ln w="19050">
             <a:solidFill>
@@ -7574,12 +10519,78 @@
           <a:p>
             <a:pPr algn="l"/>
             <a:r>
-              <a:rPr sz="800"/>
-              <a:t>CALIBRATE画面
-白い面を
-センサーに
-かざしてください
-[タッチで開始]</a:t>
+              <a:rPr sz="800" b="0">
+                <a:solidFill>
+                  <a:srgbClr val="000000"/>
+                </a:solidFill>
+              </a:rPr>
+              <a:t>CALIBRATE画面</a:t>
+            </a:r>
+          </a:p>
+          <a:p>
+            <a:pPr algn="l"/>
+            <a:r>
+              <a:rPr sz="800" b="0">
+                <a:solidFill>
+                  <a:srgbClr val="000000"/>
+                </a:solidFill>
+              </a:rPr>
+              <a:t/>
+            </a:r>
+          </a:p>
+          <a:p>
+            <a:pPr algn="l"/>
+            <a:r>
+              <a:rPr sz="800" b="0">
+                <a:solidFill>
+                  <a:srgbClr val="000000"/>
+                </a:solidFill>
+              </a:rPr>
+              <a:t>白い面を</a:t>
+            </a:r>
+          </a:p>
+          <a:p>
+            <a:pPr algn="l"/>
+            <a:r>
+              <a:rPr sz="800" b="0">
+                <a:solidFill>
+                  <a:srgbClr val="000000"/>
+                </a:solidFill>
+              </a:rPr>
+              <a:t>センサーに</a:t>
+            </a:r>
+          </a:p>
+          <a:p>
+            <a:pPr algn="l"/>
+            <a:r>
+              <a:rPr sz="800" b="0">
+                <a:solidFill>
+                  <a:srgbClr val="000000"/>
+                </a:solidFill>
+              </a:rPr>
+              <a:t>かざしてください</a:t>
+            </a:r>
+          </a:p>
+          <a:p>
+            <a:pPr algn="l"/>
+            <a:r>
+              <a:rPr sz="800" b="0">
+                <a:solidFill>
+                  <a:srgbClr val="000000"/>
+                </a:solidFill>
+              </a:rPr>
+              <a:t/>
+            </a:r>
+          </a:p>
+          <a:p>
+            <a:pPr algn="l"/>
+            <a:r>
+              <a:rPr sz="800" b="0">
+                <a:solidFill>
+                  <a:srgbClr val="000000"/>
+                </a:solidFill>
+              </a:rPr>
+              <a:t>[タッチで開始]</a:t>
             </a:r>
           </a:p>
         </p:txBody>
@@ -7599,7 +10610,7 @@
             <a:avLst/>
           </a:prstGeom>
           <a:solidFill>
-            <a:srgbClr val="E2EFDA"/>
+            <a:srgbClr val="FFFFFF"/>
           </a:solidFill>
           <a:ln w="19050">
             <a:solidFill>
@@ -7627,14 +10638,111 @@
           <a:p>
             <a:pPr algn="l"/>
             <a:r>
-              <a:rPr sz="800"/>
-              <a:t>MONITORING画面
-■Now  ■Target
-dE: 15.2
-████████░░░ 62%
-L*=62 a*=11 b*=35
-[トレンドグラフ]
-[タッチ:停止]</a:t>
+              <a:rPr sz="800" b="0">
+                <a:solidFill>
+                  <a:srgbClr val="000000"/>
+                </a:solidFill>
+              </a:rPr>
+              <a:t>MONITORING画面</a:t>
+            </a:r>
+          </a:p>
+          <a:p>
+            <a:pPr algn="l"/>
+            <a:r>
+              <a:rPr sz="800" b="0">
+                <a:solidFill>
+                  <a:srgbClr val="000000"/>
+                </a:solidFill>
+              </a:rPr>
+              <a:t/>
+            </a:r>
+          </a:p>
+          <a:p>
+            <a:pPr algn="l"/>
+            <a:r>
+              <a:rPr sz="800" b="0">
+                <a:solidFill>
+                  <a:srgbClr val="000000"/>
+                </a:solidFill>
+              </a:rPr>
+              <a:t>計測色:   目標色:</a:t>
+            </a:r>
+          </a:p>
+          <a:p>
+            <a:pPr algn="l"/>
+            <a:r>
+              <a:rPr sz="800" b="0">
+                <a:solidFill>
+                  <a:srgbClr val="000000"/>
+                </a:solidFill>
+              </a:rPr>
+              <a:t>dE: 15.2</a:t>
+            </a:r>
+          </a:p>
+          <a:p>
+            <a:pPr algn="l"/>
+            <a:r>
+              <a:rPr sz="800" b="0">
+                <a:solidFill>
+                  <a:srgbClr val="000000"/>
+                </a:solidFill>
+              </a:rPr>
+              <a:t>[========&gt;        ] 62%</a:t>
+            </a:r>
+          </a:p>
+          <a:p>
+            <a:pPr algn="l"/>
+            <a:r>
+              <a:rPr sz="800" b="0">
+                <a:solidFill>
+                  <a:srgbClr val="000000"/>
+                </a:solidFill>
+              </a:rPr>
+              <a:t/>
+            </a:r>
+          </a:p>
+          <a:p>
+            <a:pPr algn="l"/>
+            <a:r>
+              <a:rPr sz="800" b="0">
+                <a:solidFill>
+                  <a:srgbClr val="000000"/>
+                </a:solidFill>
+              </a:rPr>
+              <a:t>L*=62  a*=11  b*=35</a:t>
+            </a:r>
+          </a:p>
+          <a:p>
+            <a:pPr algn="l"/>
+            <a:r>
+              <a:rPr sz="800" b="0">
+                <a:solidFill>
+                  <a:srgbClr val="000000"/>
+                </a:solidFill>
+              </a:rPr>
+              <a:t>[トレンドグラフ]</a:t>
+            </a:r>
+          </a:p>
+          <a:p>
+            <a:pPr algn="l"/>
+            <a:r>
+              <a:rPr sz="800" b="0">
+                <a:solidFill>
+                  <a:srgbClr val="000000"/>
+                </a:solidFill>
+              </a:rPr>
+              <a:t/>
+            </a:r>
+          </a:p>
+          <a:p>
+            <a:pPr algn="l"/>
+            <a:r>
+              <a:rPr sz="800" b="0">
+                <a:solidFill>
+                  <a:srgbClr val="000000"/>
+                </a:solidFill>
+              </a:rPr>
+              <a:t>[タッチ: 停止]</a:t>
             </a:r>
           </a:p>
         </p:txBody>
@@ -7654,7 +10762,7 @@
             <a:avLst/>
           </a:prstGeom>
           <a:solidFill>
-            <a:srgbClr val="C6EFCE"/>
+            <a:srgbClr val="FFFFFF"/>
           </a:solidFill>
           <a:ln w="19050">
             <a:solidFill>
@@ -7682,13 +10790,100 @@
           <a:p>
             <a:pPr algn="l"/>
             <a:r>
-              <a:rPr sz="800"/>
-              <a:t>REACHED画面
-きつね色
-到達！
-Time: 05:23
-dE: 4.8
-アラーム鳴動</a:t>
+              <a:rPr sz="800" b="0">
+                <a:solidFill>
+                  <a:srgbClr val="000000"/>
+                </a:solidFill>
+              </a:rPr>
+              <a:t>REACHED画面</a:t>
+            </a:r>
+          </a:p>
+          <a:p>
+            <a:pPr algn="l"/>
+            <a:r>
+              <a:rPr sz="800" b="0">
+                <a:solidFill>
+                  <a:srgbClr val="000000"/>
+                </a:solidFill>
+              </a:rPr>
+              <a:t/>
+            </a:r>
+          </a:p>
+          <a:p>
+            <a:pPr algn="l"/>
+            <a:r>
+              <a:rPr sz="800" b="0">
+                <a:solidFill>
+                  <a:srgbClr val="000000"/>
+                </a:solidFill>
+              </a:rPr>
+              <a:t>きつね色</a:t>
+            </a:r>
+          </a:p>
+          <a:p>
+            <a:pPr algn="l"/>
+            <a:r>
+              <a:rPr sz="800" b="0">
+                <a:solidFill>
+                  <a:srgbClr val="000000"/>
+                </a:solidFill>
+              </a:rPr>
+              <a:t>到達!</a:t>
+            </a:r>
+          </a:p>
+          <a:p>
+            <a:pPr algn="l"/>
+            <a:r>
+              <a:rPr sz="800" b="0">
+                <a:solidFill>
+                  <a:srgbClr val="000000"/>
+                </a:solidFill>
+              </a:rPr>
+              <a:t/>
+            </a:r>
+          </a:p>
+          <a:p>
+            <a:pPr algn="l"/>
+            <a:r>
+              <a:rPr sz="800" b="0">
+                <a:solidFill>
+                  <a:srgbClr val="000000"/>
+                </a:solidFill>
+              </a:rPr>
+              <a:t>Time: 05:23</a:t>
+            </a:r>
+          </a:p>
+          <a:p>
+            <a:pPr algn="l"/>
+            <a:r>
+              <a:rPr sz="800" b="0">
+                <a:solidFill>
+                  <a:srgbClr val="000000"/>
+                </a:solidFill>
+              </a:rPr>
+              <a:t>dE: 4.8</a:t>
+            </a:r>
+          </a:p>
+          <a:p>
+            <a:pPr algn="l"/>
+            <a:r>
+              <a:rPr sz="800" b="0">
+                <a:solidFill>
+                  <a:srgbClr val="000000"/>
+                </a:solidFill>
+              </a:rPr>
+              <a:t/>
+            </a:r>
+          </a:p>
+          <a:p>
+            <a:pPr algn="l"/>
+            <a:r>
+              <a:rPr sz="800" b="0">
+                <a:solidFill>
+                  <a:srgbClr val="000000"/>
+                </a:solidFill>
+              </a:rPr>
+              <a:t>アラーム鳴動</a:t>
             </a:r>
           </a:p>
         </p:txBody>
@@ -7701,8 +10896,8 @@
         </p:nvSpPr>
         <p:spPr>
           <a:xfrm>
-            <a:off x="2340000" y="1620000"/>
-            <a:ext cx="1260000" cy="216000"/>
+            <a:off x="2448000" y="1620000"/>
+            <a:ext cx="1080000" cy="216000"/>
           </a:xfrm>
           <a:prstGeom prst="rect">
             <a:avLst/>
@@ -7717,8 +10912,12 @@
           <a:p>
             <a:pPr algn="l"/>
             <a:r>
-              <a:rPr sz="800" b="0"/>
-              <a:t>長押し →</a:t>
+              <a:rPr sz="800" b="0">
+                <a:solidFill>
+                  <a:srgbClr val="000000"/>
+                </a:solidFill>
+              </a:rPr>
+              <a:t>長押し -&gt;</a:t>
             </a:r>
           </a:p>
         </p:txBody>
@@ -7731,7 +10930,7 @@
         </p:nvCxnSpPr>
         <p:spPr>
           <a:xfrm>
-            <a:off x="2340000" y="1800000"/>
+            <a:off x="2340000" y="1872000"/>
             <a:ext cx="1260000" cy="0"/>
           </a:xfrm>
           <a:prstGeom prst="line">
@@ -7741,6 +10940,7 @@
             <a:solidFill>
               <a:srgbClr val="000000"/>
             </a:solidFill>
+            <a:tailEnd type="triangle" w="med" len="med"/>
           </a:ln>
         </p:spPr>
         <p:style>
@@ -7766,7 +10966,7 @@
         </p:nvSpPr>
         <p:spPr>
           <a:xfrm>
-            <a:off x="2880000" y="2808000"/>
+            <a:off x="2951999" y="2808000"/>
             <a:ext cx="1080000" cy="216000"/>
           </a:xfrm>
           <a:prstGeom prst="rect">
@@ -7782,8 +10982,12 @@
           <a:p>
             <a:pPr algn="l"/>
             <a:r>
-              <a:rPr sz="800" b="0"/>
-              <a:t>タッチ ↓</a:t>
+              <a:rPr sz="800" b="0">
+                <a:solidFill>
+                  <a:srgbClr val="000000"/>
+                </a:solidFill>
+              </a:rPr>
+              <a:t>タッチ</a:t>
             </a:r>
           </a:p>
         </p:txBody>
@@ -7806,6 +11010,7 @@
             <a:solidFill>
               <a:srgbClr val="000000"/>
             </a:solidFill>
+            <a:tailEnd type="triangle" w="med" len="med"/>
           </a:ln>
         </p:spPr>
         <p:style>
@@ -7831,7 +11036,7 @@
         </p:nvSpPr>
         <p:spPr>
           <a:xfrm>
-            <a:off x="5580000" y="3960000"/>
+            <a:off x="5652000" y="3888000"/>
             <a:ext cx="1260000" cy="216000"/>
           </a:xfrm>
           <a:prstGeom prst="rect">
@@ -7847,8 +11052,12 @@
           <a:p>
             <a:pPr algn="l"/>
             <a:r>
-              <a:rPr sz="800" b="0"/>
-              <a:t>ΔE&lt;閾値 →</a:t>
+              <a:rPr sz="800" b="0">
+                <a:solidFill>
+                  <a:srgbClr val="000000"/>
+                </a:solidFill>
+              </a:rPr>
+              <a:t>ΔE&lt;閾値 -&gt;</a:t>
             </a:r>
           </a:p>
         </p:txBody>
@@ -7871,6 +11080,7 @@
             <a:solidFill>
               <a:srgbClr val="000000"/>
             </a:solidFill>
+            <a:tailEnd type="triangle" w="med" len="med"/>
           </a:ln>
         </p:spPr>
         <p:style>
@@ -7896,8 +11106,8 @@
         </p:nvSpPr>
         <p:spPr>
           <a:xfrm>
-            <a:off x="1800000" y="5220000"/>
-            <a:ext cx="2160000" cy="216000"/>
+            <a:off x="3600000" y="5580000"/>
+            <a:ext cx="2880000" cy="216000"/>
           </a:xfrm>
           <a:prstGeom prst="rect">
             <a:avLst/>
@@ -7912,8 +11122,12 @@
           <a:p>
             <a:pPr algn="l"/>
             <a:r>
-              <a:rPr sz="800" b="0"/>
-              <a:t>← タッチ</a:t>
+              <a:rPr sz="800" b="0">
+                <a:solidFill>
+                  <a:srgbClr val="000000"/>
+                </a:solidFill>
+              </a:rPr>
+              <a:t>&lt;-- タッチ: メニューに戻る</a:t>
             </a:r>
           </a:p>
         </p:txBody>
@@ -7925,9 +11139,9 @@
           <p:nvPr/>
         </p:nvCxnSpPr>
         <p:spPr>
-          <a:xfrm flipH="1" flipV="1">
-            <a:off x="2340000" y="3240000"/>
-            <a:ext cx="4500000" cy="1800000"/>
+          <a:xfrm>
+            <a:off x="7740000" y="5040000"/>
+            <a:ext cx="0" cy="720000"/>
           </a:xfrm>
           <a:prstGeom prst="line">
             <a:avLst/>
@@ -7953,36 +11167,41 @@
           </a:fontRef>
         </p:style>
       </p:cxnSp>
-      <p:sp>
-        <p:nvSpPr>
-          <p:cNvPr id="15" name="TextBox 14"/>
-          <p:cNvSpPr txBox="1"/>
-          <p:nvPr/>
-        </p:nvSpPr>
-        <p:spPr>
-          <a:xfrm>
-            <a:off x="1440000" y="4320000"/>
-            <a:ext cx="1440000" cy="216000"/>
-          </a:xfrm>
-          <a:prstGeom prst="rect">
-            <a:avLst/>
-          </a:prstGeom>
-          <a:noFill/>
-        </p:spPr>
-        <p:txBody>
-          <a:bodyPr wrap="square">
-            <a:spAutoFit/>
-          </a:bodyPr>
-          <a:lstStyle/>
-          <a:p>
-            <a:pPr algn="l"/>
-            <a:r>
-              <a:rPr sz="700" b="0"/>
-              <a:t>タッチ(停止)</a:t>
-            </a:r>
-          </a:p>
-        </p:txBody>
-      </p:sp>
+      <p:cxnSp>
+        <p:nvCxnSpPr>
+          <p:cNvPr id="15" name="Connector 14"/>
+          <p:cNvCxnSpPr/>
+          <p:nvPr/>
+        </p:nvCxnSpPr>
+        <p:spPr>
+          <a:xfrm flipH="1">
+            <a:off x="1260000" y="5760000"/>
+            <a:ext cx="6480000" cy="0"/>
+          </a:xfrm>
+          <a:prstGeom prst="line">
+            <a:avLst/>
+          </a:prstGeom>
+          <a:ln w="19050">
+            <a:solidFill>
+              <a:srgbClr val="000000"/>
+            </a:solidFill>
+          </a:ln>
+        </p:spPr>
+        <p:style>
+          <a:lnRef idx="2">
+            <a:schemeClr val="accent1"/>
+          </a:lnRef>
+          <a:fillRef idx="0">
+            <a:schemeClr val="accent1"/>
+          </a:fillRef>
+          <a:effectRef idx="1">
+            <a:schemeClr val="accent1"/>
+          </a:effectRef>
+          <a:fontRef idx="minor">
+            <a:schemeClr val="tx1"/>
+          </a:fontRef>
+        </p:style>
+      </p:cxnSp>
       <p:cxnSp>
         <p:nvCxnSpPr>
           <p:cNvPr id="16" name="Connector 15"/>
@@ -7990,9 +11209,9 @@
           <p:nvPr/>
         </p:nvCxnSpPr>
         <p:spPr>
-          <a:xfrm flipH="1" flipV="1">
-            <a:off x="2340000" y="3240000"/>
-            <a:ext cx="1260000" cy="1080000"/>
+          <a:xfrm flipV="1">
+            <a:off x="1260000" y="3240000"/>
+            <a:ext cx="0" cy="2520000"/>
           </a:xfrm>
           <a:prstGeom prst="line">
             <a:avLst/>
@@ -8001,6 +11220,77 @@
             <a:solidFill>
               <a:srgbClr val="000000"/>
             </a:solidFill>
+            <a:tailEnd type="triangle" w="med" len="med"/>
+          </a:ln>
+        </p:spPr>
+        <p:style>
+          <a:lnRef idx="2">
+            <a:schemeClr val="accent1"/>
+          </a:lnRef>
+          <a:fillRef idx="0">
+            <a:schemeClr val="accent1"/>
+          </a:fillRef>
+          <a:effectRef idx="1">
+            <a:schemeClr val="accent1"/>
+          </a:effectRef>
+          <a:fontRef idx="minor">
+            <a:schemeClr val="tx1"/>
+          </a:fontRef>
+        </p:style>
+      </p:cxnSp>
+      <p:sp>
+        <p:nvSpPr>
+          <p:cNvPr id="17" name="TextBox 16"/>
+          <p:cNvSpPr txBox="1"/>
+          <p:nvPr/>
+        </p:nvSpPr>
+        <p:spPr>
+          <a:xfrm>
+            <a:off x="1800000" y="4140000"/>
+            <a:ext cx="1440000" cy="216000"/>
+          </a:xfrm>
+          <a:prstGeom prst="rect">
+            <a:avLst/>
+          </a:prstGeom>
+          <a:noFill/>
+        </p:spPr>
+        <p:txBody>
+          <a:bodyPr wrap="square">
+            <a:spAutoFit/>
+          </a:bodyPr>
+          <a:lstStyle/>
+          <a:p>
+            <a:pPr algn="l"/>
+            <a:r>
+              <a:rPr sz="700" b="0">
+                <a:solidFill>
+                  <a:srgbClr val="000000"/>
+                </a:solidFill>
+              </a:rPr>
+              <a:t>タッチ(停止)</a:t>
+            </a:r>
+          </a:p>
+        </p:txBody>
+      </p:sp>
+      <p:cxnSp>
+        <p:nvCxnSpPr>
+          <p:cNvPr id="18" name="Connector 17"/>
+          <p:cNvCxnSpPr/>
+          <p:nvPr/>
+        </p:nvCxnSpPr>
+        <p:spPr>
+          <a:xfrm flipH="1" flipV="1">
+            <a:off x="2340000" y="3240000"/>
+            <a:ext cx="1260000" cy="1080000"/>
+          </a:xfrm>
+          <a:prstGeom prst="line">
+            <a:avLst/>
+          </a:prstGeom>
+          <a:ln w="19050">
+            <a:solidFill>
+              <a:srgbClr val="000000"/>
+            </a:solidFill>
+            <a:tailEnd type="triangle" w="med" len="med"/>
           </a:ln>
         </p:spPr>
         <p:style>
